--- a/slides/08 Angry Birds.pptx
+++ b/slides/08 Angry Birds.pptx
@@ -40,7 +40,6 @@
     <p:sldId id="293" r:id="rId52"/>
     <p:sldId id="313" r:id="rId40"/>
     <p:sldId id="294" r:id="rId53"/>
-    <p:sldId id="296" r:id="rId55"/>
   </p:sldIdLst>
   <p:sldSz cy="5143500" cx="9144000"/>
   <p:notesSz cx="6858000" cy="9144000"/>
@@ -2778,64 +2777,6 @@
           <a:p>
             <a:r>
               <a:t>Say: the site explains the ideas, the README helps you find them in the code, the slides are for today.</a:t>
-            </a:r>
-          </a:p>
-        </p:txBody>
-      </p:sp>
-    </p:spTree>
-  </p:cSld>
-  <p:clrMapOvr>
-    <a:masterClrMapping/>
-  </p:clrMapOvr>
-</p:notes>
-</file>
-
-<file path=ppt/notesSlides/notesSlide6.xml><?xml version="1.0" encoding="utf-8"?>
-<p:notes xmlns:a="http://schemas.openxmlformats.org/drawingml/2006/main" xmlns:p="http://schemas.openxmlformats.org/presentationml/2006/main" xmlns:r="http://schemas.openxmlformats.org/officeDocument/2006/relationships">
-  <p:cSld>
-    <p:spTree>
-      <p:nvGrpSpPr>
-        <p:cNvPr id="1" name=""/>
-        <p:cNvGrpSpPr/>
-        <p:nvPr/>
-      </p:nvGrpSpPr>
-      <p:grpSpPr>
-        <a:xfrm>
-          <a:off x="0" y="0"/>
-          <a:ext cx="0" cy="0"/>
-          <a:chOff x="0" y="0"/>
-          <a:chExt cx="0" cy="0"/>
-        </a:xfrm>
-      </p:grpSpPr>
-      <p:sp>
-        <p:nvSpPr>
-          <p:cNvPr id="2" name="Slide Image Placeholder 1"/>
-          <p:cNvSpPr>
-            <a:spLocks noGrp="1"/>
-          </p:cNvSpPr>
-          <p:nvPr>
-            <p:ph type="sldImg" idx="2"/>
-          </p:nvPr>
-        </p:nvSpPr>
-        <p:spPr/>
-      </p:sp>
-      <p:sp>
-        <p:nvSpPr>
-          <p:cNvPr id="3" name="Notes Placeholder 2"/>
-          <p:cNvSpPr>
-            <a:spLocks noGrp="1"/>
-          </p:cNvSpPr>
-          <p:nvPr>
-            <p:ph type="body" idx="1"/>
-          </p:nvPr>
-        </p:nvSpPr>
-        <p:spPr/>
-        <p:txBody>
-          <a:bodyPr/>
-          <a:lstStyle/>
-          <a:p>
-            <a:r>
-              <a:t>Next milestone by session 09: the self-review. If you use a library, where does it leak into your code?</a:t>
             </a:r>
           </a:p>
         </p:txBody>
@@ -17059,163 +17000,6 @@
 </p:sld>
 </file>
 
-<file path=ppt/slides/slide33.xml><?xml version="1.0" encoding="utf-8"?>
-<p:sld xmlns:a="http://schemas.openxmlformats.org/drawingml/2006/main" xmlns:r="http://schemas.openxmlformats.org/officeDocument/2006/relationships" xmlns:mc="http://schemas.openxmlformats.org/markup-compatibility/2006" xmlns:mv="urn:schemas-microsoft-com:mac:vml" xmlns:p="http://schemas.openxmlformats.org/presentationml/2006/main" xmlns:c="http://schemas.openxmlformats.org/drawingml/2006/chart" xmlns:dgm="http://schemas.openxmlformats.org/drawingml/2006/diagram" xmlns:o="urn:schemas-microsoft-com:office:office" xmlns:v="urn:schemas-microsoft-com:vml" xmlns:pvml="urn:schemas-microsoft-com:office:powerpoint" xmlns:com="http://schemas.openxmlformats.org/drawingml/2006/compatibility" xmlns:p14="http://schemas.microsoft.com/office/powerpoint/2010/main" xmlns:p15="http://schemas.microsoft.com/office/powerpoint/2012/main" xmlns:ahyp="http://schemas.microsoft.com/office/drawing/2018/hyperlinkcolor">
-  <p:cSld>
-    <p:spTree>
-      <p:nvGrpSpPr>
-        <p:cNvPr id="56" name="Shape 56"/>
-        <p:cNvGrpSpPr/>
-        <p:nvPr/>
-      </p:nvGrpSpPr>
-      <p:grpSpPr>
-        <a:xfrm>
-          <a:off x="0" y="0"/>
-          <a:ext cx="0" cy="0"/>
-          <a:chOff x="0" y="0"/>
-          <a:chExt cx="0" cy="0"/>
-        </a:xfrm>
-      </p:grpSpPr>
-      <p:sp>
-        <p:nvSpPr>
-          <p:cNvPr id="57" name="Google Shape;57;p12"/>
-          <p:cNvSpPr txBox="1"/>
-          <p:nvPr>
-            <p:ph type="title"/>
-          </p:nvPr>
-        </p:nvSpPr>
-        <p:spPr>
-          <a:xfrm>
-            <a:off x="311700" y="195615"/>
-            <a:ext cx="8520600" cy="572700"/>
-          </a:xfrm>
-          <a:prstGeom prst="rect">
-            <a:avLst/>
-          </a:prstGeom>
-        </p:spPr>
-        <p:txBody>
-          <a:bodyPr anchorCtr="0" anchor="t" bIns="91425" lIns="91425" spcFirstLastPara="1" rIns="91425" wrap="square" tIns="91425">
-            <a:normAutofit fontScale="90000"/>
-          </a:bodyPr>
-          <a:lstStyle/>
-          <a:p>
-            <a:pPr indent="0" lvl="0" marL="0" rtl="0" algn="l">
-              <a:spcBef>
-                <a:spcPts val="0"/>
-              </a:spcBef>
-              <a:spcAft>
-                <a:spcPts val="0"/>
-              </a:spcAft>
-              <a:buNone/>
-            </a:pPr>
-            <a:r>
-              <a:rPr lang="en"/>
-              <a:t>Your Course Project</a:t>
-            </a:r>
-            <a:endParaRPr/>
-          </a:p>
-        </p:txBody>
-      </p:sp>
-      <p:sp>
-        <p:nvSpPr>
-          <p:cNvPr id="58" name="Google Shape;58;p12"/>
-          <p:cNvSpPr txBox="1"/>
-          <p:nvPr>
-            <p:ph idx="1" type="body"/>
-          </p:nvPr>
-        </p:nvSpPr>
-        <p:spPr>
-          <a:xfrm>
-            <a:off x="311700" y="885950"/>
-            <a:ext cx="8520600" cy="4023300"/>
-          </a:xfrm>
-          <a:prstGeom prst="rect">
-            <a:avLst/>
-          </a:prstGeom>
-        </p:spPr>
-        <p:txBody>
-          <a:bodyPr anchorCtr="0" anchor="t" bIns="91425" lIns="91425" spcFirstLastPara="1" rIns="91425" wrap="square" tIns="91425">
-            <a:normAutofit/>
-          </a:bodyPr>
-          <a:lstStyle/>
-          <a:p>
-            <a:pPr indent="-330200" lvl="0" marL="457200" rtl="0" algn="l">
-              <a:spcBef>
-                <a:spcPts val="0"/>
-              </a:spcBef>
-              <a:spcAft>
-                <a:spcPts val="0"/>
-              </a:spcAft>
-              <a:buSzPts val="1600"/>
-              <a:buChar char="●"/>
-            </a:pPr>
-            <a:r>
-              <a:rPr lang="en"/>
-              <a:t>Next milestone, by session 09: self-review</a:t>
-            </a:r>
-            <a:endParaRPr/>
-          </a:p>
-          <a:p>
-            <a:pPr indent="-317500" lvl="1" marL="914400" rtl="0" algn="l">
-              <a:spcBef>
-                <a:spcPts val="0"/>
-              </a:spcBef>
-              <a:spcAft>
-                <a:spcPts val="0"/>
-              </a:spcAft>
-              <a:buSzPts val="1400"/>
-              <a:buChar char="○"/>
-            </a:pPr>
-            <a:r>
-              <a:rPr lang="en"/>
-              <a:t>Updated class diagram, list of patterns, event map</a:t>
-            </a:r>
-            <a:endParaRPr/>
-          </a:p>
-          <a:p>
-            <a:pPr indent="-317500" lvl="1" marL="914400" rtl="0" algn="l">
-              <a:spcBef>
-                <a:spcPts val="0"/>
-              </a:spcBef>
-              <a:spcAft>
-                <a:spcPts val="0"/>
-              </a:spcAft>
-              <a:buSzPts val="1400"/>
-              <a:buChar char="○"/>
-            </a:pPr>
-            <a:r>
-              <a:rPr lang="en"/>
-              <a:t>At least one refactoring</a:t>
-            </a:r>
-            <a:endParaRPr/>
-          </a:p>
-          <a:p>
-            <a:pPr indent="-330200" lvl="0" marL="457200" rtl="0" algn="l">
-              <a:spcBef>
-                <a:spcPts val="0"/>
-              </a:spcBef>
-              <a:spcAft>
-                <a:spcPts val="0"/>
-              </a:spcAft>
-              <a:buSzPts val="1600"/>
-              <a:buChar char="●"/>
-            </a:pPr>
-            <a:r>
-              <a:rPr lang="en"/>
-              <a:t>Using a library? Where does it leak into your code?</a:t>
-            </a:r>
-            <a:endParaRPr/>
-          </a:p>
-        </p:txBody>
-      </p:sp>
-    </p:spTree>
-  </p:cSld>
-  <p:clrMapOvr>
-    <a:masterClrMapping/>
-  </p:clrMapOvr>
-</p:sld>
-</file>
-
 <file path=ppt/slides/slide4.xml><?xml version="1.0" encoding="utf-8"?>
 <p:sld xmlns:a="http://schemas.openxmlformats.org/drawingml/2006/main" xmlns:r="http://schemas.openxmlformats.org/officeDocument/2006/relationships" xmlns:mc="http://schemas.openxmlformats.org/markup-compatibility/2006" xmlns:mv="urn:schemas-microsoft-com:mac:vml" xmlns:p="http://schemas.openxmlformats.org/presentationml/2006/main" xmlns:c="http://schemas.openxmlformats.org/drawingml/2006/chart" xmlns:dgm="http://schemas.openxmlformats.org/drawingml/2006/diagram" xmlns:o="urn:schemas-microsoft-com:office:office" xmlns:v="urn:schemas-microsoft-com:vml" xmlns:pvml="urn:schemas-microsoft-com:office:powerpoint" xmlns:com="http://schemas.openxmlformats.org/drawingml/2006/compatibility" xmlns:p14="http://schemas.microsoft.com/office/powerpoint/2010/main" xmlns:p15="http://schemas.microsoft.com/office/powerpoint/2012/main" xmlns:ahyp="http://schemas.microsoft.com/office/drawing/2018/hyperlinkcolor">
   <p:cSld>

--- a/slides/08 Angry Birds.pptx
+++ b/slides/08 Angry Birds.pptx
@@ -813,7 +813,7 @@
           <a:lstStyle/>
           <a:p>
             <a:r>
-              <a:t>Welcome. Today we build Angry Birds. The main topic: using a library behind your own interface.</a:t>
+              <a:t>Welcome. Today we build Angry Birds. The main topic: a library behind your own interface.</a:t>
             </a:r>
           </a:p>
           <a:p>
@@ -2331,7 +2331,7 @@
           <a:lstStyle/>
           <a:p>
             <a:r>
-              <a:t>The main topic: using a third-party library without letting it spread through your code. Adapter and Facade, two worlds, contact events, and Prototype.</a:t>
+              <a:t>The main topic: a library behind your own interface, so it doesn’t spread through your code. Adapter and Facade, two worlds, contact events, and Prototype.</a:t>
             </a:r>
           </a:p>
         </p:txBody>
@@ -17068,7 +17068,7 @@
         <p:spPr>
           <a:xfrm>
             <a:off x="311700" y="885950"/>
-            <a:ext cx="8520600" cy="4023300"/>
+            <a:ext cx="8520600" cy="2825496"/>
           </a:xfrm>
           <a:prstGeom prst="rect">
             <a:avLst/>
@@ -17079,6 +17079,23 @@
             <a:normAutofit/>
           </a:bodyPr>
           <a:lstStyle/>
+          <a:p>
+            <a:pPr indent="-330200" lvl="0" marL="457200" rtl="0" algn="l">
+              <a:spcBef>
+                <a:spcPts val="0"/>
+              </a:spcBef>
+              <a:spcAft>
+                <a:spcPts val="0"/>
+              </a:spcAft>
+              <a:buSzPts val="1600"/>
+              <a:buChar char="●"/>
+            </a:pPr>
+            <a:r>
+              <a:rPr lang="en" b="1"/>
+              <a:t>Main topic: A library behind your own interface</a:t>
+            </a:r>
+            <a:endParaRPr/>
+          </a:p>
           <a:p>
             <a:pPr indent="-330200" lvl="0" marL="457200" rtl="0" algn="l">
               <a:spcBef>

--- a/slides/08 Angry Birds.pptx
+++ b/slides/08 Angry Birds.pptx
@@ -1429,7 +1429,7 @@
           </a:p>
           <a:p>
             <a:r>
-              <a:t>Point back to Zelda: collected now, handled later is an event queue, and the game subscribes with += as there.</a:t>
+              <a:t>Point back to Zelda: collected now, handled later is an event queue, as students built for the sounds; here Box2D keeps the queue and PhysicsWorld drains it after each step. The game subscribes with += as in Zelda.</a:t>
             </a:r>
           </a:p>
         </p:txBody>

--- a/slides/08 Angry Birds.pptx
+++ b/slides/08 Angry Birds.pptx
@@ -813,7 +813,7 @@
           <a:lstStyle/>
           <a:p>
             <a:r>
-              <a:t>Welcome. Today we build Angry Birds. The main topic: a library behind your own interface.</a:t>
+              <a:t>Welcome. Today we build Angry Birds. The main topic: using a physics library.</a:t>
             </a:r>
           </a:p>
           <a:p>
@@ -2331,7 +2331,7 @@
           <a:lstStyle/>
           <a:p>
             <a:r>
-              <a:t>The main topic: a library behind your own interface, so it doesn’t spread through your code. Adapter and Facade, two worlds, contact events, and Prototype.</a:t>
+              <a:t>Today’s main topic is using a physics library without letting it spread through the code. Adapter and Facade, two worlds, contact events, and Prototype.</a:t>
             </a:r>
           </a:p>
         </p:txBody>
@@ -17092,7 +17092,7 @@
             </a:pPr>
             <a:r>
               <a:rPr lang="en" b="1"/>
-              <a:t>Main topic: A library behind your own interface</a:t>
+              <a:t>Main topic: Using a physics library</a:t>
             </a:r>
             <a:endParaRPr/>
           </a:p>

--- a/slides/08 Angry Birds.pptx
+++ b/slides/08 Angry Birds.pptx
@@ -1051,7 +1051,7 @@
           </a:p>
           <a:p>
             <a:r>
-              <a:t>A: Every field that refers to an object: the copy points to the same object. Sharing an unchanging sprite is fine, but sharing a physics body would make two entities one. So the clone gets its own body.</a:t>
+              <a:t>A: For every field that refers to an object, the copy points to the same object. Sharing an unchanging sprite is fine, but sharing a physics body would make two entities one. So the clone gets its own body.</a:t>
             </a:r>
           </a:p>
         </p:txBody>
@@ -1717,7 +1717,7 @@
           <a:lstStyle/>
           <a:p>
             <a:r>
-              <a:t>Make new objects by copying a configured one. A big pig is a Pig with a bigger radius, not a subclass.</a:t>
+              <a:t>Make new objects by copying a configured one. A big pig is a Pig with a bigger radius.</a:t>
             </a:r>
           </a:p>
         </p:txBody>
@@ -2126,7 +2126,7 @@
           </a:p>
           <a:p>
             <a:r>
-              <a:t>Today we build the parts that matter for the architecture, not the whole game.</a:t>
+              <a:t>Today we build the parts that matter for the architecture.</a:t>
             </a:r>
           </a:p>
         </p:txBody>
@@ -8745,7 +8745,7 @@
                   <a:srgbClr val="6C757D"/>
                 </a:solidFill>
               </a:rPr>
-              <a:t>Our language: pixels, not metres</a:t>
+              <a:t>It speaks our language, in pixels</a:t>
             </a:r>
             <a:endParaRPr/>
           </a:p>
@@ -12192,7 +12192,7 @@
                   <a:srgbClr val="DEE2E6"/>
                 </a:solidFill>
               </a:rPr>
-              <a:t>A configured entity, not in the world</a:t>
+              <a:t>A configured entity, kept outside the world</a:t>
             </a:r>
             <a:endParaRPr/>
           </a:p>
@@ -12264,7 +12264,7 @@
                   <a:srgbClr val="6C757D"/>
                 </a:solidFill>
               </a:rPr>
-              <a:t>A big pig: a Pig with a bigger radius, not a subclass</a:t>
+              <a:t>A big pig: a Pig with a bigger radius</a:t>
             </a:r>
             <a:endParaRPr/>
           </a:p>
@@ -17716,7 +17716,7 @@
             </a:pPr>
             <a:r>
               <a:rPr lang="en"/>
-              <a:t>Stacks that tip, bounce and break: we use Box2D, not our own physics.</a:t>
+              <a:t>For stacks that tip, bounce and break, we use Box2D.</a:t>
             </a:r>
             <a:endParaRPr/>
           </a:p>

--- a/slides/08 Angry Birds.pptx
+++ b/slides/08 Angry Birds.pptx
@@ -6737,7 +6737,7 @@
             </a:pPr>
             <a:r>
               <a:rPr lang="en"/>
-              <a:t>A 50-pixel block, taken as metres, is a 50-metre building: it falls in slow motion.</a:t>
+              <a:t>A 50-pixel block, taken as metres, is a 50-metre building, and it falls in slow motion.</a:t>
             </a:r>
             <a:endParaRPr/>
           </a:p>
@@ -7419,7 +7419,7 @@
             </a:pPr>
             <a:r>
               <a:rPr lang="en"/>
-              <a:t>Keep Box2D in one place: the rest of the game never sees a Box2D type.</a:t>
+              <a:t>Keep Box2D in one place, so the rest of the game never sees a Box2D type.</a:t>
             </a:r>
             <a:endParaRPr/>
           </a:p>

--- a/slides/08 Angry Birds.pptx
+++ b/slides/08 Angry Birds.pptx
@@ -15150,14 +15150,14 @@
       </p:sp>
       <p:pic>
         <p:nvPicPr>
-          <p:cNvPr id="46" name="Picture 46" descr="gif-birds.gif"/>
+          <p:cNvPr id="46" name="Picture 46" descr="angry-birds.gif"/>
           <p:cNvPicPr>
             <a:picLocks noChangeAspect="1"/>
           </p:cNvPicPr>
           <p:nvPr/>
         </p:nvPicPr>
         <p:blipFill>
-          <a:blip r:embed="rId3"/>
+          <a:blip r:embed="rId4"/>
           <a:stretch>
             <a:fillRect/>
           </a:stretch>
@@ -15165,7 +15165,7 @@
         <p:spPr>
           <a:xfrm>
             <a:off x="1677202" y="1531275"/>
-            <a:ext cx="5789596" cy="3256648"/>
+            <a:ext cx="5789596" cy="3256647"/>
           </a:xfrm>
           <a:prstGeom prst="rect">
             <a:avLst/>

--- a/slides/08 Angry Birds.pptx
+++ b/slides/08 Angry Birds.pptx
@@ -15157,15 +15157,15 @@
           <p:nvPr/>
         </p:nvPicPr>
         <p:blipFill>
-          <a:blip r:embed="rId4"/>
+          <a:blip r:embed="rId3"/>
           <a:stretch>
             <a:fillRect/>
           </a:stretch>
         </p:blipFill>
         <p:spPr>
           <a:xfrm>
-            <a:off x="1677202" y="1531275"/>
-            <a:ext cx="5789596" cy="3256647"/>
+            <a:off x="1677203" y="1531275"/>
+            <a:ext cx="5789594" cy="3256647"/>
           </a:xfrm>
           <a:prstGeom prst="rect">
             <a:avLst/>

--- a/slides/08 Angry Birds.pptx
+++ b/slides/08 Angry Birds.pptx
@@ -2682,7 +2682,7 @@
           <a:lstStyle/>
           <a:p>
             <a:r>
-              <a:t>Start from Birds4. For the TNT exercise, the question is what the facade must offer, while Box2D stays inside it.</a:t>
+              <a:t>Start from Birds4. For the explosive crate, the question is what the facade must offer, while Box2D stays inside it.</a:t>
             </a:r>
           </a:p>
         </p:txBody>
@@ -14393,7 +14393,7 @@
             </a:pPr>
             <a:r>
               <a:rPr lang="en"/>
-              <a:t>A TNT box that pushes everything nearby away</a:t>
+              <a:t>An explosive crate that pushes everything nearby away</a:t>
             </a:r>
             <a:endParaRPr/>
           </a:p>

--- a/slides/08 Angry Birds.pptx
+++ b/slides/08 Angry Birds.pptx
@@ -14,6 +14,7 @@
     <p:sldId id="258" r:id="rId8"/>
     <p:sldId id="259" r:id="rId9"/>
     <p:sldId id="297" r:id="rId56"/>
+    <p:sldId id="323" r:id="rId31"/>
     <p:sldId id="319" r:id="rId35"/>
     <p:sldId id="320" r:id="rId34"/>
     <p:sldId id="298" r:id="rId57"/>
@@ -28,9 +29,11 @@
     <p:sldId id="317" r:id="rId37"/>
     <p:sldId id="306" r:id="rId65"/>
     <p:sldId id="307" r:id="rId66"/>
+    <p:sldId id="322" r:id="rId32"/>
     <p:sldId id="308" r:id="rId67"/>
     <p:sldId id="316" r:id="rId38"/>
     <p:sldId id="309" r:id="rId68"/>
+    <p:sldId id="321" r:id="rId33"/>
     <p:sldId id="310" r:id="rId69"/>
     <p:sldId id="311" r:id="rId70"/>
     <p:sldId id="315" r:id="rId39"/>
@@ -2606,6 +2609,132 @@
 </p:notes>
 </file>
 
+<file path=ppt/notesSlides/notesSlide34.xml><?xml version="1.0" encoding="utf-8"?>
+<p:notes xmlns:a="http://schemas.openxmlformats.org/drawingml/2006/main" xmlns:p="http://schemas.openxmlformats.org/presentationml/2006/main" xmlns:r="http://schemas.openxmlformats.org/officeDocument/2006/relationships">
+  <p:cSld>
+    <p:spTree>
+      <p:nvGrpSpPr>
+        <p:cNvPr id="1" name=""/>
+        <p:cNvGrpSpPr/>
+        <p:nvPr/>
+      </p:nvGrpSpPr>
+      <p:grpSpPr>
+        <a:xfrm>
+          <a:off x="0" y="0"/>
+          <a:ext cx="0" cy="0"/>
+          <a:chOff x="0" y="0"/>
+          <a:chExt cx="0" cy="0"/>
+        </a:xfrm>
+      </p:grpSpPr>
+      <p:sp>
+        <p:nvSpPr>
+          <p:cNvPr id="2" name="Slide Image Placeholder 1"/>
+          <p:cNvSpPr>
+            <a:spLocks noGrp="1"/>
+          </p:cNvSpPr>
+          <p:nvPr>
+            <p:ph type="sldImg" idx="2"/>
+          </p:nvPr>
+        </p:nvSpPr>
+        <p:spPr/>
+      </p:sp>
+      <p:sp>
+        <p:nvSpPr>
+          <p:cNvPr id="3" name="Notes Placeholder 2"/>
+          <p:cNvSpPr>
+            <a:spLocks noGrp="1"/>
+          </p:cNvSpPr>
+          <p:nvPr>
+            <p:ph type="body" idx="1"/>
+          </p:nvPr>
+        </p:nvSpPr>
+        <p:spPr/>
+        <p:txBody>
+          <a:bodyPr/>
+          <a:lstStyle/>
+          <a:p>
+            <a:r>
+              <a:t>Hits only mark entities as destroyed. They are removed when the step and all its hits are done.</a:t>
+            </a:r>
+          </a:p>
+          <a:p>
+            <a:r>
+              <a:t>Ask: what goes wrong if the handler destroys the body? Answer: a later hit may be about it, and a list may be mid-loop.</a:t>
+            </a:r>
+          </a:p>
+        </p:txBody>
+      </p:sp>
+    </p:spTree>
+  </p:cSld>
+  <p:clrMapOvr>
+    <a:masterClrMapping/>
+  </p:clrMapOvr>
+</p:notes>
+</file>
+
+<file path=ppt/notesSlides/notesSlide35.xml><?xml version="1.0" encoding="utf-8"?>
+<p:notes xmlns:a="http://schemas.openxmlformats.org/drawingml/2006/main" xmlns:p="http://schemas.openxmlformats.org/presentationml/2006/main" xmlns:r="http://schemas.openxmlformats.org/officeDocument/2006/relationships">
+  <p:cSld>
+    <p:spTree>
+      <p:nvGrpSpPr>
+        <p:cNvPr id="1" name=""/>
+        <p:cNvGrpSpPr/>
+        <p:nvPr/>
+      </p:nvGrpSpPr>
+      <p:grpSpPr>
+        <a:xfrm>
+          <a:off x="0" y="0"/>
+          <a:ext cx="0" cy="0"/>
+          <a:chOff x="0" y="0"/>
+          <a:chExt cx="0" cy="0"/>
+        </a:xfrm>
+      </p:grpSpPr>
+      <p:sp>
+        <p:nvSpPr>
+          <p:cNvPr id="2" name="Slide Image Placeholder 1"/>
+          <p:cNvSpPr>
+            <a:spLocks noGrp="1"/>
+          </p:cNvSpPr>
+          <p:nvPr>
+            <p:ph type="sldImg" idx="2"/>
+          </p:nvPr>
+        </p:nvSpPr>
+        <p:spPr/>
+      </p:sp>
+      <p:sp>
+        <p:nvSpPr>
+          <p:cNvPr id="3" name="Notes Placeholder 2"/>
+          <p:cNvSpPr>
+            <a:spLocks noGrp="1"/>
+          </p:cNvSpPr>
+          <p:nvPr>
+            <p:ph type="body" idx="1"/>
+          </p:nvPr>
+        </p:nvSpPr>
+        <p:spPr/>
+        <p:txBody>
+          <a:bodyPr/>
+          <a:lstStyle/>
+          <a:p>
+            <a:r>
+              <a:t>Static: the ground. Kinematic: moves as you tell it, and pushes without being pushed. Dynamic: everything gravity and collisions move.</a:t>
+            </a:r>
+          </a:p>
+          <a:p>
+            <a:r>
+              <a:t>The physics samples show each one.</a:t>
+            </a:r>
+          </a:p>
+        </p:txBody>
+      </p:sp>
+    </p:spTree>
+  </p:cSld>
+  <p:clrMapOvr>
+    <a:masterClrMapping/>
+  </p:clrMapOvr>
+</p:notes>
+</file>
+
 <file path=ppt/notesSlides/notesSlide37.xml><?xml version="1.0" encoding="utf-8"?>
 <p:notes xmlns:a="http://schemas.openxmlformats.org/drawingml/2006/main" xmlns:r="http://schemas.openxmlformats.org/officeDocument/2006/relationships" xmlns:mc="http://schemas.openxmlformats.org/markup-compatibility/2006" xmlns:mv="urn:schemas-microsoft-com:mac:vml" xmlns:p="http://schemas.openxmlformats.org/presentationml/2006/main" xmlns:c="http://schemas.openxmlformats.org/drawingml/2006/chart" xmlns:dgm="http://schemas.openxmlformats.org/drawingml/2006/diagram" xmlns:o="urn:schemas-microsoft-com:office:office" xmlns:v="urn:schemas-microsoft-com:vml" xmlns:pvml="urn:schemas-microsoft-com:office:powerpoint" xmlns:com="http://schemas.openxmlformats.org/drawingml/2006/compatibility" xmlns:p14="http://schemas.microsoft.com/office/powerpoint/2010/main" xmlns:p15="http://schemas.microsoft.com/office/powerpoint/2012/main" xmlns:ahyp="http://schemas.microsoft.com/office/drawing/2018/hyperlinkcolor" showMasterPhAnim="0" showMasterSp="0">
   <p:cSld>
@@ -2789,6 +2918,69 @@
 </p:notes>
 </file>
 
+<file path=ppt/notesSlides/notesSlide6.xml><?xml version="1.0" encoding="utf-8"?>
+<p:notes xmlns:a="http://schemas.openxmlformats.org/drawingml/2006/main" xmlns:p="http://schemas.openxmlformats.org/presentationml/2006/main" xmlns:r="http://schemas.openxmlformats.org/officeDocument/2006/relationships">
+  <p:cSld>
+    <p:spTree>
+      <p:nvGrpSpPr>
+        <p:cNvPr id="1" name=""/>
+        <p:cNvGrpSpPr/>
+        <p:nvPr/>
+      </p:nvGrpSpPr>
+      <p:grpSpPr>
+        <a:xfrm>
+          <a:off x="0" y="0"/>
+          <a:ext cx="0" cy="0"/>
+          <a:chOff x="0" y="0"/>
+          <a:chExt cx="0" cy="0"/>
+        </a:xfrm>
+      </p:grpSpPr>
+      <p:sp>
+        <p:nvSpPr>
+          <p:cNvPr id="2" name="Slide Image Placeholder 1"/>
+          <p:cNvSpPr>
+            <a:spLocks noGrp="1"/>
+          </p:cNvSpPr>
+          <p:nvPr>
+            <p:ph type="sldImg" idx="2"/>
+          </p:nvPr>
+        </p:nvSpPr>
+        <p:spPr/>
+      </p:sp>
+      <p:sp>
+        <p:nvSpPr>
+          <p:cNvPr id="3" name="Notes Placeholder 2"/>
+          <p:cNvSpPr>
+            <a:spLocks noGrp="1"/>
+          </p:cNvSpPr>
+          <p:nvPr>
+            <p:ph type="body" idx="1"/>
+          </p:nvPr>
+        </p:nvSpPr>
+        <p:spPr/>
+        <p:txBody>
+          <a:bodyPr/>
+          <a:lstStyle/>
+          <a:p>
+            <a:r>
+              <a:t>MemberwiseClone copies references. Sharing the sprite is fine; sharing a body would make two blocks one.</a:t>
+            </a:r>
+          </a:p>
+          <a:p>
+            <a:r>
+              <a:t>So Clone clears the body, and Spawn makes a new one.</a:t>
+            </a:r>
+          </a:p>
+        </p:txBody>
+      </p:sp>
+    </p:spTree>
+  </p:cSld>
+  <p:clrMapOvr>
+    <a:masterClrMapping/>
+  </p:clrMapOvr>
+</p:notes>
+</file>
+
 <file path=ppt/notesSlides/notesSlide7.xml><?xml version="1.0" encoding="utf-8"?>
 <p:notes xmlns:a="http://schemas.openxmlformats.org/drawingml/2006/main" xmlns:p="http://schemas.openxmlformats.org/presentationml/2006/main" xmlns:r="http://schemas.openxmlformats.org/officeDocument/2006/relationships">
   <p:cSld>
@@ -2903,6 +3095,26 @@
           <a:p>
             <a:r>
               <a:t>Ask the question: forget one conversion; what do you see? A body in the wrong place, spinning the wrong way, or falling up.</a:t>
+            </a:r>
+          </a:p>
+          <a:p>
+            <a:r>
+              <a:t>pixels, y down,</a:t>
+            </a:r>
+          </a:p>
+          <a:p>
+            <a:r>
+              <a:t>metres, y up,</a:t>
+            </a:r>
+          </a:p>
+          <a:p>
+            <a:r>
+              <a:t>counter-clockwise</a:t>
+            </a:r>
+          </a:p>
+          <a:p>
+            <a:r>
+              <a:t>Forget one conversion. What do you see?</a:t>
             </a:r>
           </a:p>
         </p:txBody>
@@ -6712,8 +6924,8 @@
         </p:nvSpPr>
         <p:spPr>
           <a:xfrm>
-            <a:off x="311700" y="885950"/>
-            <a:ext cx="8520600" cy="521208"/>
+            <a:off x="311700" y="886968"/>
+            <a:ext cx="8520600" cy="457200"/>
           </a:xfrm>
           <a:prstGeom prst="rect">
             <a:avLst/>
@@ -6743,332 +6955,30 @@
           </a:p>
         </p:txBody>
       </p:sp>
-      <p:sp>
-        <p:nvSpPr>
-          <p:cNvPr id="295" name="Rounded Rectangle 294"/>
-          <p:cNvSpPr/>
+      <p:pic>
+        <p:nvPicPr>
+          <p:cNvPr id="295" name="Picture 294" descr="two-worlds.png"/>
+          <p:cNvPicPr>
+            <a:picLocks noChangeAspect="1"/>
+          </p:cNvPicPr>
           <p:nvPr/>
-        </p:nvSpPr>
+        </p:nvPicPr>
+        <p:blipFill>
+          <a:blip r:embed="rId3"/>
+          <a:stretch>
+            <a:fillRect/>
+          </a:stretch>
+        </p:blipFill>
         <p:spPr>
           <a:xfrm>
-            <a:off x="548640" y="1463040"/>
-            <a:ext cx="2743200" cy="914400"/>
-          </a:xfrm>
-          <a:prstGeom prst="roundRect">
-            <a:avLst>
-              <a:gd name="adj" fmla="val 12000"/>
-            </a:avLst>
-          </a:prstGeom>
-          <a:solidFill>
-            <a:srgbClr val="2E3338"/>
-          </a:solidFill>
-          <a:ln>
-            <a:noFill/>
-          </a:ln>
-          <a:effectLst/>
-        </p:spPr>
-        <p:style>
-          <a:lnRef idx="1">
-            <a:schemeClr val="accent1"/>
-          </a:lnRef>
-          <a:fillRef idx="3">
-            <a:schemeClr val="accent1"/>
-          </a:fillRef>
-          <a:effectRef idx="2">
-            <a:schemeClr val="accent1"/>
-          </a:effectRef>
-          <a:fontRef idx="minor">
-            <a:schemeClr val="lt1"/>
-          </a:fontRef>
-        </p:style>
-        <p:txBody>
-          <a:bodyPr rtlCol="0" anchor="ctr" wrap="square" lIns="73152" rIns="73152"/>
-          <a:lstStyle/>
-          <a:p>
-            <a:pPr algn="ctr"/>
-            <a:r>
-              <a:rPr sz="1600" b="1">
-                <a:solidFill>
-                  <a:srgbClr val="DEE2E6"/>
-                </a:solidFill>
-              </a:rPr>
-              <a:t>Our game</a:t>
-            </a:r>
-          </a:p>
-          <a:p>
-            <a:pPr algn="ctr"/>
-            <a:r>
-              <a:rPr sz="1400" b="0">
-                <a:solidFill>
-                  <a:srgbClr val="9AA3AB"/>
-                </a:solidFill>
-              </a:rPr>
-              <a:t>pixels, y down,</a:t>
-            </a:r>
-          </a:p>
-          <a:p>
-            <a:pPr algn="ctr"/>
-            <a:r>
-              <a:rPr sz="1400" b="0">
-                <a:solidFill>
-                  <a:srgbClr val="9AA3AB"/>
-                </a:solidFill>
-              </a:rPr>
-              <a:t>clockwise</a:t>
-            </a:r>
-          </a:p>
-        </p:txBody>
-      </p:sp>
-      <p:sp>
-        <p:nvSpPr>
-          <p:cNvPr id="296" name="Rounded Rectangle 295"/>
-          <p:cNvSpPr/>
-          <p:nvPr/>
-        </p:nvSpPr>
-        <p:spPr>
-          <a:xfrm>
-            <a:off x="5852160" y="1463040"/>
-            <a:ext cx="2743200" cy="914400"/>
-          </a:xfrm>
-          <a:prstGeom prst="roundRect">
-            <a:avLst>
-              <a:gd name="adj" fmla="val 12000"/>
-            </a:avLst>
-          </a:prstGeom>
-          <a:solidFill>
-            <a:srgbClr val="2E3338"/>
-          </a:solidFill>
-          <a:ln>
-            <a:noFill/>
-          </a:ln>
-          <a:effectLst/>
-        </p:spPr>
-        <p:style>
-          <a:lnRef idx="1">
-            <a:schemeClr val="accent1"/>
-          </a:lnRef>
-          <a:fillRef idx="3">
-            <a:schemeClr val="accent1"/>
-          </a:fillRef>
-          <a:effectRef idx="2">
-            <a:schemeClr val="accent1"/>
-          </a:effectRef>
-          <a:fontRef idx="minor">
-            <a:schemeClr val="lt1"/>
-          </a:fontRef>
-        </p:style>
-        <p:txBody>
-          <a:bodyPr rtlCol="0" anchor="ctr" wrap="square" lIns="73152" rIns="73152"/>
-          <a:lstStyle/>
-          <a:p>
-            <a:pPr algn="ctr"/>
-            <a:r>
-              <a:rPr sz="1600" b="1">
-                <a:solidFill>
-                  <a:srgbClr val="DEE2E6"/>
-                </a:solidFill>
-              </a:rPr>
-              <a:t>Box2D</a:t>
-            </a:r>
-          </a:p>
-          <a:p>
-            <a:pPr algn="ctr"/>
-            <a:r>
-              <a:rPr sz="1400" b="0">
-                <a:solidFill>
-                  <a:srgbClr val="9AA3AB"/>
-                </a:solidFill>
-              </a:rPr>
-              <a:t>metres, y up,</a:t>
-            </a:r>
-          </a:p>
-          <a:p>
-            <a:pPr algn="ctr"/>
-            <a:r>
-              <a:rPr sz="1400" b="0">
-                <a:solidFill>
-                  <a:srgbClr val="9AA3AB"/>
-                </a:solidFill>
-              </a:rPr>
-              <a:t>counter-clockwise</a:t>
-            </a:r>
-          </a:p>
-        </p:txBody>
-      </p:sp>
-      <p:cxnSp>
-        <p:nvCxnSpPr>
-          <p:cNvPr id="297" name="Connector 296"/>
-          <p:cNvCxnSpPr/>
-          <p:nvPr/>
-        </p:nvCxnSpPr>
-        <p:spPr>
-          <a:xfrm>
-            <a:off x="3337560" y="1783080"/>
-            <a:ext cx="2468880" cy="0"/>
-          </a:xfrm>
-          <a:prstGeom prst="line">
-            <a:avLst/>
-          </a:prstGeom>
-          <a:ln w="25400">
-            <a:solidFill>
-              <a:srgbClr val="D45D35"/>
-            </a:solidFill>
-            <a:tailEnd type="triangle"/>
-          </a:ln>
-        </p:spPr>
-        <p:style>
-          <a:lnRef idx="2">
-            <a:schemeClr val="accent1"/>
-          </a:lnRef>
-          <a:fillRef idx="0">
-            <a:schemeClr val="accent1"/>
-          </a:fillRef>
-          <a:effectRef idx="1">
-            <a:schemeClr val="accent1"/>
-          </a:effectRef>
-          <a:fontRef idx="minor">
-            <a:schemeClr val="tx1"/>
-          </a:fontRef>
-        </p:style>
-      </p:cxnSp>
-      <p:sp>
-        <p:nvSpPr>
-          <p:cNvPr id="298" name="TextBox 297"/>
-          <p:cNvSpPr txBox="1"/>
-          <p:nvPr/>
-        </p:nvSpPr>
-        <p:spPr>
-          <a:xfrm>
-            <a:off x="3154679" y="1490472"/>
-            <a:ext cx="2834639" cy="274320"/>
+            <a:off x="914400" y="1371600"/>
+            <a:ext cx="7315200" cy="3657600"/>
           </a:xfrm>
           <a:prstGeom prst="rect">
             <a:avLst/>
           </a:prstGeom>
-          <a:noFill/>
         </p:spPr>
-        <p:txBody>
-          <a:bodyPr wrap="square">
-            <a:spAutoFit/>
-          </a:bodyPr>
-          <a:lstStyle/>
-          <a:p>
-            <a:pPr algn="ctr"/>
-            <a:r>
-              <a:rPr sz="1100" b="0" i="0">
-                <a:solidFill>
-                  <a:srgbClr val="9AA3AB"/>
-                </a:solidFill>
-              </a:rPr>
-              <a:t>÷ 50, flip y</a:t>
-            </a:r>
-          </a:p>
-        </p:txBody>
-      </p:sp>
-      <p:cxnSp>
-        <p:nvCxnSpPr>
-          <p:cNvPr id="299" name="Connector 298"/>
-          <p:cNvCxnSpPr/>
-          <p:nvPr/>
-        </p:nvCxnSpPr>
-        <p:spPr>
-          <a:xfrm flipH="1">
-            <a:off x="3337560" y="2103120"/>
-            <a:ext cx="2468880" cy="0"/>
-          </a:xfrm>
-          <a:prstGeom prst="line">
-            <a:avLst/>
-          </a:prstGeom>
-          <a:ln w="25400">
-            <a:solidFill>
-              <a:srgbClr val="D45D35"/>
-            </a:solidFill>
-            <a:tailEnd type="triangle"/>
-          </a:ln>
-        </p:spPr>
-        <p:style>
-          <a:lnRef idx="2">
-            <a:schemeClr val="accent1"/>
-          </a:lnRef>
-          <a:fillRef idx="0">
-            <a:schemeClr val="accent1"/>
-          </a:fillRef>
-          <a:effectRef idx="1">
-            <a:schemeClr val="accent1"/>
-          </a:effectRef>
-          <a:fontRef idx="minor">
-            <a:schemeClr val="tx1"/>
-          </a:fontRef>
-        </p:style>
-      </p:cxnSp>
-      <p:sp>
-        <p:nvSpPr>
-          <p:cNvPr id="300" name="TextBox 299"/>
-          <p:cNvSpPr txBox="1"/>
-          <p:nvPr/>
-        </p:nvSpPr>
-        <p:spPr>
-          <a:xfrm>
-            <a:off x="3337560" y="2148840"/>
-            <a:ext cx="2468880" cy="274320"/>
-          </a:xfrm>
-          <a:prstGeom prst="rect">
-            <a:avLst/>
-          </a:prstGeom>
-          <a:noFill/>
-        </p:spPr>
-        <p:txBody>
-          <a:bodyPr wrap="square">
-            <a:spAutoFit/>
-          </a:bodyPr>
-          <a:lstStyle/>
-          <a:p>
-            <a:pPr algn="ctr"/>
-            <a:r>
-              <a:rPr sz="1100" b="0" i="0">
-                <a:solidFill>
-                  <a:srgbClr val="9AA3AB"/>
-                </a:solidFill>
-              </a:rPr>
-              <a:t>× 50, flip y</a:t>
-            </a:r>
-          </a:p>
-        </p:txBody>
-      </p:sp>
-      <p:sp>
-        <p:nvSpPr>
-          <p:cNvPr id="301" name="TextBox 300"/>
-          <p:cNvSpPr txBox="1"/>
-          <p:nvPr/>
-        </p:nvSpPr>
-        <p:spPr>
-          <a:xfrm>
-            <a:off x="457200" y="2834640"/>
-            <a:ext cx="8229600" cy="731520"/>
-          </a:xfrm>
-          <a:prstGeom prst="rect">
-            <a:avLst/>
-          </a:prstGeom>
-          <a:noFill/>
-        </p:spPr>
-        <p:txBody>
-          <a:bodyPr wrap="square">
-            <a:spAutoFit/>
-          </a:bodyPr>
-          <a:lstStyle/>
-          <a:p>
-            <a:pPr algn="ctr"/>
-            <a:r>
-              <a:rPr sz="1700" b="1" i="0">
-                <a:solidFill>
-                  <a:srgbClr val="DEE2E6"/>
-                </a:solidFill>
-              </a:rPr>
-              <a:t>Forget one conversion. What do you see?</a:t>
-            </a:r>
-          </a:p>
-        </p:txBody>
-      </p:sp>
+      </p:pic>
     </p:spTree>
   </p:cSld>
   <p:clrMapOvr>
@@ -17000,6 +16910,228 @@
 </p:sld>
 </file>
 
+<file path=ppt/slides/slide33.xml><?xml version="1.0" encoding="utf-8"?>
+<p:sld xmlns:a="http://schemas.openxmlformats.org/drawingml/2006/main" xmlns:p="http://schemas.openxmlformats.org/presentationml/2006/main" xmlns:r="http://schemas.openxmlformats.org/officeDocument/2006/relationships">
+  <p:cSld>
+    <p:spTree>
+      <p:nvGrpSpPr>
+        <p:cNvPr id="1" name=""/>
+        <p:cNvGrpSpPr/>
+        <p:nvPr/>
+      </p:nvGrpSpPr>
+      <p:grpSpPr/>
+      <p:sp>
+        <p:nvSpPr>
+          <p:cNvPr id="2" name="Title 1"/>
+          <p:cNvSpPr>
+            <a:spLocks noGrp="1"/>
+          </p:cNvSpPr>
+          <p:nvPr>
+            <p:ph type="title"/>
+          </p:nvPr>
+        </p:nvSpPr>
+        <p:spPr/>
+        <p:txBody>
+          <a:bodyPr/>
+          <a:lstStyle/>
+          <a:p>
+            <a:pPr indent="0" lvl="0" marL="0" rtl="0" algn="l">
+              <a:spcBef>
+                <a:spcPts val="0"/>
+              </a:spcBef>
+              <a:spcAft>
+                <a:spcPts val="0"/>
+              </a:spcAft>
+              <a:buNone/>
+            </a:pPr>
+            <a:r>
+              <a:rPr lang="en"/>
+              <a:t>A Shallow Copy</a:t>
+            </a:r>
+            <a:endParaRPr/>
+          </a:p>
+        </p:txBody>
+      </p:sp>
+      <p:pic>
+        <p:nvPicPr>
+          <p:cNvPr id="3" name="Picture 2" descr="shallow-copy.png"/>
+          <p:cNvPicPr>
+            <a:picLocks noChangeAspect="1"/>
+          </p:cNvPicPr>
+          <p:nvPr/>
+        </p:nvPicPr>
+        <p:blipFill>
+          <a:blip r:embed="rId2"/>
+          <a:stretch>
+            <a:fillRect/>
+          </a:stretch>
+        </p:blipFill>
+        <p:spPr>
+          <a:xfrm>
+            <a:off x="320039" y="1051560"/>
+            <a:ext cx="8503920" cy="3897630"/>
+          </a:xfrm>
+          <a:prstGeom prst="rect">
+            <a:avLst/>
+          </a:prstGeom>
+        </p:spPr>
+      </p:pic>
+    </p:spTree>
+  </p:cSld>
+  <p:clrMapOvr>
+    <a:masterClrMapping/>
+  </p:clrMapOvr>
+</p:sld>
+</file>
+
+<file path=ppt/slides/slide34.xml><?xml version="1.0" encoding="utf-8"?>
+<p:sld xmlns:a="http://schemas.openxmlformats.org/drawingml/2006/main" xmlns:p="http://schemas.openxmlformats.org/presentationml/2006/main" xmlns:r="http://schemas.openxmlformats.org/officeDocument/2006/relationships">
+  <p:cSld>
+    <p:spTree>
+      <p:nvGrpSpPr>
+        <p:cNvPr id="1" name=""/>
+        <p:cNvGrpSpPr/>
+        <p:nvPr/>
+      </p:nvGrpSpPr>
+      <p:grpSpPr/>
+      <p:sp>
+        <p:nvSpPr>
+          <p:cNvPr id="2" name="Title 1"/>
+          <p:cNvSpPr>
+            <a:spLocks noGrp="1"/>
+          </p:cNvSpPr>
+          <p:nvPr>
+            <p:ph type="title"/>
+          </p:nvPr>
+        </p:nvSpPr>
+        <p:spPr/>
+        <p:txBody>
+          <a:bodyPr/>
+          <a:lstStyle/>
+          <a:p>
+            <a:pPr indent="0" lvl="0" marL="0" rtl="0" algn="l">
+              <a:spcBef>
+                <a:spcPts val="0"/>
+              </a:spcBef>
+              <a:spcAft>
+                <a:spcPts val="0"/>
+              </a:spcAft>
+              <a:buNone/>
+            </a:pPr>
+            <a:r>
+              <a:rPr lang="en"/>
+              <a:t>Mark Now, Remove Later</a:t>
+            </a:r>
+            <a:endParaRPr/>
+          </a:p>
+        </p:txBody>
+      </p:sp>
+      <p:pic>
+        <p:nvPicPr>
+          <p:cNvPr id="3" name="Picture 2" descr="destroy-safely.png"/>
+          <p:cNvPicPr>
+            <a:picLocks noChangeAspect="1"/>
+          </p:cNvPicPr>
+          <p:nvPr/>
+        </p:nvPicPr>
+        <p:blipFill>
+          <a:blip r:embed="rId2"/>
+          <a:stretch>
+            <a:fillRect/>
+          </a:stretch>
+        </p:blipFill>
+        <p:spPr>
+          <a:xfrm>
+            <a:off x="320039" y="1051560"/>
+            <a:ext cx="8503920" cy="3779520"/>
+          </a:xfrm>
+          <a:prstGeom prst="rect">
+            <a:avLst/>
+          </a:prstGeom>
+        </p:spPr>
+      </p:pic>
+    </p:spTree>
+  </p:cSld>
+  <p:clrMapOvr>
+    <a:masterClrMapping/>
+  </p:clrMapOvr>
+</p:sld>
+</file>
+
+<file path=ppt/slides/slide35.xml><?xml version="1.0" encoding="utf-8"?>
+<p:sld xmlns:a="http://schemas.openxmlformats.org/drawingml/2006/main" xmlns:p="http://schemas.openxmlformats.org/presentationml/2006/main" xmlns:r="http://schemas.openxmlformats.org/officeDocument/2006/relationships">
+  <p:cSld>
+    <p:spTree>
+      <p:nvGrpSpPr>
+        <p:cNvPr id="1" name=""/>
+        <p:cNvGrpSpPr/>
+        <p:nvPr/>
+      </p:nvGrpSpPr>
+      <p:grpSpPr/>
+      <p:sp>
+        <p:nvSpPr>
+          <p:cNvPr id="2" name="Title 1"/>
+          <p:cNvSpPr>
+            <a:spLocks noGrp="1"/>
+          </p:cNvSpPr>
+          <p:nvPr>
+            <p:ph type="title"/>
+          </p:nvPr>
+        </p:nvSpPr>
+        <p:spPr/>
+        <p:txBody>
+          <a:bodyPr/>
+          <a:lstStyle/>
+          <a:p>
+            <a:pPr indent="0" lvl="0" marL="0" rtl="0" algn="l">
+              <a:spcBef>
+                <a:spcPts val="0"/>
+              </a:spcBef>
+              <a:spcAft>
+                <a:spcPts val="0"/>
+              </a:spcAft>
+              <a:buNone/>
+            </a:pPr>
+            <a:r>
+              <a:rPr lang="en"/>
+              <a:t>Three Kinds of Body</a:t>
+            </a:r>
+            <a:endParaRPr/>
+          </a:p>
+        </p:txBody>
+      </p:sp>
+      <p:pic>
+        <p:nvPicPr>
+          <p:cNvPr id="3" name="Picture 2" descr="body-types.png"/>
+          <p:cNvPicPr>
+            <a:picLocks noChangeAspect="1"/>
+          </p:cNvPicPr>
+          <p:nvPr/>
+        </p:nvPicPr>
+        <p:blipFill>
+          <a:blip r:embed="rId2"/>
+          <a:stretch>
+            <a:fillRect/>
+          </a:stretch>
+        </p:blipFill>
+        <p:spPr>
+          <a:xfrm>
+            <a:off x="320039" y="1051560"/>
+            <a:ext cx="8503920" cy="3307080"/>
+          </a:xfrm>
+          <a:prstGeom prst="rect">
+            <a:avLst/>
+          </a:prstGeom>
+        </p:spPr>
+      </p:pic>
+    </p:spTree>
+  </p:cSld>
+  <p:clrMapOvr>
+    <a:masterClrMapping/>
+  </p:clrMapOvr>
+</p:sld>
+</file>
+
 <file path=ppt/slides/slide4.xml><?xml version="1.0" encoding="utf-8"?>
 <p:sld xmlns:a="http://schemas.openxmlformats.org/drawingml/2006/main" xmlns:r="http://schemas.openxmlformats.org/officeDocument/2006/relationships" xmlns:mc="http://schemas.openxmlformats.org/markup-compatibility/2006" xmlns:mv="urn:schemas-microsoft-com:mac:vml" xmlns:p="http://schemas.openxmlformats.org/presentationml/2006/main" xmlns:c="http://schemas.openxmlformats.org/drawingml/2006/chart" xmlns:dgm="http://schemas.openxmlformats.org/drawingml/2006/diagram" xmlns:o="urn:schemas-microsoft-com:office:office" xmlns:v="urn:schemas-microsoft-com:vml" xmlns:pvml="urn:schemas-microsoft-com:office:powerpoint" xmlns:com="http://schemas.openxmlformats.org/drawingml/2006/compatibility" xmlns:p14="http://schemas.microsoft.com/office/powerpoint/2010/main" xmlns:p15="http://schemas.microsoft.com/office/powerpoint/2012/main" xmlns:ahyp="http://schemas.microsoft.com/office/drawing/2018/hyperlinkcolor">
   <p:cSld>

--- a/slides/08 Angry Birds.pptx
+++ b/slides/08 Angry Birds.pptx
@@ -38,7 +38,9 @@
     <p:sldId id="311" r:id="rId70"/>
     <p:sldId id="315" r:id="rId39"/>
     <p:sldId id="312" r:id="rId71"/>
+    <p:sldId id="324" r:id="rId29"/>
     <p:sldId id="280" r:id="rId30"/>
+    <p:sldId id="325" r:id="rId28"/>
     <p:sldId id="292" r:id="rId42"/>
     <p:sldId id="293" r:id="rId52"/>
     <p:sldId id="313" r:id="rId40"/>
@@ -2735,6 +2737,69 @@
 </p:notes>
 </file>
 
+<file path=ppt/notesSlides/notesSlide36.xml><?xml version="1.0" encoding="utf-8"?>
+<p:notes xmlns:a="http://schemas.openxmlformats.org/drawingml/2006/main" xmlns:p="http://schemas.openxmlformats.org/presentationml/2006/main" xmlns:r="http://schemas.openxmlformats.org/officeDocument/2006/relationships">
+  <p:cSld>
+    <p:spTree>
+      <p:nvGrpSpPr>
+        <p:cNvPr id="1" name=""/>
+        <p:cNvGrpSpPr/>
+        <p:nvPr/>
+      </p:nvGrpSpPr>
+      <p:grpSpPr>
+        <a:xfrm>
+          <a:off x="0" y="0"/>
+          <a:ext cx="0" cy="0"/>
+          <a:chOff x="0" y="0"/>
+          <a:chExt cx="0" cy="0"/>
+        </a:xfrm>
+      </p:grpSpPr>
+      <p:sp>
+        <p:nvSpPr>
+          <p:cNvPr id="2" name="Slide Image Placeholder 1"/>
+          <p:cNvSpPr>
+            <a:spLocks noGrp="1"/>
+          </p:cNvSpPr>
+          <p:nvPr>
+            <p:ph type="sldImg" idx="2"/>
+          </p:nvPr>
+        </p:nvSpPr>
+        <p:spPr/>
+      </p:sp>
+      <p:sp>
+        <p:nvSpPr>
+          <p:cNvPr id="3" name="Notes Placeholder 2"/>
+          <p:cNvSpPr>
+            <a:spLocks noGrp="1"/>
+          </p:cNvSpPr>
+          <p:nvPr>
+            <p:ph type="body" idx="1"/>
+          </p:nvPr>
+        </p:nvSpPr>
+        <p:spPr/>
+        <p:txBody>
+          <a:bodyPr/>
+          <a:lstStyle/>
+          <a:p>
+            <a:r>
+              <a:t>Who holds what in the finished Angry Birds. Only PhysicsWorld and PhysicsBody touch Box2D.</a:t>
+            </a:r>
+          </a:p>
+          <a:p>
+            <a:r>
+              <a:t>Ask: which boxes would change if the physics library were swapped?</a:t>
+            </a:r>
+          </a:p>
+        </p:txBody>
+      </p:sp>
+    </p:spTree>
+  </p:cSld>
+  <p:clrMapOvr>
+    <a:masterClrMapping/>
+  </p:clrMapOvr>
+</p:notes>
+</file>
+
 <file path=ppt/notesSlides/notesSlide37.xml><?xml version="1.0" encoding="utf-8"?>
 <p:notes xmlns:a="http://schemas.openxmlformats.org/drawingml/2006/main" xmlns:r="http://schemas.openxmlformats.org/officeDocument/2006/relationships" xmlns:mc="http://schemas.openxmlformats.org/markup-compatibility/2006" xmlns:mv="urn:schemas-microsoft-com:mac:vml" xmlns:p="http://schemas.openxmlformats.org/presentationml/2006/main" xmlns:c="http://schemas.openxmlformats.org/drawingml/2006/chart" xmlns:dgm="http://schemas.openxmlformats.org/drawingml/2006/diagram" xmlns:o="urn:schemas-microsoft-com:office:office" xmlns:v="urn:schemas-microsoft-com:vml" xmlns:pvml="urn:schemas-microsoft-com:office:powerpoint" xmlns:com="http://schemas.openxmlformats.org/drawingml/2006/compatibility" xmlns:p14="http://schemas.microsoft.com/office/powerpoint/2010/main" xmlns:p15="http://schemas.microsoft.com/office/powerpoint/2012/main" xmlns:ahyp="http://schemas.microsoft.com/office/drawing/2018/hyperlinkcolor" showMasterPhAnim="0" showMasterSp="0">
   <p:cSld>
@@ -2906,6 +2971,64 @@
           <a:p>
             <a:r>
               <a:t>Say: the site explains the ideas, the README helps you find them in the code, the slides are for today.</a:t>
+            </a:r>
+          </a:p>
+        </p:txBody>
+      </p:sp>
+    </p:spTree>
+  </p:cSld>
+  <p:clrMapOvr>
+    <a:masterClrMapping/>
+  </p:clrMapOvr>
+</p:notes>
+</file>
+
+<file path=ppt/notesSlides/notesSlide5.xml><?xml version="1.0" encoding="utf-8"?>
+<p:notes xmlns:a="http://schemas.openxmlformats.org/drawingml/2006/main" xmlns:p="http://schemas.openxmlformats.org/presentationml/2006/main" xmlns:r="http://schemas.openxmlformats.org/officeDocument/2006/relationships">
+  <p:cSld>
+    <p:spTree>
+      <p:nvGrpSpPr>
+        <p:cNvPr id="1" name=""/>
+        <p:cNvGrpSpPr/>
+        <p:nvPr/>
+      </p:nvGrpSpPr>
+      <p:grpSpPr>
+        <a:xfrm>
+          <a:off x="0" y="0"/>
+          <a:ext cx="0" cy="0"/>
+          <a:chOff x="0" y="0"/>
+          <a:chExt cx="0" cy="0"/>
+        </a:xfrm>
+      </p:grpSpPr>
+      <p:sp>
+        <p:nvSpPr>
+          <p:cNvPr id="2" name="Slide Image Placeholder 1"/>
+          <p:cNvSpPr>
+            <a:spLocks noGrp="1"/>
+          </p:cNvSpPr>
+          <p:nvPr>
+            <p:ph type="sldImg" idx="2"/>
+          </p:nvPr>
+        </p:nvSpPr>
+        <p:spPr/>
+      </p:sp>
+      <p:sp>
+        <p:nvSpPr>
+          <p:cNvPr id="3" name="Notes Placeholder 2"/>
+          <p:cNvSpPr>
+            <a:spLocks noGrp="1"/>
+          </p:cNvSpPr>
+          <p:nvPr>
+            <p:ph type="body" idx="1"/>
+          </p:nvPr>
+        </p:nvSpPr>
+        <p:spPr/>
+        <p:txBody>
+          <a:bodyPr/>
+          <a:lstStyle/>
+          <a:p>
+            <a:r>
+              <a:t>The session in one slide. Read each concern aloud and let the class give the answer before pointing at it.</a:t>
             </a:r>
           </a:p>
         </p:txBody>
@@ -17954,6 +18077,1423 @@
 </p:sld>
 </file>
 
+<file path=ppt/slides/slide36.xml><?xml version="1.0" encoding="utf-8"?>
+<p:sld xmlns:a="http://schemas.openxmlformats.org/drawingml/2006/main" xmlns:p="http://schemas.openxmlformats.org/presentationml/2006/main" xmlns:r="http://schemas.openxmlformats.org/officeDocument/2006/relationships">
+  <p:cSld>
+    <p:spTree>
+      <p:nvGrpSpPr>
+        <p:cNvPr id="1" name=""/>
+        <p:cNvGrpSpPr/>
+        <p:nvPr/>
+      </p:nvGrpSpPr>
+      <p:grpSpPr/>
+      <p:sp>
+        <p:nvSpPr>
+          <p:cNvPr id="2" name="Title 1"/>
+          <p:cNvSpPr>
+            <a:spLocks noGrp="1"/>
+          </p:cNvSpPr>
+          <p:nvPr>
+            <p:ph type="title"/>
+          </p:nvPr>
+        </p:nvSpPr>
+        <p:spPr/>
+        <p:txBody>
+          <a:bodyPr/>
+          <a:lstStyle/>
+          <a:p>
+            <a:pPr indent="0" lvl="0" marL="0" rtl="0" algn="l">
+              <a:spcBef>
+                <a:spcPts val="0"/>
+              </a:spcBef>
+              <a:spcAft>
+                <a:spcPts val="0"/>
+              </a:spcAft>
+              <a:buNone/>
+            </a:pPr>
+            <a:r>
+              <a:rPr lang="en"/>
+              <a:t>The Whole Game: Who Holds What</a:t>
+            </a:r>
+            <a:endParaRPr/>
+          </a:p>
+        </p:txBody>
+      </p:sp>
+      <p:sp>
+        <p:nvSpPr>
+          <p:cNvPr id="3" name="Text Placeholder 2"/>
+          <p:cNvSpPr>
+            <a:spLocks noGrp="1"/>
+          </p:cNvSpPr>
+          <p:nvPr>
+            <p:ph type="body" idx="1"/>
+          </p:nvPr>
+        </p:nvSpPr>
+        <p:spPr>
+          <a:xfrm>
+            <a:off x="311700" y="885950"/>
+            <a:ext cx="8520600" cy="521208"/>
+          </a:xfrm>
+        </p:spPr>
+        <p:txBody>
+          <a:bodyPr/>
+          <a:lstStyle/>
+          <a:p>
+            <a:pPr indent="-330200" lvl="0" marL="457200" rtl="0" algn="l">
+              <a:spcBef>
+                <a:spcPts val="0"/>
+              </a:spcBef>
+              <a:spcAft>
+                <a:spcPts val="0"/>
+              </a:spcAft>
+              <a:buSzPts val="1600"/>
+              <a:buChar char="●"/>
+            </a:pPr>
+            <a:r>
+              <a:rPr lang="en" b="1"/>
+              <a:t>Box2D is reached from the Physics folder only.</a:t>
+            </a:r>
+            <a:endParaRPr/>
+          </a:p>
+        </p:txBody>
+      </p:sp>
+      <p:sp>
+        <p:nvSpPr>
+          <p:cNvPr id="4" name="Rounded Rectangle 3"/>
+          <p:cNvSpPr/>
+          <p:nvPr/>
+        </p:nvSpPr>
+        <p:spPr>
+          <a:xfrm>
+            <a:off x="3429000" y="1481328"/>
+            <a:ext cx="2286000" cy="566928"/>
+          </a:xfrm>
+          <a:prstGeom prst="roundRect">
+            <a:avLst>
+              <a:gd name="adj" fmla="val 12000"/>
+            </a:avLst>
+          </a:prstGeom>
+          <a:solidFill>
+            <a:srgbClr val="2E3338"/>
+          </a:solidFill>
+          <a:ln w="25400">
+            <a:solidFill>
+              <a:srgbClr val="D45D35"/>
+            </a:solidFill>
+          </a:ln>
+          <a:effectLst/>
+        </p:spPr>
+        <p:style>
+          <a:lnRef idx="1">
+            <a:schemeClr val="accent1"/>
+          </a:lnRef>
+          <a:fillRef idx="3">
+            <a:schemeClr val="accent1"/>
+          </a:fillRef>
+          <a:effectRef idx="2">
+            <a:schemeClr val="accent1"/>
+          </a:effectRef>
+          <a:fontRef idx="minor">
+            <a:schemeClr val="lt1"/>
+          </a:fontRef>
+        </p:style>
+        <p:txBody>
+          <a:bodyPr rtlCol="0" anchor="ctr" wrap="square" lIns="73152" rIns="73152"/>
+          <a:lstStyle/>
+          <a:p>
+            <a:pPr algn="ctr"/>
+            <a:r>
+              <a:rPr sz="1300" b="1">
+                <a:solidFill>
+                  <a:srgbClr val="DEE2E6"/>
+                </a:solidFill>
+              </a:rPr>
+              <a:t>Game1 : Core</a:t>
+            </a:r>
+          </a:p>
+        </p:txBody>
+      </p:sp>
+      <p:sp>
+        <p:nvSpPr>
+          <p:cNvPr id="5" name="Rounded Rectangle 4"/>
+          <p:cNvSpPr/>
+          <p:nvPr/>
+        </p:nvSpPr>
+        <p:spPr>
+          <a:xfrm>
+            <a:off x="374903" y="2596896"/>
+            <a:ext cx="1591056" cy="566928"/>
+          </a:xfrm>
+          <a:prstGeom prst="roundRect">
+            <a:avLst>
+              <a:gd name="adj" fmla="val 12000"/>
+            </a:avLst>
+          </a:prstGeom>
+          <a:solidFill>
+            <a:srgbClr val="2E3338"/>
+          </a:solidFill>
+          <a:ln>
+            <a:noFill/>
+          </a:ln>
+          <a:effectLst/>
+        </p:spPr>
+        <p:style>
+          <a:lnRef idx="1">
+            <a:schemeClr val="accent1"/>
+          </a:lnRef>
+          <a:fillRef idx="3">
+            <a:schemeClr val="accent1"/>
+          </a:fillRef>
+          <a:effectRef idx="2">
+            <a:schemeClr val="accent1"/>
+          </a:effectRef>
+          <a:fontRef idx="minor">
+            <a:schemeClr val="lt1"/>
+          </a:fontRef>
+        </p:style>
+        <p:txBody>
+          <a:bodyPr rtlCol="0" anchor="ctr" wrap="square" lIns="73152" rIns="73152"/>
+          <a:lstStyle/>
+          <a:p>
+            <a:pPr algn="ctr"/>
+            <a:r>
+              <a:rPr sz="1300" b="1">
+                <a:solidFill>
+                  <a:srgbClr val="DEE2E6"/>
+                </a:solidFill>
+              </a:rPr>
+              <a:t>Game states</a:t>
+            </a:r>
+          </a:p>
+          <a:p>
+            <a:pPr algn="ctr"/>
+            <a:r>
+              <a:rPr sz="1100" b="0">
+                <a:solidFill>
+                  <a:srgbClr val="9AA3AB"/>
+                </a:solidFill>
+              </a:rPr>
+              <a:t>aim, fly, level end</a:t>
+            </a:r>
+          </a:p>
+        </p:txBody>
+      </p:sp>
+      <p:cxnSp>
+        <p:nvCxnSpPr>
+          <p:cNvPr id="6" name="Connector 5"/>
+          <p:cNvCxnSpPr/>
+          <p:nvPr/>
+        </p:nvCxnSpPr>
+        <p:spPr>
+          <a:xfrm flipH="1">
+            <a:off x="1170432" y="2066544"/>
+            <a:ext cx="3401568" cy="512064"/>
+          </a:xfrm>
+          <a:prstGeom prst="line">
+            <a:avLst/>
+          </a:prstGeom>
+          <a:ln w="25400">
+            <a:solidFill>
+              <a:srgbClr val="9AA3AB"/>
+            </a:solidFill>
+            <a:tailEnd type="triangle"/>
+          </a:ln>
+        </p:spPr>
+        <p:style>
+          <a:lnRef idx="2">
+            <a:schemeClr val="accent1"/>
+          </a:lnRef>
+          <a:fillRef idx="0">
+            <a:schemeClr val="accent1"/>
+          </a:fillRef>
+          <a:effectRef idx="1">
+            <a:schemeClr val="accent1"/>
+          </a:effectRef>
+          <a:fontRef idx="minor">
+            <a:schemeClr val="tx1"/>
+          </a:fontRef>
+        </p:style>
+      </p:cxnSp>
+      <p:sp>
+        <p:nvSpPr>
+          <p:cNvPr id="7" name="Rounded Rectangle 6"/>
+          <p:cNvSpPr/>
+          <p:nvPr/>
+        </p:nvSpPr>
+        <p:spPr>
+          <a:xfrm>
+            <a:off x="2075688" y="2596896"/>
+            <a:ext cx="1591056" cy="566928"/>
+          </a:xfrm>
+          <a:prstGeom prst="roundRect">
+            <a:avLst>
+              <a:gd name="adj" fmla="val 12000"/>
+            </a:avLst>
+          </a:prstGeom>
+          <a:solidFill>
+            <a:srgbClr val="2E3338"/>
+          </a:solidFill>
+          <a:ln>
+            <a:noFill/>
+          </a:ln>
+          <a:effectLst/>
+        </p:spPr>
+        <p:style>
+          <a:lnRef idx="1">
+            <a:schemeClr val="accent1"/>
+          </a:lnRef>
+          <a:fillRef idx="3">
+            <a:schemeClr val="accent1"/>
+          </a:fillRef>
+          <a:effectRef idx="2">
+            <a:schemeClr val="accent1"/>
+          </a:effectRef>
+          <a:fontRef idx="minor">
+            <a:schemeClr val="lt1"/>
+          </a:fontRef>
+        </p:style>
+        <p:txBody>
+          <a:bodyPr rtlCol="0" anchor="ctr" wrap="square" lIns="73152" rIns="73152"/>
+          <a:lstStyle/>
+          <a:p>
+            <a:pPr algn="ctr"/>
+            <a:r>
+              <a:rPr sz="1300" b="1">
+                <a:solidFill>
+                  <a:srgbClr val="DEE2E6"/>
+                </a:solidFill>
+              </a:rPr>
+              <a:t>PhysicsWorld</a:t>
+            </a:r>
+          </a:p>
+          <a:p>
+            <a:pPr algn="ctr"/>
+            <a:r>
+              <a:rPr sz="1100" b="0">
+                <a:solidFill>
+                  <a:srgbClr val="9AA3AB"/>
+                </a:solidFill>
+              </a:rPr>
+              <a:t>the facade</a:t>
+            </a:r>
+          </a:p>
+        </p:txBody>
+      </p:sp>
+      <p:sp>
+        <p:nvSpPr>
+          <p:cNvPr id="8" name="Rounded Rectangle 7"/>
+          <p:cNvSpPr/>
+          <p:nvPr/>
+        </p:nvSpPr>
+        <p:spPr>
+          <a:xfrm>
+            <a:off x="2075688" y="3712464"/>
+            <a:ext cx="1591056" cy="566928"/>
+          </a:xfrm>
+          <a:prstGeom prst="roundRect">
+            <a:avLst>
+              <a:gd name="adj" fmla="val 12000"/>
+            </a:avLst>
+          </a:prstGeom>
+          <a:solidFill>
+            <a:srgbClr val="2E3338"/>
+          </a:solidFill>
+          <a:ln>
+            <a:noFill/>
+          </a:ln>
+          <a:effectLst/>
+        </p:spPr>
+        <p:style>
+          <a:lnRef idx="1">
+            <a:schemeClr val="accent1"/>
+          </a:lnRef>
+          <a:fillRef idx="3">
+            <a:schemeClr val="accent1"/>
+          </a:fillRef>
+          <a:effectRef idx="2">
+            <a:schemeClr val="accent1"/>
+          </a:effectRef>
+          <a:fontRef idx="minor">
+            <a:schemeClr val="lt1"/>
+          </a:fontRef>
+        </p:style>
+        <p:txBody>
+          <a:bodyPr rtlCol="0" anchor="ctr" wrap="square" lIns="73152" rIns="73152"/>
+          <a:lstStyle/>
+          <a:p>
+            <a:pPr algn="ctr"/>
+            <a:r>
+              <a:rPr sz="1300" b="1">
+                <a:solidFill>
+                  <a:srgbClr val="DEE2E6"/>
+                </a:solidFill>
+              </a:rPr>
+              <a:t>Box2D</a:t>
+            </a:r>
+          </a:p>
+          <a:p>
+            <a:pPr algn="ctr"/>
+            <a:r>
+              <a:rPr sz="1100" b="0">
+                <a:solidFill>
+                  <a:srgbClr val="9AA3AB"/>
+                </a:solidFill>
+              </a:rPr>
+              <a:t>the library</a:t>
+            </a:r>
+          </a:p>
+        </p:txBody>
+      </p:sp>
+      <p:cxnSp>
+        <p:nvCxnSpPr>
+          <p:cNvPr id="9" name="Connector 8"/>
+          <p:cNvCxnSpPr/>
+          <p:nvPr/>
+        </p:nvCxnSpPr>
+        <p:spPr>
+          <a:xfrm>
+            <a:off x="2871216" y="3182112"/>
+            <a:ext cx="0" cy="512064"/>
+          </a:xfrm>
+          <a:prstGeom prst="line">
+            <a:avLst/>
+          </a:prstGeom>
+          <a:ln w="25400">
+            <a:solidFill>
+              <a:srgbClr val="9AA3AB"/>
+            </a:solidFill>
+            <a:tailEnd type="triangle"/>
+          </a:ln>
+        </p:spPr>
+        <p:style>
+          <a:lnRef idx="2">
+            <a:schemeClr val="accent1"/>
+          </a:lnRef>
+          <a:fillRef idx="0">
+            <a:schemeClr val="accent1"/>
+          </a:fillRef>
+          <a:effectRef idx="1">
+            <a:schemeClr val="accent1"/>
+          </a:effectRef>
+          <a:fontRef idx="minor">
+            <a:schemeClr val="tx1"/>
+          </a:fontRef>
+        </p:style>
+      </p:cxnSp>
+      <p:cxnSp>
+        <p:nvCxnSpPr>
+          <p:cNvPr id="10" name="Connector 9"/>
+          <p:cNvCxnSpPr/>
+          <p:nvPr/>
+        </p:nvCxnSpPr>
+        <p:spPr>
+          <a:xfrm flipH="1">
+            <a:off x="2871216" y="2066544"/>
+            <a:ext cx="1700784" cy="512064"/>
+          </a:xfrm>
+          <a:prstGeom prst="line">
+            <a:avLst/>
+          </a:prstGeom>
+          <a:ln w="25400">
+            <a:solidFill>
+              <a:srgbClr val="9AA3AB"/>
+            </a:solidFill>
+            <a:tailEnd type="triangle"/>
+          </a:ln>
+        </p:spPr>
+        <p:style>
+          <a:lnRef idx="2">
+            <a:schemeClr val="accent1"/>
+          </a:lnRef>
+          <a:fillRef idx="0">
+            <a:schemeClr val="accent1"/>
+          </a:fillRef>
+          <a:effectRef idx="1">
+            <a:schemeClr val="accent1"/>
+          </a:effectRef>
+          <a:fontRef idx="minor">
+            <a:schemeClr val="tx1"/>
+          </a:fontRef>
+        </p:style>
+      </p:cxnSp>
+      <p:sp>
+        <p:nvSpPr>
+          <p:cNvPr id="11" name="Rounded Rectangle 10"/>
+          <p:cNvSpPr/>
+          <p:nvPr/>
+        </p:nvSpPr>
+        <p:spPr>
+          <a:xfrm>
+            <a:off x="3776472" y="2596896"/>
+            <a:ext cx="1591056" cy="566928"/>
+          </a:xfrm>
+          <a:prstGeom prst="roundRect">
+            <a:avLst>
+              <a:gd name="adj" fmla="val 12000"/>
+            </a:avLst>
+          </a:prstGeom>
+          <a:solidFill>
+            <a:srgbClr val="2E3338"/>
+          </a:solidFill>
+          <a:ln>
+            <a:noFill/>
+          </a:ln>
+          <a:effectLst/>
+        </p:spPr>
+        <p:style>
+          <a:lnRef idx="1">
+            <a:schemeClr val="accent1"/>
+          </a:lnRef>
+          <a:fillRef idx="3">
+            <a:schemeClr val="accent1"/>
+          </a:fillRef>
+          <a:effectRef idx="2">
+            <a:schemeClr val="accent1"/>
+          </a:effectRef>
+          <a:fontRef idx="minor">
+            <a:schemeClr val="lt1"/>
+          </a:fontRef>
+        </p:style>
+        <p:txBody>
+          <a:bodyPr rtlCol="0" anchor="ctr" wrap="square" lIns="73152" rIns="73152"/>
+          <a:lstStyle/>
+          <a:p>
+            <a:pPr algn="ctr"/>
+            <a:r>
+              <a:rPr sz="1300" b="1">
+                <a:solidFill>
+                  <a:srgbClr val="DEE2E6"/>
+                </a:solidFill>
+              </a:rPr>
+              <a:t>Prefabs</a:t>
+            </a:r>
+          </a:p>
+          <a:p>
+            <a:pPr algn="ctr"/>
+            <a:r>
+              <a:rPr sz="1100" b="0">
+                <a:solidFill>
+                  <a:srgbClr val="9AA3AB"/>
+                </a:solidFill>
+              </a:rPr>
+              <a:t>clones entities</a:t>
+            </a:r>
+          </a:p>
+        </p:txBody>
+      </p:sp>
+      <p:cxnSp>
+        <p:nvCxnSpPr>
+          <p:cNvPr id="12" name="Connector 11"/>
+          <p:cNvCxnSpPr/>
+          <p:nvPr/>
+        </p:nvCxnSpPr>
+        <p:spPr>
+          <a:xfrm>
+            <a:off x="4572000" y="2066544"/>
+            <a:ext cx="0" cy="512064"/>
+          </a:xfrm>
+          <a:prstGeom prst="line">
+            <a:avLst/>
+          </a:prstGeom>
+          <a:ln w="25400">
+            <a:solidFill>
+              <a:srgbClr val="9AA3AB"/>
+            </a:solidFill>
+            <a:tailEnd type="triangle"/>
+          </a:ln>
+        </p:spPr>
+        <p:style>
+          <a:lnRef idx="2">
+            <a:schemeClr val="accent1"/>
+          </a:lnRef>
+          <a:fillRef idx="0">
+            <a:schemeClr val="accent1"/>
+          </a:fillRef>
+          <a:effectRef idx="1">
+            <a:schemeClr val="accent1"/>
+          </a:effectRef>
+          <a:fontRef idx="minor">
+            <a:schemeClr val="tx1"/>
+          </a:fontRef>
+        </p:style>
+      </p:cxnSp>
+      <p:sp>
+        <p:nvSpPr>
+          <p:cNvPr id="13" name="Rounded Rectangle 12"/>
+          <p:cNvSpPr/>
+          <p:nvPr/>
+        </p:nvSpPr>
+        <p:spPr>
+          <a:xfrm>
+            <a:off x="5477256" y="2596896"/>
+            <a:ext cx="1591056" cy="566928"/>
+          </a:xfrm>
+          <a:prstGeom prst="roundRect">
+            <a:avLst>
+              <a:gd name="adj" fmla="val 12000"/>
+            </a:avLst>
+          </a:prstGeom>
+          <a:solidFill>
+            <a:srgbClr val="2E3338"/>
+          </a:solidFill>
+          <a:ln>
+            <a:noFill/>
+          </a:ln>
+          <a:effectLst/>
+        </p:spPr>
+        <p:style>
+          <a:lnRef idx="1">
+            <a:schemeClr val="accent1"/>
+          </a:lnRef>
+          <a:fillRef idx="3">
+            <a:schemeClr val="accent1"/>
+          </a:fillRef>
+          <a:effectRef idx="2">
+            <a:schemeClr val="accent1"/>
+          </a:effectRef>
+          <a:fontRef idx="minor">
+            <a:schemeClr val="lt1"/>
+          </a:fontRef>
+        </p:style>
+        <p:txBody>
+          <a:bodyPr rtlCol="0" anchor="ctr" wrap="square" lIns="73152" rIns="73152"/>
+          <a:lstStyle/>
+          <a:p>
+            <a:pPr algn="ctr"/>
+            <a:r>
+              <a:rPr sz="1300" b="1">
+                <a:solidFill>
+                  <a:srgbClr val="DEE2E6"/>
+                </a:solidFill>
+              </a:rPr>
+              <a:t>Entities</a:t>
+            </a:r>
+          </a:p>
+          <a:p>
+            <a:pPr algn="ctr"/>
+            <a:r>
+              <a:rPr sz="1100" b="0">
+                <a:solidFill>
+                  <a:srgbClr val="9AA3AB"/>
+                </a:solidFill>
+              </a:rPr>
+              <a:t>blocks, pigs, the bird</a:t>
+            </a:r>
+          </a:p>
+        </p:txBody>
+      </p:sp>
+      <p:sp>
+        <p:nvSpPr>
+          <p:cNvPr id="14" name="Rounded Rectangle 13"/>
+          <p:cNvSpPr/>
+          <p:nvPr/>
+        </p:nvSpPr>
+        <p:spPr>
+          <a:xfrm>
+            <a:off x="5477256" y="3712464"/>
+            <a:ext cx="1591056" cy="566928"/>
+          </a:xfrm>
+          <a:prstGeom prst="roundRect">
+            <a:avLst>
+              <a:gd name="adj" fmla="val 12000"/>
+            </a:avLst>
+          </a:prstGeom>
+          <a:solidFill>
+            <a:srgbClr val="2E3338"/>
+          </a:solidFill>
+          <a:ln>
+            <a:noFill/>
+          </a:ln>
+          <a:effectLst/>
+        </p:spPr>
+        <p:style>
+          <a:lnRef idx="1">
+            <a:schemeClr val="accent1"/>
+          </a:lnRef>
+          <a:fillRef idx="3">
+            <a:schemeClr val="accent1"/>
+          </a:fillRef>
+          <a:effectRef idx="2">
+            <a:schemeClr val="accent1"/>
+          </a:effectRef>
+          <a:fontRef idx="minor">
+            <a:schemeClr val="lt1"/>
+          </a:fontRef>
+        </p:style>
+        <p:txBody>
+          <a:bodyPr rtlCol="0" anchor="ctr" wrap="square" lIns="73152" rIns="73152"/>
+          <a:lstStyle/>
+          <a:p>
+            <a:pPr algn="ctr"/>
+            <a:r>
+              <a:rPr sz="1300" b="1">
+                <a:solidFill>
+                  <a:srgbClr val="DEE2E6"/>
+                </a:solidFill>
+              </a:rPr>
+              <a:t>PhysicsBody</a:t>
+            </a:r>
+          </a:p>
+          <a:p>
+            <a:pPr algn="ctr"/>
+            <a:r>
+              <a:rPr sz="1100" b="0">
+                <a:solidFill>
+                  <a:srgbClr val="9AA3AB"/>
+                </a:solidFill>
+              </a:rPr>
+              <a:t>the adapter</a:t>
+            </a:r>
+          </a:p>
+        </p:txBody>
+      </p:sp>
+      <p:cxnSp>
+        <p:nvCxnSpPr>
+          <p:cNvPr id="15" name="Connector 14"/>
+          <p:cNvCxnSpPr/>
+          <p:nvPr/>
+        </p:nvCxnSpPr>
+        <p:spPr>
+          <a:xfrm>
+            <a:off x="6272784" y="3182112"/>
+            <a:ext cx="0" cy="512064"/>
+          </a:xfrm>
+          <a:prstGeom prst="line">
+            <a:avLst/>
+          </a:prstGeom>
+          <a:ln w="25400">
+            <a:solidFill>
+              <a:srgbClr val="9AA3AB"/>
+            </a:solidFill>
+            <a:tailEnd type="triangle"/>
+          </a:ln>
+        </p:spPr>
+        <p:style>
+          <a:lnRef idx="2">
+            <a:schemeClr val="accent1"/>
+          </a:lnRef>
+          <a:fillRef idx="0">
+            <a:schemeClr val="accent1"/>
+          </a:fillRef>
+          <a:effectRef idx="1">
+            <a:schemeClr val="accent1"/>
+          </a:effectRef>
+          <a:fontRef idx="minor">
+            <a:schemeClr val="tx1"/>
+          </a:fontRef>
+        </p:style>
+      </p:cxnSp>
+      <p:cxnSp>
+        <p:nvCxnSpPr>
+          <p:cNvPr id="16" name="Connector 15"/>
+          <p:cNvCxnSpPr/>
+          <p:nvPr/>
+        </p:nvCxnSpPr>
+        <p:spPr>
+          <a:xfrm>
+            <a:off x="4572000" y="2066544"/>
+            <a:ext cx="1700784" cy="512064"/>
+          </a:xfrm>
+          <a:prstGeom prst="line">
+            <a:avLst/>
+          </a:prstGeom>
+          <a:ln w="25400">
+            <a:solidFill>
+              <a:srgbClr val="9AA3AB"/>
+            </a:solidFill>
+            <a:tailEnd type="triangle"/>
+          </a:ln>
+        </p:spPr>
+        <p:style>
+          <a:lnRef idx="2">
+            <a:schemeClr val="accent1"/>
+          </a:lnRef>
+          <a:fillRef idx="0">
+            <a:schemeClr val="accent1"/>
+          </a:fillRef>
+          <a:effectRef idx="1">
+            <a:schemeClr val="accent1"/>
+          </a:effectRef>
+          <a:fontRef idx="minor">
+            <a:schemeClr val="tx1"/>
+          </a:fontRef>
+        </p:style>
+      </p:cxnSp>
+      <p:sp>
+        <p:nvSpPr>
+          <p:cNvPr id="17" name="Rounded Rectangle 16"/>
+          <p:cNvSpPr/>
+          <p:nvPr/>
+        </p:nvSpPr>
+        <p:spPr>
+          <a:xfrm>
+            <a:off x="7178040" y="2596896"/>
+            <a:ext cx="1591056" cy="566928"/>
+          </a:xfrm>
+          <a:prstGeom prst="roundRect">
+            <a:avLst>
+              <a:gd name="adj" fmla="val 12000"/>
+            </a:avLst>
+          </a:prstGeom>
+          <a:solidFill>
+            <a:srgbClr val="2E3338"/>
+          </a:solidFill>
+          <a:ln>
+            <a:noFill/>
+          </a:ln>
+          <a:effectLst/>
+        </p:spPr>
+        <p:style>
+          <a:lnRef idx="1">
+            <a:schemeClr val="accent1"/>
+          </a:lnRef>
+          <a:fillRef idx="3">
+            <a:schemeClr val="accent1"/>
+          </a:fillRef>
+          <a:effectRef idx="2">
+            <a:schemeClr val="accent1"/>
+          </a:effectRef>
+          <a:fontRef idx="minor">
+            <a:schemeClr val="lt1"/>
+          </a:fontRef>
+        </p:style>
+        <p:txBody>
+          <a:bodyPr rtlCol="0" anchor="ctr" wrap="square" lIns="73152" rIns="73152"/>
+          <a:lstStyle/>
+          <a:p>
+            <a:pPr algn="ctr"/>
+            <a:r>
+              <a:rPr sz="1300" b="1">
+                <a:solidFill>
+                  <a:srgbClr val="DEE2E6"/>
+                </a:solidFill>
+              </a:rPr>
+              <a:t>Slingshot</a:t>
+            </a:r>
+          </a:p>
+        </p:txBody>
+      </p:sp>
+      <p:cxnSp>
+        <p:nvCxnSpPr>
+          <p:cNvPr id="18" name="Connector 17"/>
+          <p:cNvCxnSpPr/>
+          <p:nvPr/>
+        </p:nvCxnSpPr>
+        <p:spPr>
+          <a:xfrm>
+            <a:off x="4572000" y="2066544"/>
+            <a:ext cx="3401568" cy="512064"/>
+          </a:xfrm>
+          <a:prstGeom prst="line">
+            <a:avLst/>
+          </a:prstGeom>
+          <a:ln w="25400">
+            <a:solidFill>
+              <a:srgbClr val="9AA3AB"/>
+            </a:solidFill>
+            <a:tailEnd type="triangle"/>
+          </a:ln>
+        </p:spPr>
+        <p:style>
+          <a:lnRef idx="2">
+            <a:schemeClr val="accent1"/>
+          </a:lnRef>
+          <a:fillRef idx="0">
+            <a:schemeClr val="accent1"/>
+          </a:fillRef>
+          <a:effectRef idx="1">
+            <a:schemeClr val="accent1"/>
+          </a:effectRef>
+          <a:fontRef idx="minor">
+            <a:schemeClr val="tx1"/>
+          </a:fontRef>
+        </p:style>
+      </p:cxnSp>
+      <p:sp>
+        <p:nvSpPr>
+          <p:cNvPr id="19" name="TextBox 18"/>
+          <p:cNvSpPr txBox="1"/>
+          <p:nvPr/>
+        </p:nvSpPr>
+        <p:spPr>
+          <a:xfrm>
+            <a:off x="457200" y="4462272"/>
+            <a:ext cx="8229600" cy="365760"/>
+          </a:xfrm>
+          <a:prstGeom prst="rect">
+            <a:avLst/>
+          </a:prstGeom>
+          <a:noFill/>
+        </p:spPr>
+        <p:txBody>
+          <a:bodyPr wrap="square">
+            <a:spAutoFit/>
+          </a:bodyPr>
+          <a:lstStyle/>
+          <a:p>
+            <a:pPr algn="ctr"/>
+            <a:r>
+              <a:rPr sz="1300" b="0" i="0">
+                <a:solidFill>
+                  <a:srgbClr val="9AA3AB"/>
+                </a:solidFill>
+              </a:rPr>
+              <a:t>A level file names prefabs, and Prefabs clones them into the world.</a:t>
+            </a:r>
+          </a:p>
+        </p:txBody>
+      </p:sp>
+    </p:spTree>
+  </p:cSld>
+  <p:clrMapOvr>
+    <a:masterClrMapping/>
+  </p:clrMapOvr>
+</p:sld>
+</file>
+
+<file path=ppt/slides/slide37.xml><?xml version="1.0" encoding="utf-8"?>
+<p:sld xmlns:a="http://schemas.openxmlformats.org/drawingml/2006/main" xmlns:p="http://schemas.openxmlformats.org/presentationml/2006/main" xmlns:r="http://schemas.openxmlformats.org/officeDocument/2006/relationships">
+  <p:cSld>
+    <p:spTree>
+      <p:nvGrpSpPr>
+        <p:cNvPr id="1" name=""/>
+        <p:cNvGrpSpPr/>
+        <p:nvPr/>
+      </p:nvGrpSpPr>
+      <p:grpSpPr/>
+      <p:sp>
+        <p:nvSpPr>
+          <p:cNvPr id="2" name="Title 1"/>
+          <p:cNvSpPr>
+            <a:spLocks noGrp="1"/>
+          </p:cNvSpPr>
+          <p:nvPr>
+            <p:ph type="title"/>
+          </p:nvPr>
+        </p:nvSpPr>
+        <p:spPr/>
+        <p:txBody>
+          <a:bodyPr/>
+          <a:lstStyle/>
+          <a:p>
+            <a:pPr indent="0" lvl="0" marL="0" rtl="0" algn="l">
+              <a:spcBef>
+                <a:spcPts val="0"/>
+              </a:spcBef>
+              <a:spcAft>
+                <a:spcPts val="0"/>
+              </a:spcAft>
+              <a:buNone/>
+            </a:pPr>
+            <a:r>
+              <a:rPr lang="en"/>
+              <a:t>Summary</a:t>
+            </a:r>
+            <a:endParaRPr/>
+          </a:p>
+        </p:txBody>
+      </p:sp>
+      <p:sp>
+        <p:nvSpPr>
+          <p:cNvPr id="3" name="Text Placeholder 2"/>
+          <p:cNvSpPr>
+            <a:spLocks noGrp="1"/>
+          </p:cNvSpPr>
+          <p:nvPr>
+            <p:ph type="body" idx="1"/>
+          </p:nvPr>
+        </p:nvSpPr>
+        <p:spPr>
+          <a:xfrm>
+            <a:off x="311700" y="885950"/>
+            <a:ext cx="8520600" cy="521208"/>
+          </a:xfrm>
+        </p:spPr>
+        <p:txBody>
+          <a:bodyPr/>
+          <a:lstStyle/>
+          <a:p>
+            <a:pPr indent="-330200" lvl="0" marL="457200" rtl="0" algn="l">
+              <a:spcBef>
+                <a:spcPts val="0"/>
+              </a:spcBef>
+              <a:spcAft>
+                <a:spcPts val="0"/>
+              </a:spcAft>
+              <a:buSzPts val="1600"/>
+              <a:buChar char="●"/>
+            </a:pPr>
+            <a:r>
+              <a:rPr lang="en" b="1"/>
+              <a:t>Seven concerns, and this session’s answer to each.</a:t>
+            </a:r>
+            <a:endParaRPr/>
+          </a:p>
+        </p:txBody>
+      </p:sp>
+      <p:sp>
+        <p:nvSpPr>
+          <p:cNvPr id="4" name="Rounded Rectangle 3"/>
+          <p:cNvSpPr/>
+          <p:nvPr/>
+        </p:nvSpPr>
+        <p:spPr>
+          <a:xfrm>
+            <a:off x="548640" y="1417320"/>
+            <a:ext cx="2560320" cy="841248"/>
+          </a:xfrm>
+          <a:prstGeom prst="roundRect">
+            <a:avLst>
+              <a:gd name="adj" fmla="val 12000"/>
+            </a:avLst>
+          </a:prstGeom>
+          <a:solidFill>
+            <a:srgbClr val="2E3338"/>
+          </a:solidFill>
+          <a:ln>
+            <a:noFill/>
+          </a:ln>
+          <a:effectLst/>
+        </p:spPr>
+        <p:style>
+          <a:lnRef idx="1">
+            <a:schemeClr val="accent1"/>
+          </a:lnRef>
+          <a:fillRef idx="3">
+            <a:schemeClr val="accent1"/>
+          </a:fillRef>
+          <a:effectRef idx="2">
+            <a:schemeClr val="accent1"/>
+          </a:effectRef>
+          <a:fontRef idx="minor">
+            <a:schemeClr val="lt1"/>
+          </a:fontRef>
+        </p:style>
+        <p:txBody>
+          <a:bodyPr rtlCol="0" anchor="ctr" wrap="square" lIns="73152" rIns="73152"/>
+          <a:lstStyle/>
+          <a:p>
+            <a:pPr algn="ctr"/>
+            <a:r>
+              <a:rPr sz="1500" b="1">
+                <a:solidFill>
+                  <a:srgbClr val="DEE2E6"/>
+                </a:solidFill>
+              </a:rPr>
+              <a:t>A library that doesn’t fit our code</a:t>
+            </a:r>
+          </a:p>
+          <a:p>
+            <a:pPr algn="ctr"/>
+            <a:r>
+              <a:rPr sz="1300" b="0">
+                <a:solidFill>
+                  <a:srgbClr val="9AA3AB"/>
+                </a:solidFill>
+              </a:rPr>
+              <a:t>Adapter: PhysicsBody</a:t>
+            </a:r>
+          </a:p>
+        </p:txBody>
+      </p:sp>
+      <p:sp>
+        <p:nvSpPr>
+          <p:cNvPr id="5" name="Rounded Rectangle 4"/>
+          <p:cNvSpPr/>
+          <p:nvPr/>
+        </p:nvSpPr>
+        <p:spPr>
+          <a:xfrm>
+            <a:off x="3291840" y="1417320"/>
+            <a:ext cx="2560320" cy="841248"/>
+          </a:xfrm>
+          <a:prstGeom prst="roundRect">
+            <a:avLst>
+              <a:gd name="adj" fmla="val 12000"/>
+            </a:avLst>
+          </a:prstGeom>
+          <a:solidFill>
+            <a:srgbClr val="2E3338"/>
+          </a:solidFill>
+          <a:ln>
+            <a:noFill/>
+          </a:ln>
+          <a:effectLst/>
+        </p:spPr>
+        <p:style>
+          <a:lnRef idx="1">
+            <a:schemeClr val="accent1"/>
+          </a:lnRef>
+          <a:fillRef idx="3">
+            <a:schemeClr val="accent1"/>
+          </a:fillRef>
+          <a:effectRef idx="2">
+            <a:schemeClr val="accent1"/>
+          </a:effectRef>
+          <a:fontRef idx="minor">
+            <a:schemeClr val="lt1"/>
+          </a:fontRef>
+        </p:style>
+        <p:txBody>
+          <a:bodyPr rtlCol="0" anchor="ctr" wrap="square" lIns="73152" rIns="73152"/>
+          <a:lstStyle/>
+          <a:p>
+            <a:pPr algn="ctr"/>
+            <a:r>
+              <a:rPr sz="1500" b="1">
+                <a:solidFill>
+                  <a:srgbClr val="DEE2E6"/>
+                </a:solidFill>
+              </a:rPr>
+              <a:t>A big library, little needed</a:t>
+            </a:r>
+          </a:p>
+          <a:p>
+            <a:pPr algn="ctr"/>
+            <a:r>
+              <a:rPr sz="1300" b="0">
+                <a:solidFill>
+                  <a:srgbClr val="9AA3AB"/>
+                </a:solidFill>
+              </a:rPr>
+              <a:t>Facade: PhysicsWorld</a:t>
+            </a:r>
+          </a:p>
+        </p:txBody>
+      </p:sp>
+      <p:sp>
+        <p:nvSpPr>
+          <p:cNvPr id="6" name="Rounded Rectangle 5"/>
+          <p:cNvSpPr/>
+          <p:nvPr/>
+        </p:nvSpPr>
+        <p:spPr>
+          <a:xfrm>
+            <a:off x="6035040" y="1417320"/>
+            <a:ext cx="2560320" cy="841248"/>
+          </a:xfrm>
+          <a:prstGeom prst="roundRect">
+            <a:avLst>
+              <a:gd name="adj" fmla="val 12000"/>
+            </a:avLst>
+          </a:prstGeom>
+          <a:solidFill>
+            <a:srgbClr val="2E3338"/>
+          </a:solidFill>
+          <a:ln>
+            <a:noFill/>
+          </a:ln>
+          <a:effectLst/>
+        </p:spPr>
+        <p:style>
+          <a:lnRef idx="1">
+            <a:schemeClr val="accent1"/>
+          </a:lnRef>
+          <a:fillRef idx="3">
+            <a:schemeClr val="accent1"/>
+          </a:fillRef>
+          <a:effectRef idx="2">
+            <a:schemeClr val="accent1"/>
+          </a:effectRef>
+          <a:fontRef idx="minor">
+            <a:schemeClr val="lt1"/>
+          </a:fontRef>
+        </p:style>
+        <p:txBody>
+          <a:bodyPr rtlCol="0" anchor="ctr" wrap="square" lIns="73152" rIns="73152"/>
+          <a:lstStyle/>
+          <a:p>
+            <a:pPr algn="ctr"/>
+            <a:r>
+              <a:rPr sz="1500" b="1">
+                <a:solidFill>
+                  <a:srgbClr val="DEE2E6"/>
+                </a:solidFill>
+              </a:rPr>
+              <a:t>Metres and pixels</a:t>
+            </a:r>
+          </a:p>
+          <a:p>
+            <a:pPr algn="ctr"/>
+            <a:r>
+              <a:rPr sz="1300" b="0">
+                <a:solidFill>
+                  <a:srgbClr val="9AA3AB"/>
+                </a:solidFill>
+              </a:rPr>
+              <a:t>One class converts: Units</a:t>
+            </a:r>
+          </a:p>
+        </p:txBody>
+      </p:sp>
+      <p:sp>
+        <p:nvSpPr>
+          <p:cNvPr id="7" name="Rounded Rectangle 6"/>
+          <p:cNvSpPr/>
+          <p:nvPr/>
+        </p:nvSpPr>
+        <p:spPr>
+          <a:xfrm>
+            <a:off x="548640" y="2395728"/>
+            <a:ext cx="2560320" cy="841248"/>
+          </a:xfrm>
+          <a:prstGeom prst="roundRect">
+            <a:avLst>
+              <a:gd name="adj" fmla="val 12000"/>
+            </a:avLst>
+          </a:prstGeom>
+          <a:solidFill>
+            <a:srgbClr val="2E3338"/>
+          </a:solidFill>
+          <a:ln>
+            <a:noFill/>
+          </a:ln>
+          <a:effectLst/>
+        </p:spPr>
+        <p:style>
+          <a:lnRef idx="1">
+            <a:schemeClr val="accent1"/>
+          </a:lnRef>
+          <a:fillRef idx="3">
+            <a:schemeClr val="accent1"/>
+          </a:fillRef>
+          <a:effectRef idx="2">
+            <a:schemeClr val="accent1"/>
+          </a:effectRef>
+          <a:fontRef idx="minor">
+            <a:schemeClr val="lt1"/>
+          </a:fontRef>
+        </p:style>
+        <p:txBody>
+          <a:bodyPr rtlCol="0" anchor="ctr" wrap="square" lIns="73152" rIns="73152"/>
+          <a:lstStyle/>
+          <a:p>
+            <a:pPr algn="ctr"/>
+            <a:r>
+              <a:rPr sz="1500" b="1">
+                <a:solidFill>
+                  <a:srgbClr val="DEE2E6"/>
+                </a:solidFill>
+              </a:rPr>
+              <a:t>Who owns a position</a:t>
+            </a:r>
+          </a:p>
+          <a:p>
+            <a:pPr algn="ctr"/>
+            <a:r>
+              <a:rPr sz="1300" b="0">
+                <a:solidFill>
+                  <a:srgbClr val="9AA3AB"/>
+                </a:solidFill>
+              </a:rPr>
+              <a:t>The physics world</a:t>
+            </a:r>
+          </a:p>
+        </p:txBody>
+      </p:sp>
+      <p:sp>
+        <p:nvSpPr>
+          <p:cNvPr id="8" name="Rounded Rectangle 7"/>
+          <p:cNvSpPr/>
+          <p:nvPr/>
+        </p:nvSpPr>
+        <p:spPr>
+          <a:xfrm>
+            <a:off x="3291840" y="2395728"/>
+            <a:ext cx="2560320" cy="841248"/>
+          </a:xfrm>
+          <a:prstGeom prst="roundRect">
+            <a:avLst>
+              <a:gd name="adj" fmla="val 12000"/>
+            </a:avLst>
+          </a:prstGeom>
+          <a:solidFill>
+            <a:srgbClr val="2E3338"/>
+          </a:solidFill>
+          <a:ln>
+            <a:noFill/>
+          </a:ln>
+          <a:effectLst/>
+        </p:spPr>
+        <p:style>
+          <a:lnRef idx="1">
+            <a:schemeClr val="accent1"/>
+          </a:lnRef>
+          <a:fillRef idx="3">
+            <a:schemeClr val="accent1"/>
+          </a:fillRef>
+          <a:effectRef idx="2">
+            <a:schemeClr val="accent1"/>
+          </a:effectRef>
+          <a:fontRef idx="minor">
+            <a:schemeClr val="lt1"/>
+          </a:fontRef>
+        </p:style>
+        <p:txBody>
+          <a:bodyPr rtlCol="0" anchor="ctr" wrap="square" lIns="73152" rIns="73152"/>
+          <a:lstStyle/>
+          <a:p>
+            <a:pPr algn="ctr"/>
+            <a:r>
+              <a:rPr sz="1500" b="1">
+                <a:solidFill>
+                  <a:srgbClr val="DEE2E6"/>
+                </a:solidFill>
+              </a:rPr>
+              <a:t>What hit what</a:t>
+            </a:r>
+          </a:p>
+          <a:p>
+            <a:pPr algn="ctr"/>
+            <a:r>
+              <a:rPr sz="1300" b="0">
+                <a:solidFill>
+                  <a:srgbClr val="9AA3AB"/>
+                </a:solidFill>
+              </a:rPr>
+              <a:t>Hit events, as a C# event</a:t>
+            </a:r>
+          </a:p>
+        </p:txBody>
+      </p:sp>
+      <p:sp>
+        <p:nvSpPr>
+          <p:cNvPr id="9" name="Rounded Rectangle 8"/>
+          <p:cNvSpPr/>
+          <p:nvPr/>
+        </p:nvSpPr>
+        <p:spPr>
+          <a:xfrm>
+            <a:off x="6035040" y="2395728"/>
+            <a:ext cx="2560320" cy="841248"/>
+          </a:xfrm>
+          <a:prstGeom prst="roundRect">
+            <a:avLst>
+              <a:gd name="adj" fmla="val 12000"/>
+            </a:avLst>
+          </a:prstGeom>
+          <a:solidFill>
+            <a:srgbClr val="2E3338"/>
+          </a:solidFill>
+          <a:ln>
+            <a:noFill/>
+          </a:ln>
+          <a:effectLst/>
+        </p:spPr>
+        <p:style>
+          <a:lnRef idx="1">
+            <a:schemeClr val="accent1"/>
+          </a:lnRef>
+          <a:fillRef idx="3">
+            <a:schemeClr val="accent1"/>
+          </a:fillRef>
+          <a:effectRef idx="2">
+            <a:schemeClr val="accent1"/>
+          </a:effectRef>
+          <a:fontRef idx="minor">
+            <a:schemeClr val="lt1"/>
+          </a:fontRef>
+        </p:style>
+        <p:txBody>
+          <a:bodyPr rtlCol="0" anchor="ctr" wrap="square" lIns="73152" rIns="73152"/>
+          <a:lstStyle/>
+          <a:p>
+            <a:pPr algn="ctr"/>
+            <a:r>
+              <a:rPr sz="1500" b="1">
+                <a:solidFill>
+                  <a:srgbClr val="DEE2E6"/>
+                </a:solidFill>
+              </a:rPr>
+              <a:t>Removing things safely</a:t>
+            </a:r>
+          </a:p>
+          <a:p>
+            <a:pPr algn="ctr"/>
+            <a:r>
+              <a:rPr sz="1300" b="0">
+                <a:solidFill>
+                  <a:srgbClr val="9AA3AB"/>
+                </a:solidFill>
+              </a:rPr>
+              <a:t>Mark now, remove after the step</a:t>
+            </a:r>
+          </a:p>
+        </p:txBody>
+      </p:sp>
+      <p:sp>
+        <p:nvSpPr>
+          <p:cNvPr id="10" name="Rounded Rectangle 9"/>
+          <p:cNvSpPr/>
+          <p:nvPr/>
+        </p:nvSpPr>
+        <p:spPr>
+          <a:xfrm>
+            <a:off x="3291840" y="3374136"/>
+            <a:ext cx="2560320" cy="841248"/>
+          </a:xfrm>
+          <a:prstGeom prst="roundRect">
+            <a:avLst>
+              <a:gd name="adj" fmla="val 12000"/>
+            </a:avLst>
+          </a:prstGeom>
+          <a:solidFill>
+            <a:srgbClr val="2E3338"/>
+          </a:solidFill>
+          <a:ln>
+            <a:noFill/>
+          </a:ln>
+          <a:effectLst/>
+        </p:spPr>
+        <p:style>
+          <a:lnRef idx="1">
+            <a:schemeClr val="accent1"/>
+          </a:lnRef>
+          <a:fillRef idx="3">
+            <a:schemeClr val="accent1"/>
+          </a:fillRef>
+          <a:effectRef idx="2">
+            <a:schemeClr val="accent1"/>
+          </a:effectRef>
+          <a:fontRef idx="minor">
+            <a:schemeClr val="lt1"/>
+          </a:fontRef>
+        </p:style>
+        <p:txBody>
+          <a:bodyPr rtlCol="0" anchor="ctr" wrap="square" lIns="73152" rIns="73152"/>
+          <a:lstStyle/>
+          <a:p>
+            <a:pPr algn="ctr"/>
+            <a:r>
+              <a:rPr sz="1500" b="1">
+                <a:solidFill>
+                  <a:srgbClr val="DEE2E6"/>
+                </a:solidFill>
+              </a:rPr>
+              <a:t>Many kinds of blocks and pigs</a:t>
+            </a:r>
+          </a:p>
+          <a:p>
+            <a:pPr algn="ctr"/>
+            <a:r>
+              <a:rPr sz="1300" b="0">
+                <a:solidFill>
+                  <a:srgbClr val="9AA3AB"/>
+                </a:solidFill>
+              </a:rPr>
+              <a:t>Prototype</a:t>
+            </a:r>
+          </a:p>
+        </p:txBody>
+      </p:sp>
+    </p:spTree>
+  </p:cSld>
+  <p:clrMapOvr>
+    <a:masterClrMapping/>
+  </p:clrMapOvr>
+</p:sld>
+</file>
+
 <file path=ppt/slides/slide4.xml><?xml version="1.0" encoding="utf-8"?>
 <p:sld xmlns:a="http://schemas.openxmlformats.org/drawingml/2006/main" xmlns:r="http://schemas.openxmlformats.org/officeDocument/2006/relationships" xmlns:mc="http://schemas.openxmlformats.org/markup-compatibility/2006" xmlns:mv="urn:schemas-microsoft-com:mac:vml" xmlns:p="http://schemas.openxmlformats.org/presentationml/2006/main" xmlns:c="http://schemas.openxmlformats.org/drawingml/2006/chart" xmlns:dgm="http://schemas.openxmlformats.org/drawingml/2006/diagram" xmlns:o="urn:schemas-microsoft-com:office:office" xmlns:v="urn:schemas-microsoft-com:vml" xmlns:pvml="urn:schemas-microsoft-com:office:powerpoint" xmlns:com="http://schemas.openxmlformats.org/drawingml/2006/compatibility" xmlns:p14="http://schemas.microsoft.com/office/powerpoint/2010/main" xmlns:p15="http://schemas.microsoft.com/office/powerpoint/2012/main" xmlns:ahyp="http://schemas.microsoft.com/office/drawing/2018/hyperlinkcolor">
   <p:cSld>

--- a/slides/08 Angry Birds.pptx
+++ b/slides/08 Angry Birds.pptx
@@ -1056,7 +1056,7 @@
           </a:p>
           <a:p>
             <a:r>
-              <a:t>A: For every field that refers to an object, the copy points to the same object. Sharing an unchanging sprite is fine, but sharing a physics body would make two entities one. So the clone gets its own body.</a:t>
+              <a:t>A: For every field that refers to an object, the copy points to the same object. Sharing an unchanging sprite is fine, but sharing a physics body would make two entities one. The clone therefore gets its own body.</a:t>
             </a:r>
           </a:p>
         </p:txBody>
@@ -3091,7 +3091,7 @@
           </a:p>
           <a:p>
             <a:r>
-              <a:t>So Clone clears the body, and Spawn makes a new one.</a:t>
+              <a:t>Clone therefore clears the body, and Spawn makes a new one.</a:t>
             </a:r>
           </a:p>
         </p:txBody>
@@ -15258,6 +15258,880 @@
 </file>
 
 <file path=ppt/slides/slide31.xml><?xml version="1.0" encoding="utf-8"?>
+<p:sld xmlns:a="http://schemas.openxmlformats.org/drawingml/2006/main" xmlns:p="http://schemas.openxmlformats.org/presentationml/2006/main" xmlns:r="http://schemas.openxmlformats.org/officeDocument/2006/relationships">
+  <p:cSld>
+    <p:spTree>
+      <p:nvGrpSpPr>
+        <p:cNvPr id="1" name=""/>
+        <p:cNvGrpSpPr/>
+        <p:nvPr/>
+      </p:nvGrpSpPr>
+      <p:grpSpPr/>
+      <p:sp>
+        <p:nvSpPr>
+          <p:cNvPr id="2" name="Title 1"/>
+          <p:cNvSpPr>
+            <a:spLocks noGrp="1"/>
+          </p:cNvSpPr>
+          <p:nvPr>
+            <p:ph type="title"/>
+          </p:nvPr>
+        </p:nvSpPr>
+        <p:spPr/>
+        <p:txBody>
+          <a:bodyPr/>
+          <a:lstStyle/>
+          <a:p>
+            <a:pPr indent="0" lvl="0" marL="0" rtl="0" algn="l">
+              <a:spcBef>
+                <a:spcPts val="0"/>
+              </a:spcBef>
+              <a:spcAft>
+                <a:spcPts val="0"/>
+              </a:spcAft>
+              <a:buNone/>
+            </a:pPr>
+            <a:r>
+              <a:rPr lang="en"/>
+              <a:t>The Whole Game: Who Holds What</a:t>
+            </a:r>
+            <a:endParaRPr/>
+          </a:p>
+        </p:txBody>
+      </p:sp>
+      <p:sp>
+        <p:nvSpPr>
+          <p:cNvPr id="3" name="Text Placeholder 2"/>
+          <p:cNvSpPr>
+            <a:spLocks noGrp="1"/>
+          </p:cNvSpPr>
+          <p:nvPr>
+            <p:ph type="body" idx="1"/>
+          </p:nvPr>
+        </p:nvSpPr>
+        <p:spPr>
+          <a:xfrm>
+            <a:off x="311700" y="885950"/>
+            <a:ext cx="8520600" cy="521208"/>
+          </a:xfrm>
+        </p:spPr>
+        <p:txBody>
+          <a:bodyPr/>
+          <a:lstStyle/>
+          <a:p>
+            <a:pPr indent="-330200" lvl="0" marL="457200" rtl="0" algn="l">
+              <a:spcBef>
+                <a:spcPts val="0"/>
+              </a:spcBef>
+              <a:spcAft>
+                <a:spcPts val="0"/>
+              </a:spcAft>
+              <a:buSzPts val="1600"/>
+              <a:buChar char="●"/>
+            </a:pPr>
+            <a:r>
+              <a:rPr lang="en" b="1"/>
+              <a:t>Box2D is reached from the Physics folder only.</a:t>
+            </a:r>
+            <a:endParaRPr/>
+          </a:p>
+        </p:txBody>
+      </p:sp>
+      <p:sp>
+        <p:nvSpPr>
+          <p:cNvPr id="4" name="Rounded Rectangle 3"/>
+          <p:cNvSpPr/>
+          <p:nvPr/>
+        </p:nvSpPr>
+        <p:spPr>
+          <a:xfrm>
+            <a:off x="3429000" y="1481328"/>
+            <a:ext cx="2286000" cy="566928"/>
+          </a:xfrm>
+          <a:prstGeom prst="roundRect">
+            <a:avLst>
+              <a:gd name="adj" fmla="val 12000"/>
+            </a:avLst>
+          </a:prstGeom>
+          <a:solidFill>
+            <a:srgbClr val="2E3338"/>
+          </a:solidFill>
+          <a:ln w="25400">
+            <a:solidFill>
+              <a:srgbClr val="D45D35"/>
+            </a:solidFill>
+          </a:ln>
+          <a:effectLst/>
+        </p:spPr>
+        <p:style>
+          <a:lnRef idx="1">
+            <a:schemeClr val="accent1"/>
+          </a:lnRef>
+          <a:fillRef idx="3">
+            <a:schemeClr val="accent1"/>
+          </a:fillRef>
+          <a:effectRef idx="2">
+            <a:schemeClr val="accent1"/>
+          </a:effectRef>
+          <a:fontRef idx="minor">
+            <a:schemeClr val="lt1"/>
+          </a:fontRef>
+        </p:style>
+        <p:txBody>
+          <a:bodyPr rtlCol="0" anchor="ctr" wrap="square" lIns="73152" rIns="73152"/>
+          <a:lstStyle/>
+          <a:p>
+            <a:pPr algn="ctr"/>
+            <a:r>
+              <a:rPr sz="1300" b="1">
+                <a:solidFill>
+                  <a:srgbClr val="DEE2E6"/>
+                </a:solidFill>
+              </a:rPr>
+              <a:t>Game1 : Core</a:t>
+            </a:r>
+          </a:p>
+        </p:txBody>
+      </p:sp>
+      <p:sp>
+        <p:nvSpPr>
+          <p:cNvPr id="5" name="Rounded Rectangle 4"/>
+          <p:cNvSpPr/>
+          <p:nvPr/>
+        </p:nvSpPr>
+        <p:spPr>
+          <a:xfrm>
+            <a:off x="374903" y="2596896"/>
+            <a:ext cx="1591056" cy="566928"/>
+          </a:xfrm>
+          <a:prstGeom prst="roundRect">
+            <a:avLst>
+              <a:gd name="adj" fmla="val 12000"/>
+            </a:avLst>
+          </a:prstGeom>
+          <a:solidFill>
+            <a:srgbClr val="2E3338"/>
+          </a:solidFill>
+          <a:ln>
+            <a:noFill/>
+          </a:ln>
+          <a:effectLst/>
+        </p:spPr>
+        <p:style>
+          <a:lnRef idx="1">
+            <a:schemeClr val="accent1"/>
+          </a:lnRef>
+          <a:fillRef idx="3">
+            <a:schemeClr val="accent1"/>
+          </a:fillRef>
+          <a:effectRef idx="2">
+            <a:schemeClr val="accent1"/>
+          </a:effectRef>
+          <a:fontRef idx="minor">
+            <a:schemeClr val="lt1"/>
+          </a:fontRef>
+        </p:style>
+        <p:txBody>
+          <a:bodyPr rtlCol="0" anchor="ctr" wrap="square" lIns="73152" rIns="73152"/>
+          <a:lstStyle/>
+          <a:p>
+            <a:pPr algn="ctr"/>
+            <a:r>
+              <a:rPr sz="1300" b="1">
+                <a:solidFill>
+                  <a:srgbClr val="DEE2E6"/>
+                </a:solidFill>
+              </a:rPr>
+              <a:t>Game states</a:t>
+            </a:r>
+          </a:p>
+          <a:p>
+            <a:pPr algn="ctr"/>
+            <a:r>
+              <a:rPr sz="1100" b="0">
+                <a:solidFill>
+                  <a:srgbClr val="9AA3AB"/>
+                </a:solidFill>
+              </a:rPr>
+              <a:t>aim, fly, level end</a:t>
+            </a:r>
+          </a:p>
+        </p:txBody>
+      </p:sp>
+      <p:cxnSp>
+        <p:nvCxnSpPr>
+          <p:cNvPr id="6" name="Connector 5"/>
+          <p:cNvCxnSpPr/>
+          <p:nvPr/>
+        </p:nvCxnSpPr>
+        <p:spPr>
+          <a:xfrm flipH="1">
+            <a:off x="1170432" y="2066544"/>
+            <a:ext cx="3401568" cy="512064"/>
+          </a:xfrm>
+          <a:prstGeom prst="line">
+            <a:avLst/>
+          </a:prstGeom>
+          <a:ln w="25400">
+            <a:solidFill>
+              <a:srgbClr val="9AA3AB"/>
+            </a:solidFill>
+            <a:tailEnd type="triangle"/>
+          </a:ln>
+        </p:spPr>
+        <p:style>
+          <a:lnRef idx="2">
+            <a:schemeClr val="accent1"/>
+          </a:lnRef>
+          <a:fillRef idx="0">
+            <a:schemeClr val="accent1"/>
+          </a:fillRef>
+          <a:effectRef idx="1">
+            <a:schemeClr val="accent1"/>
+          </a:effectRef>
+          <a:fontRef idx="minor">
+            <a:schemeClr val="tx1"/>
+          </a:fontRef>
+        </p:style>
+      </p:cxnSp>
+      <p:sp>
+        <p:nvSpPr>
+          <p:cNvPr id="7" name="Rounded Rectangle 6"/>
+          <p:cNvSpPr/>
+          <p:nvPr/>
+        </p:nvSpPr>
+        <p:spPr>
+          <a:xfrm>
+            <a:off x="2075688" y="2596896"/>
+            <a:ext cx="1591056" cy="566928"/>
+          </a:xfrm>
+          <a:prstGeom prst="roundRect">
+            <a:avLst>
+              <a:gd name="adj" fmla="val 12000"/>
+            </a:avLst>
+          </a:prstGeom>
+          <a:solidFill>
+            <a:srgbClr val="2E3338"/>
+          </a:solidFill>
+          <a:ln>
+            <a:noFill/>
+          </a:ln>
+          <a:effectLst/>
+        </p:spPr>
+        <p:style>
+          <a:lnRef idx="1">
+            <a:schemeClr val="accent1"/>
+          </a:lnRef>
+          <a:fillRef idx="3">
+            <a:schemeClr val="accent1"/>
+          </a:fillRef>
+          <a:effectRef idx="2">
+            <a:schemeClr val="accent1"/>
+          </a:effectRef>
+          <a:fontRef idx="minor">
+            <a:schemeClr val="lt1"/>
+          </a:fontRef>
+        </p:style>
+        <p:txBody>
+          <a:bodyPr rtlCol="0" anchor="ctr" wrap="square" lIns="73152" rIns="73152"/>
+          <a:lstStyle/>
+          <a:p>
+            <a:pPr algn="ctr"/>
+            <a:r>
+              <a:rPr sz="1300" b="1">
+                <a:solidFill>
+                  <a:srgbClr val="DEE2E6"/>
+                </a:solidFill>
+              </a:rPr>
+              <a:t>PhysicsWorld</a:t>
+            </a:r>
+          </a:p>
+          <a:p>
+            <a:pPr algn="ctr"/>
+            <a:r>
+              <a:rPr sz="1100" b="0">
+                <a:solidFill>
+                  <a:srgbClr val="9AA3AB"/>
+                </a:solidFill>
+              </a:rPr>
+              <a:t>the facade</a:t>
+            </a:r>
+          </a:p>
+        </p:txBody>
+      </p:sp>
+      <p:sp>
+        <p:nvSpPr>
+          <p:cNvPr id="8" name="Rounded Rectangle 7"/>
+          <p:cNvSpPr/>
+          <p:nvPr/>
+        </p:nvSpPr>
+        <p:spPr>
+          <a:xfrm>
+            <a:off x="2075688" y="3712464"/>
+            <a:ext cx="1591056" cy="566928"/>
+          </a:xfrm>
+          <a:prstGeom prst="roundRect">
+            <a:avLst>
+              <a:gd name="adj" fmla="val 12000"/>
+            </a:avLst>
+          </a:prstGeom>
+          <a:solidFill>
+            <a:srgbClr val="2E3338"/>
+          </a:solidFill>
+          <a:ln>
+            <a:noFill/>
+          </a:ln>
+          <a:effectLst/>
+        </p:spPr>
+        <p:style>
+          <a:lnRef idx="1">
+            <a:schemeClr val="accent1"/>
+          </a:lnRef>
+          <a:fillRef idx="3">
+            <a:schemeClr val="accent1"/>
+          </a:fillRef>
+          <a:effectRef idx="2">
+            <a:schemeClr val="accent1"/>
+          </a:effectRef>
+          <a:fontRef idx="minor">
+            <a:schemeClr val="lt1"/>
+          </a:fontRef>
+        </p:style>
+        <p:txBody>
+          <a:bodyPr rtlCol="0" anchor="ctr" wrap="square" lIns="73152" rIns="73152"/>
+          <a:lstStyle/>
+          <a:p>
+            <a:pPr algn="ctr"/>
+            <a:r>
+              <a:rPr sz="1300" b="1">
+                <a:solidFill>
+                  <a:srgbClr val="DEE2E6"/>
+                </a:solidFill>
+              </a:rPr>
+              <a:t>Box2D</a:t>
+            </a:r>
+          </a:p>
+          <a:p>
+            <a:pPr algn="ctr"/>
+            <a:r>
+              <a:rPr sz="1100" b="0">
+                <a:solidFill>
+                  <a:srgbClr val="9AA3AB"/>
+                </a:solidFill>
+              </a:rPr>
+              <a:t>the library</a:t>
+            </a:r>
+          </a:p>
+        </p:txBody>
+      </p:sp>
+      <p:cxnSp>
+        <p:nvCxnSpPr>
+          <p:cNvPr id="9" name="Connector 8"/>
+          <p:cNvCxnSpPr/>
+          <p:nvPr/>
+        </p:nvCxnSpPr>
+        <p:spPr>
+          <a:xfrm>
+            <a:off x="2871216" y="3182112"/>
+            <a:ext cx="0" cy="512064"/>
+          </a:xfrm>
+          <a:prstGeom prst="line">
+            <a:avLst/>
+          </a:prstGeom>
+          <a:ln w="25400">
+            <a:solidFill>
+              <a:srgbClr val="9AA3AB"/>
+            </a:solidFill>
+            <a:tailEnd type="triangle"/>
+          </a:ln>
+        </p:spPr>
+        <p:style>
+          <a:lnRef idx="2">
+            <a:schemeClr val="accent1"/>
+          </a:lnRef>
+          <a:fillRef idx="0">
+            <a:schemeClr val="accent1"/>
+          </a:fillRef>
+          <a:effectRef idx="1">
+            <a:schemeClr val="accent1"/>
+          </a:effectRef>
+          <a:fontRef idx="minor">
+            <a:schemeClr val="tx1"/>
+          </a:fontRef>
+        </p:style>
+      </p:cxnSp>
+      <p:cxnSp>
+        <p:nvCxnSpPr>
+          <p:cNvPr id="10" name="Connector 9"/>
+          <p:cNvCxnSpPr/>
+          <p:nvPr/>
+        </p:nvCxnSpPr>
+        <p:spPr>
+          <a:xfrm flipH="1">
+            <a:off x="2871216" y="2066544"/>
+            <a:ext cx="1700784" cy="512064"/>
+          </a:xfrm>
+          <a:prstGeom prst="line">
+            <a:avLst/>
+          </a:prstGeom>
+          <a:ln w="25400">
+            <a:solidFill>
+              <a:srgbClr val="9AA3AB"/>
+            </a:solidFill>
+            <a:tailEnd type="triangle"/>
+          </a:ln>
+        </p:spPr>
+        <p:style>
+          <a:lnRef idx="2">
+            <a:schemeClr val="accent1"/>
+          </a:lnRef>
+          <a:fillRef idx="0">
+            <a:schemeClr val="accent1"/>
+          </a:fillRef>
+          <a:effectRef idx="1">
+            <a:schemeClr val="accent1"/>
+          </a:effectRef>
+          <a:fontRef idx="minor">
+            <a:schemeClr val="tx1"/>
+          </a:fontRef>
+        </p:style>
+      </p:cxnSp>
+      <p:sp>
+        <p:nvSpPr>
+          <p:cNvPr id="11" name="Rounded Rectangle 10"/>
+          <p:cNvSpPr/>
+          <p:nvPr/>
+        </p:nvSpPr>
+        <p:spPr>
+          <a:xfrm>
+            <a:off x="3776472" y="2596896"/>
+            <a:ext cx="1591056" cy="566928"/>
+          </a:xfrm>
+          <a:prstGeom prst="roundRect">
+            <a:avLst>
+              <a:gd name="adj" fmla="val 12000"/>
+            </a:avLst>
+          </a:prstGeom>
+          <a:solidFill>
+            <a:srgbClr val="2E3338"/>
+          </a:solidFill>
+          <a:ln>
+            <a:noFill/>
+          </a:ln>
+          <a:effectLst/>
+        </p:spPr>
+        <p:style>
+          <a:lnRef idx="1">
+            <a:schemeClr val="accent1"/>
+          </a:lnRef>
+          <a:fillRef idx="3">
+            <a:schemeClr val="accent1"/>
+          </a:fillRef>
+          <a:effectRef idx="2">
+            <a:schemeClr val="accent1"/>
+          </a:effectRef>
+          <a:fontRef idx="minor">
+            <a:schemeClr val="lt1"/>
+          </a:fontRef>
+        </p:style>
+        <p:txBody>
+          <a:bodyPr rtlCol="0" anchor="ctr" wrap="square" lIns="73152" rIns="73152"/>
+          <a:lstStyle/>
+          <a:p>
+            <a:pPr algn="ctr"/>
+            <a:r>
+              <a:rPr sz="1300" b="1">
+                <a:solidFill>
+                  <a:srgbClr val="DEE2E6"/>
+                </a:solidFill>
+              </a:rPr>
+              <a:t>Prefabs</a:t>
+            </a:r>
+          </a:p>
+          <a:p>
+            <a:pPr algn="ctr"/>
+            <a:r>
+              <a:rPr sz="1100" b="0">
+                <a:solidFill>
+                  <a:srgbClr val="9AA3AB"/>
+                </a:solidFill>
+              </a:rPr>
+              <a:t>clones entities</a:t>
+            </a:r>
+          </a:p>
+        </p:txBody>
+      </p:sp>
+      <p:cxnSp>
+        <p:nvCxnSpPr>
+          <p:cNvPr id="12" name="Connector 11"/>
+          <p:cNvCxnSpPr/>
+          <p:nvPr/>
+        </p:nvCxnSpPr>
+        <p:spPr>
+          <a:xfrm>
+            <a:off x="4572000" y="2066544"/>
+            <a:ext cx="0" cy="512064"/>
+          </a:xfrm>
+          <a:prstGeom prst="line">
+            <a:avLst/>
+          </a:prstGeom>
+          <a:ln w="25400">
+            <a:solidFill>
+              <a:srgbClr val="9AA3AB"/>
+            </a:solidFill>
+            <a:tailEnd type="triangle"/>
+          </a:ln>
+        </p:spPr>
+        <p:style>
+          <a:lnRef idx="2">
+            <a:schemeClr val="accent1"/>
+          </a:lnRef>
+          <a:fillRef idx="0">
+            <a:schemeClr val="accent1"/>
+          </a:fillRef>
+          <a:effectRef idx="1">
+            <a:schemeClr val="accent1"/>
+          </a:effectRef>
+          <a:fontRef idx="minor">
+            <a:schemeClr val="tx1"/>
+          </a:fontRef>
+        </p:style>
+      </p:cxnSp>
+      <p:sp>
+        <p:nvSpPr>
+          <p:cNvPr id="13" name="Rounded Rectangle 12"/>
+          <p:cNvSpPr/>
+          <p:nvPr/>
+        </p:nvSpPr>
+        <p:spPr>
+          <a:xfrm>
+            <a:off x="5477256" y="2596896"/>
+            <a:ext cx="1591056" cy="566928"/>
+          </a:xfrm>
+          <a:prstGeom prst="roundRect">
+            <a:avLst>
+              <a:gd name="adj" fmla="val 12000"/>
+            </a:avLst>
+          </a:prstGeom>
+          <a:solidFill>
+            <a:srgbClr val="2E3338"/>
+          </a:solidFill>
+          <a:ln>
+            <a:noFill/>
+          </a:ln>
+          <a:effectLst/>
+        </p:spPr>
+        <p:style>
+          <a:lnRef idx="1">
+            <a:schemeClr val="accent1"/>
+          </a:lnRef>
+          <a:fillRef idx="3">
+            <a:schemeClr val="accent1"/>
+          </a:fillRef>
+          <a:effectRef idx="2">
+            <a:schemeClr val="accent1"/>
+          </a:effectRef>
+          <a:fontRef idx="minor">
+            <a:schemeClr val="lt1"/>
+          </a:fontRef>
+        </p:style>
+        <p:txBody>
+          <a:bodyPr rtlCol="0" anchor="ctr" wrap="square" lIns="73152" rIns="73152"/>
+          <a:lstStyle/>
+          <a:p>
+            <a:pPr algn="ctr"/>
+            <a:r>
+              <a:rPr sz="1300" b="1">
+                <a:solidFill>
+                  <a:srgbClr val="DEE2E6"/>
+                </a:solidFill>
+              </a:rPr>
+              <a:t>Entities</a:t>
+            </a:r>
+          </a:p>
+          <a:p>
+            <a:pPr algn="ctr"/>
+            <a:r>
+              <a:rPr sz="1100" b="0">
+                <a:solidFill>
+                  <a:srgbClr val="9AA3AB"/>
+                </a:solidFill>
+              </a:rPr>
+              <a:t>blocks, pigs, the bird</a:t>
+            </a:r>
+          </a:p>
+        </p:txBody>
+      </p:sp>
+      <p:sp>
+        <p:nvSpPr>
+          <p:cNvPr id="14" name="Rounded Rectangle 13"/>
+          <p:cNvSpPr/>
+          <p:nvPr/>
+        </p:nvSpPr>
+        <p:spPr>
+          <a:xfrm>
+            <a:off x="5477256" y="3712464"/>
+            <a:ext cx="1591056" cy="566928"/>
+          </a:xfrm>
+          <a:prstGeom prst="roundRect">
+            <a:avLst>
+              <a:gd name="adj" fmla="val 12000"/>
+            </a:avLst>
+          </a:prstGeom>
+          <a:solidFill>
+            <a:srgbClr val="2E3338"/>
+          </a:solidFill>
+          <a:ln>
+            <a:noFill/>
+          </a:ln>
+          <a:effectLst/>
+        </p:spPr>
+        <p:style>
+          <a:lnRef idx="1">
+            <a:schemeClr val="accent1"/>
+          </a:lnRef>
+          <a:fillRef idx="3">
+            <a:schemeClr val="accent1"/>
+          </a:fillRef>
+          <a:effectRef idx="2">
+            <a:schemeClr val="accent1"/>
+          </a:effectRef>
+          <a:fontRef idx="minor">
+            <a:schemeClr val="lt1"/>
+          </a:fontRef>
+        </p:style>
+        <p:txBody>
+          <a:bodyPr rtlCol="0" anchor="ctr" wrap="square" lIns="73152" rIns="73152"/>
+          <a:lstStyle/>
+          <a:p>
+            <a:pPr algn="ctr"/>
+            <a:r>
+              <a:rPr sz="1300" b="1">
+                <a:solidFill>
+                  <a:srgbClr val="DEE2E6"/>
+                </a:solidFill>
+              </a:rPr>
+              <a:t>PhysicsBody</a:t>
+            </a:r>
+          </a:p>
+          <a:p>
+            <a:pPr algn="ctr"/>
+            <a:r>
+              <a:rPr sz="1100" b="0">
+                <a:solidFill>
+                  <a:srgbClr val="9AA3AB"/>
+                </a:solidFill>
+              </a:rPr>
+              <a:t>the adapter</a:t>
+            </a:r>
+          </a:p>
+        </p:txBody>
+      </p:sp>
+      <p:cxnSp>
+        <p:nvCxnSpPr>
+          <p:cNvPr id="15" name="Connector 14"/>
+          <p:cNvCxnSpPr/>
+          <p:nvPr/>
+        </p:nvCxnSpPr>
+        <p:spPr>
+          <a:xfrm>
+            <a:off x="6272784" y="3182112"/>
+            <a:ext cx="0" cy="512064"/>
+          </a:xfrm>
+          <a:prstGeom prst="line">
+            <a:avLst/>
+          </a:prstGeom>
+          <a:ln w="25400">
+            <a:solidFill>
+              <a:srgbClr val="9AA3AB"/>
+            </a:solidFill>
+            <a:tailEnd type="triangle"/>
+          </a:ln>
+        </p:spPr>
+        <p:style>
+          <a:lnRef idx="2">
+            <a:schemeClr val="accent1"/>
+          </a:lnRef>
+          <a:fillRef idx="0">
+            <a:schemeClr val="accent1"/>
+          </a:fillRef>
+          <a:effectRef idx="1">
+            <a:schemeClr val="accent1"/>
+          </a:effectRef>
+          <a:fontRef idx="minor">
+            <a:schemeClr val="tx1"/>
+          </a:fontRef>
+        </p:style>
+      </p:cxnSp>
+      <p:cxnSp>
+        <p:nvCxnSpPr>
+          <p:cNvPr id="16" name="Connector 15"/>
+          <p:cNvCxnSpPr/>
+          <p:nvPr/>
+        </p:nvCxnSpPr>
+        <p:spPr>
+          <a:xfrm>
+            <a:off x="4572000" y="2066544"/>
+            <a:ext cx="1700784" cy="512064"/>
+          </a:xfrm>
+          <a:prstGeom prst="line">
+            <a:avLst/>
+          </a:prstGeom>
+          <a:ln w="25400">
+            <a:solidFill>
+              <a:srgbClr val="9AA3AB"/>
+            </a:solidFill>
+            <a:tailEnd type="triangle"/>
+          </a:ln>
+        </p:spPr>
+        <p:style>
+          <a:lnRef idx="2">
+            <a:schemeClr val="accent1"/>
+          </a:lnRef>
+          <a:fillRef idx="0">
+            <a:schemeClr val="accent1"/>
+          </a:fillRef>
+          <a:effectRef idx="1">
+            <a:schemeClr val="accent1"/>
+          </a:effectRef>
+          <a:fontRef idx="minor">
+            <a:schemeClr val="tx1"/>
+          </a:fontRef>
+        </p:style>
+      </p:cxnSp>
+      <p:sp>
+        <p:nvSpPr>
+          <p:cNvPr id="17" name="Rounded Rectangle 16"/>
+          <p:cNvSpPr/>
+          <p:nvPr/>
+        </p:nvSpPr>
+        <p:spPr>
+          <a:xfrm>
+            <a:off x="7178040" y="2596896"/>
+            <a:ext cx="1591056" cy="566928"/>
+          </a:xfrm>
+          <a:prstGeom prst="roundRect">
+            <a:avLst>
+              <a:gd name="adj" fmla="val 12000"/>
+            </a:avLst>
+          </a:prstGeom>
+          <a:solidFill>
+            <a:srgbClr val="2E3338"/>
+          </a:solidFill>
+          <a:ln>
+            <a:noFill/>
+          </a:ln>
+          <a:effectLst/>
+        </p:spPr>
+        <p:style>
+          <a:lnRef idx="1">
+            <a:schemeClr val="accent1"/>
+          </a:lnRef>
+          <a:fillRef idx="3">
+            <a:schemeClr val="accent1"/>
+          </a:fillRef>
+          <a:effectRef idx="2">
+            <a:schemeClr val="accent1"/>
+          </a:effectRef>
+          <a:fontRef idx="minor">
+            <a:schemeClr val="lt1"/>
+          </a:fontRef>
+        </p:style>
+        <p:txBody>
+          <a:bodyPr rtlCol="0" anchor="ctr" wrap="square" lIns="73152" rIns="73152"/>
+          <a:lstStyle/>
+          <a:p>
+            <a:pPr algn="ctr"/>
+            <a:r>
+              <a:rPr sz="1300" b="1">
+                <a:solidFill>
+                  <a:srgbClr val="DEE2E6"/>
+                </a:solidFill>
+              </a:rPr>
+              <a:t>Slingshot</a:t>
+            </a:r>
+          </a:p>
+        </p:txBody>
+      </p:sp>
+      <p:cxnSp>
+        <p:nvCxnSpPr>
+          <p:cNvPr id="18" name="Connector 17"/>
+          <p:cNvCxnSpPr/>
+          <p:nvPr/>
+        </p:nvCxnSpPr>
+        <p:spPr>
+          <a:xfrm>
+            <a:off x="4572000" y="2066544"/>
+            <a:ext cx="3401568" cy="512064"/>
+          </a:xfrm>
+          <a:prstGeom prst="line">
+            <a:avLst/>
+          </a:prstGeom>
+          <a:ln w="25400">
+            <a:solidFill>
+              <a:srgbClr val="9AA3AB"/>
+            </a:solidFill>
+            <a:tailEnd type="triangle"/>
+          </a:ln>
+        </p:spPr>
+        <p:style>
+          <a:lnRef idx="2">
+            <a:schemeClr val="accent1"/>
+          </a:lnRef>
+          <a:fillRef idx="0">
+            <a:schemeClr val="accent1"/>
+          </a:fillRef>
+          <a:effectRef idx="1">
+            <a:schemeClr val="accent1"/>
+          </a:effectRef>
+          <a:fontRef idx="minor">
+            <a:schemeClr val="tx1"/>
+          </a:fontRef>
+        </p:style>
+      </p:cxnSp>
+      <p:sp>
+        <p:nvSpPr>
+          <p:cNvPr id="19" name="TextBox 18"/>
+          <p:cNvSpPr txBox="1"/>
+          <p:nvPr/>
+        </p:nvSpPr>
+        <p:spPr>
+          <a:xfrm>
+            <a:off x="457200" y="4462272"/>
+            <a:ext cx="8229600" cy="365760"/>
+          </a:xfrm>
+          <a:prstGeom prst="rect">
+            <a:avLst/>
+          </a:prstGeom>
+          <a:noFill/>
+        </p:spPr>
+        <p:txBody>
+          <a:bodyPr wrap="square">
+            <a:spAutoFit/>
+          </a:bodyPr>
+          <a:lstStyle/>
+          <a:p>
+            <a:pPr algn="ctr"/>
+            <a:r>
+              <a:rPr sz="1300" b="0" i="0">
+                <a:solidFill>
+                  <a:srgbClr val="9AA3AB"/>
+                </a:solidFill>
+              </a:rPr>
+              <a:t>A level file names prefabs, and Prefabs clones them into the world.</a:t>
+            </a:r>
+          </a:p>
+        </p:txBody>
+      </p:sp>
+    </p:spTree>
+  </p:cSld>
+  <p:clrMapOvr>
+    <a:masterClrMapping/>
+  </p:clrMapOvr>
+</p:sld>
+</file>
+
+<file path=ppt/slides/slide32.xml><?xml version="1.0" encoding="utf-8"?>
 <p:sld xmlns:a="http://schemas.openxmlformats.org/drawingml/2006/main" xmlns:r="http://schemas.openxmlformats.org/officeDocument/2006/relationships" xmlns:mc="http://schemas.openxmlformats.org/markup-compatibility/2006" xmlns:mv="urn:schemas-microsoft-com:mac:vml" xmlns:p="http://schemas.openxmlformats.org/presentationml/2006/main" xmlns:c="http://schemas.openxmlformats.org/drawingml/2006/chart" xmlns:dgm="http://schemas.openxmlformats.org/drawingml/2006/diagram" xmlns:o="urn:schemas-microsoft-com:office:office" xmlns:v="urn:schemas-microsoft-com:vml" xmlns:pvml="urn:schemas-microsoft-com:office:powerpoint" xmlns:com="http://schemas.openxmlformats.org/drawingml/2006/compatibility" xmlns:p14="http://schemas.microsoft.com/office/powerpoint/2010/main" xmlns:p15="http://schemas.microsoft.com/office/powerpoint/2012/main" xmlns:ahyp="http://schemas.microsoft.com/office/drawing/2018/hyperlinkcolor">
   <p:cSld>
     <p:spTree>
@@ -15391,7 +16265,550 @@
 </p:sld>
 </file>
 
-<file path=ppt/slides/slide32.xml><?xml version="1.0" encoding="utf-8"?>
+<file path=ppt/slides/slide33.xml><?xml version="1.0" encoding="utf-8"?>
+<p:sld xmlns:a="http://schemas.openxmlformats.org/drawingml/2006/main" xmlns:p="http://schemas.openxmlformats.org/presentationml/2006/main" xmlns:r="http://schemas.openxmlformats.org/officeDocument/2006/relationships">
+  <p:cSld>
+    <p:spTree>
+      <p:nvGrpSpPr>
+        <p:cNvPr id="1" name=""/>
+        <p:cNvGrpSpPr/>
+        <p:nvPr/>
+      </p:nvGrpSpPr>
+      <p:grpSpPr/>
+      <p:sp>
+        <p:nvSpPr>
+          <p:cNvPr id="2" name="Title 1"/>
+          <p:cNvSpPr>
+            <a:spLocks noGrp="1"/>
+          </p:cNvSpPr>
+          <p:nvPr>
+            <p:ph type="title"/>
+          </p:nvPr>
+        </p:nvSpPr>
+        <p:spPr/>
+        <p:txBody>
+          <a:bodyPr/>
+          <a:lstStyle/>
+          <a:p>
+            <a:pPr indent="0" lvl="0" marL="0" rtl="0" algn="l">
+              <a:spcBef>
+                <a:spcPts val="0"/>
+              </a:spcBef>
+              <a:spcAft>
+                <a:spcPts val="0"/>
+              </a:spcAft>
+              <a:buNone/>
+            </a:pPr>
+            <a:r>
+              <a:rPr lang="en"/>
+              <a:t>Summary</a:t>
+            </a:r>
+            <a:endParaRPr/>
+          </a:p>
+        </p:txBody>
+      </p:sp>
+      <p:sp>
+        <p:nvSpPr>
+          <p:cNvPr id="3" name="Text Placeholder 2"/>
+          <p:cNvSpPr>
+            <a:spLocks noGrp="1"/>
+          </p:cNvSpPr>
+          <p:nvPr>
+            <p:ph type="body" idx="1"/>
+          </p:nvPr>
+        </p:nvSpPr>
+        <p:spPr>
+          <a:xfrm>
+            <a:off x="311700" y="885950"/>
+            <a:ext cx="8520600" cy="521208"/>
+          </a:xfrm>
+        </p:spPr>
+        <p:txBody>
+          <a:bodyPr/>
+          <a:lstStyle/>
+          <a:p>
+            <a:pPr indent="-330200" lvl="0" marL="457200" rtl="0" algn="l">
+              <a:spcBef>
+                <a:spcPts val="0"/>
+              </a:spcBef>
+              <a:spcAft>
+                <a:spcPts val="0"/>
+              </a:spcAft>
+              <a:buSzPts val="1600"/>
+              <a:buChar char="●"/>
+            </a:pPr>
+            <a:r>
+              <a:rPr lang="en" b="1"/>
+              <a:t>Seven concerns, and this session’s answer to each.</a:t>
+            </a:r>
+            <a:endParaRPr/>
+          </a:p>
+        </p:txBody>
+      </p:sp>
+      <p:sp>
+        <p:nvSpPr>
+          <p:cNvPr id="4" name="Rounded Rectangle 3"/>
+          <p:cNvSpPr/>
+          <p:nvPr/>
+        </p:nvSpPr>
+        <p:spPr>
+          <a:xfrm>
+            <a:off x="548640" y="1417320"/>
+            <a:ext cx="2560320" cy="841248"/>
+          </a:xfrm>
+          <a:prstGeom prst="roundRect">
+            <a:avLst>
+              <a:gd name="adj" fmla="val 12000"/>
+            </a:avLst>
+          </a:prstGeom>
+          <a:solidFill>
+            <a:srgbClr val="2E3338"/>
+          </a:solidFill>
+          <a:ln>
+            <a:noFill/>
+          </a:ln>
+          <a:effectLst/>
+        </p:spPr>
+        <p:style>
+          <a:lnRef idx="1">
+            <a:schemeClr val="accent1"/>
+          </a:lnRef>
+          <a:fillRef idx="3">
+            <a:schemeClr val="accent1"/>
+          </a:fillRef>
+          <a:effectRef idx="2">
+            <a:schemeClr val="accent1"/>
+          </a:effectRef>
+          <a:fontRef idx="minor">
+            <a:schemeClr val="lt1"/>
+          </a:fontRef>
+        </p:style>
+        <p:txBody>
+          <a:bodyPr rtlCol="0" anchor="ctr" wrap="square" lIns="73152" rIns="73152"/>
+          <a:lstStyle/>
+          <a:p>
+            <a:pPr algn="ctr"/>
+            <a:r>
+              <a:rPr sz="1500" b="1">
+                <a:solidFill>
+                  <a:srgbClr val="DEE2E6"/>
+                </a:solidFill>
+              </a:rPr>
+              <a:t>A library that doesn’t fit our code</a:t>
+            </a:r>
+          </a:p>
+          <a:p>
+            <a:pPr algn="ctr"/>
+            <a:r>
+              <a:rPr sz="1300" b="0">
+                <a:solidFill>
+                  <a:srgbClr val="9AA3AB"/>
+                </a:solidFill>
+              </a:rPr>
+              <a:t>Adapter: PhysicsBody</a:t>
+            </a:r>
+          </a:p>
+        </p:txBody>
+      </p:sp>
+      <p:sp>
+        <p:nvSpPr>
+          <p:cNvPr id="5" name="Rounded Rectangle 4"/>
+          <p:cNvSpPr/>
+          <p:nvPr/>
+        </p:nvSpPr>
+        <p:spPr>
+          <a:xfrm>
+            <a:off x="3291840" y="1417320"/>
+            <a:ext cx="2560320" cy="841248"/>
+          </a:xfrm>
+          <a:prstGeom prst="roundRect">
+            <a:avLst>
+              <a:gd name="adj" fmla="val 12000"/>
+            </a:avLst>
+          </a:prstGeom>
+          <a:solidFill>
+            <a:srgbClr val="2E3338"/>
+          </a:solidFill>
+          <a:ln>
+            <a:noFill/>
+          </a:ln>
+          <a:effectLst/>
+        </p:spPr>
+        <p:style>
+          <a:lnRef idx="1">
+            <a:schemeClr val="accent1"/>
+          </a:lnRef>
+          <a:fillRef idx="3">
+            <a:schemeClr val="accent1"/>
+          </a:fillRef>
+          <a:effectRef idx="2">
+            <a:schemeClr val="accent1"/>
+          </a:effectRef>
+          <a:fontRef idx="minor">
+            <a:schemeClr val="lt1"/>
+          </a:fontRef>
+        </p:style>
+        <p:txBody>
+          <a:bodyPr rtlCol="0" anchor="ctr" wrap="square" lIns="73152" rIns="73152"/>
+          <a:lstStyle/>
+          <a:p>
+            <a:pPr algn="ctr"/>
+            <a:r>
+              <a:rPr sz="1500" b="1">
+                <a:solidFill>
+                  <a:srgbClr val="DEE2E6"/>
+                </a:solidFill>
+              </a:rPr>
+              <a:t>A big library, little needed</a:t>
+            </a:r>
+          </a:p>
+          <a:p>
+            <a:pPr algn="ctr"/>
+            <a:r>
+              <a:rPr sz="1300" b="0">
+                <a:solidFill>
+                  <a:srgbClr val="9AA3AB"/>
+                </a:solidFill>
+              </a:rPr>
+              <a:t>Facade: PhysicsWorld</a:t>
+            </a:r>
+          </a:p>
+        </p:txBody>
+      </p:sp>
+      <p:sp>
+        <p:nvSpPr>
+          <p:cNvPr id="6" name="Rounded Rectangle 5"/>
+          <p:cNvSpPr/>
+          <p:nvPr/>
+        </p:nvSpPr>
+        <p:spPr>
+          <a:xfrm>
+            <a:off x="6035040" y="1417320"/>
+            <a:ext cx="2560320" cy="841248"/>
+          </a:xfrm>
+          <a:prstGeom prst="roundRect">
+            <a:avLst>
+              <a:gd name="adj" fmla="val 12000"/>
+            </a:avLst>
+          </a:prstGeom>
+          <a:solidFill>
+            <a:srgbClr val="2E3338"/>
+          </a:solidFill>
+          <a:ln>
+            <a:noFill/>
+          </a:ln>
+          <a:effectLst/>
+        </p:spPr>
+        <p:style>
+          <a:lnRef idx="1">
+            <a:schemeClr val="accent1"/>
+          </a:lnRef>
+          <a:fillRef idx="3">
+            <a:schemeClr val="accent1"/>
+          </a:fillRef>
+          <a:effectRef idx="2">
+            <a:schemeClr val="accent1"/>
+          </a:effectRef>
+          <a:fontRef idx="minor">
+            <a:schemeClr val="lt1"/>
+          </a:fontRef>
+        </p:style>
+        <p:txBody>
+          <a:bodyPr rtlCol="0" anchor="ctr" wrap="square" lIns="73152" rIns="73152"/>
+          <a:lstStyle/>
+          <a:p>
+            <a:pPr algn="ctr"/>
+            <a:r>
+              <a:rPr sz="1500" b="1">
+                <a:solidFill>
+                  <a:srgbClr val="DEE2E6"/>
+                </a:solidFill>
+              </a:rPr>
+              <a:t>Metres and pixels</a:t>
+            </a:r>
+          </a:p>
+          <a:p>
+            <a:pPr algn="ctr"/>
+            <a:r>
+              <a:rPr sz="1300" b="0">
+                <a:solidFill>
+                  <a:srgbClr val="9AA3AB"/>
+                </a:solidFill>
+              </a:rPr>
+              <a:t>One class converts: Units</a:t>
+            </a:r>
+          </a:p>
+        </p:txBody>
+      </p:sp>
+      <p:sp>
+        <p:nvSpPr>
+          <p:cNvPr id="7" name="Rounded Rectangle 6"/>
+          <p:cNvSpPr/>
+          <p:nvPr/>
+        </p:nvSpPr>
+        <p:spPr>
+          <a:xfrm>
+            <a:off x="548640" y="2395728"/>
+            <a:ext cx="2560320" cy="841248"/>
+          </a:xfrm>
+          <a:prstGeom prst="roundRect">
+            <a:avLst>
+              <a:gd name="adj" fmla="val 12000"/>
+            </a:avLst>
+          </a:prstGeom>
+          <a:solidFill>
+            <a:srgbClr val="2E3338"/>
+          </a:solidFill>
+          <a:ln>
+            <a:noFill/>
+          </a:ln>
+          <a:effectLst/>
+        </p:spPr>
+        <p:style>
+          <a:lnRef idx="1">
+            <a:schemeClr val="accent1"/>
+          </a:lnRef>
+          <a:fillRef idx="3">
+            <a:schemeClr val="accent1"/>
+          </a:fillRef>
+          <a:effectRef idx="2">
+            <a:schemeClr val="accent1"/>
+          </a:effectRef>
+          <a:fontRef idx="minor">
+            <a:schemeClr val="lt1"/>
+          </a:fontRef>
+        </p:style>
+        <p:txBody>
+          <a:bodyPr rtlCol="0" anchor="ctr" wrap="square" lIns="73152" rIns="73152"/>
+          <a:lstStyle/>
+          <a:p>
+            <a:pPr algn="ctr"/>
+            <a:r>
+              <a:rPr sz="1500" b="1">
+                <a:solidFill>
+                  <a:srgbClr val="DEE2E6"/>
+                </a:solidFill>
+              </a:rPr>
+              <a:t>Who owns a position</a:t>
+            </a:r>
+          </a:p>
+          <a:p>
+            <a:pPr algn="ctr"/>
+            <a:r>
+              <a:rPr sz="1300" b="0">
+                <a:solidFill>
+                  <a:srgbClr val="9AA3AB"/>
+                </a:solidFill>
+              </a:rPr>
+              <a:t>The physics world</a:t>
+            </a:r>
+          </a:p>
+        </p:txBody>
+      </p:sp>
+      <p:sp>
+        <p:nvSpPr>
+          <p:cNvPr id="8" name="Rounded Rectangle 7"/>
+          <p:cNvSpPr/>
+          <p:nvPr/>
+        </p:nvSpPr>
+        <p:spPr>
+          <a:xfrm>
+            <a:off x="3291840" y="2395728"/>
+            <a:ext cx="2560320" cy="841248"/>
+          </a:xfrm>
+          <a:prstGeom prst="roundRect">
+            <a:avLst>
+              <a:gd name="adj" fmla="val 12000"/>
+            </a:avLst>
+          </a:prstGeom>
+          <a:solidFill>
+            <a:srgbClr val="2E3338"/>
+          </a:solidFill>
+          <a:ln>
+            <a:noFill/>
+          </a:ln>
+          <a:effectLst/>
+        </p:spPr>
+        <p:style>
+          <a:lnRef idx="1">
+            <a:schemeClr val="accent1"/>
+          </a:lnRef>
+          <a:fillRef idx="3">
+            <a:schemeClr val="accent1"/>
+          </a:fillRef>
+          <a:effectRef idx="2">
+            <a:schemeClr val="accent1"/>
+          </a:effectRef>
+          <a:fontRef idx="minor">
+            <a:schemeClr val="lt1"/>
+          </a:fontRef>
+        </p:style>
+        <p:txBody>
+          <a:bodyPr rtlCol="0" anchor="ctr" wrap="square" lIns="73152" rIns="73152"/>
+          <a:lstStyle/>
+          <a:p>
+            <a:pPr algn="ctr"/>
+            <a:r>
+              <a:rPr sz="1500" b="1">
+                <a:solidFill>
+                  <a:srgbClr val="DEE2E6"/>
+                </a:solidFill>
+              </a:rPr>
+              <a:t>What hit what</a:t>
+            </a:r>
+          </a:p>
+          <a:p>
+            <a:pPr algn="ctr"/>
+            <a:r>
+              <a:rPr sz="1300" b="0">
+                <a:solidFill>
+                  <a:srgbClr val="9AA3AB"/>
+                </a:solidFill>
+              </a:rPr>
+              <a:t>Hit events, as a C# event</a:t>
+            </a:r>
+          </a:p>
+        </p:txBody>
+      </p:sp>
+      <p:sp>
+        <p:nvSpPr>
+          <p:cNvPr id="9" name="Rounded Rectangle 8"/>
+          <p:cNvSpPr/>
+          <p:nvPr/>
+        </p:nvSpPr>
+        <p:spPr>
+          <a:xfrm>
+            <a:off x="6035040" y="2395728"/>
+            <a:ext cx="2560320" cy="841248"/>
+          </a:xfrm>
+          <a:prstGeom prst="roundRect">
+            <a:avLst>
+              <a:gd name="adj" fmla="val 12000"/>
+            </a:avLst>
+          </a:prstGeom>
+          <a:solidFill>
+            <a:srgbClr val="2E3338"/>
+          </a:solidFill>
+          <a:ln>
+            <a:noFill/>
+          </a:ln>
+          <a:effectLst/>
+        </p:spPr>
+        <p:style>
+          <a:lnRef idx="1">
+            <a:schemeClr val="accent1"/>
+          </a:lnRef>
+          <a:fillRef idx="3">
+            <a:schemeClr val="accent1"/>
+          </a:fillRef>
+          <a:effectRef idx="2">
+            <a:schemeClr val="accent1"/>
+          </a:effectRef>
+          <a:fontRef idx="minor">
+            <a:schemeClr val="lt1"/>
+          </a:fontRef>
+        </p:style>
+        <p:txBody>
+          <a:bodyPr rtlCol="0" anchor="ctr" wrap="square" lIns="73152" rIns="73152"/>
+          <a:lstStyle/>
+          <a:p>
+            <a:pPr algn="ctr"/>
+            <a:r>
+              <a:rPr sz="1500" b="1">
+                <a:solidFill>
+                  <a:srgbClr val="DEE2E6"/>
+                </a:solidFill>
+              </a:rPr>
+              <a:t>Removing things safely</a:t>
+            </a:r>
+          </a:p>
+          <a:p>
+            <a:pPr algn="ctr"/>
+            <a:r>
+              <a:rPr sz="1300" b="0">
+                <a:solidFill>
+                  <a:srgbClr val="9AA3AB"/>
+                </a:solidFill>
+              </a:rPr>
+              <a:t>Mark now, remove after the step</a:t>
+            </a:r>
+          </a:p>
+        </p:txBody>
+      </p:sp>
+      <p:sp>
+        <p:nvSpPr>
+          <p:cNvPr id="10" name="Rounded Rectangle 9"/>
+          <p:cNvSpPr/>
+          <p:nvPr/>
+        </p:nvSpPr>
+        <p:spPr>
+          <a:xfrm>
+            <a:off x="3291840" y="3374136"/>
+            <a:ext cx="2560320" cy="841248"/>
+          </a:xfrm>
+          <a:prstGeom prst="roundRect">
+            <a:avLst>
+              <a:gd name="adj" fmla="val 12000"/>
+            </a:avLst>
+          </a:prstGeom>
+          <a:solidFill>
+            <a:srgbClr val="2E3338"/>
+          </a:solidFill>
+          <a:ln>
+            <a:noFill/>
+          </a:ln>
+          <a:effectLst/>
+        </p:spPr>
+        <p:style>
+          <a:lnRef idx="1">
+            <a:schemeClr val="accent1"/>
+          </a:lnRef>
+          <a:fillRef idx="3">
+            <a:schemeClr val="accent1"/>
+          </a:fillRef>
+          <a:effectRef idx="2">
+            <a:schemeClr val="accent1"/>
+          </a:effectRef>
+          <a:fontRef idx="minor">
+            <a:schemeClr val="lt1"/>
+          </a:fontRef>
+        </p:style>
+        <p:txBody>
+          <a:bodyPr rtlCol="0" anchor="ctr" wrap="square" lIns="73152" rIns="73152"/>
+          <a:lstStyle/>
+          <a:p>
+            <a:pPr algn="ctr"/>
+            <a:r>
+              <a:rPr sz="1500" b="1">
+                <a:solidFill>
+                  <a:srgbClr val="DEE2E6"/>
+                </a:solidFill>
+              </a:rPr>
+              <a:t>Many kinds of blocks and pigs</a:t>
+            </a:r>
+          </a:p>
+          <a:p>
+            <a:pPr algn="ctr"/>
+            <a:r>
+              <a:rPr sz="1300" b="0">
+                <a:solidFill>
+                  <a:srgbClr val="9AA3AB"/>
+                </a:solidFill>
+              </a:rPr>
+              <a:t>Prototype</a:t>
+            </a:r>
+          </a:p>
+        </p:txBody>
+      </p:sp>
+    </p:spTree>
+  </p:cSld>
+  <p:clrMapOvr>
+    <a:masterClrMapping/>
+  </p:clrMapOvr>
+</p:sld>
+</file>
+
+<file path=ppt/slides/slide34.xml><?xml version="1.0" encoding="utf-8"?>
 <p:sld xmlns:a="http://schemas.openxmlformats.org/drawingml/2006/main" xmlns:r="http://schemas.openxmlformats.org/officeDocument/2006/relationships" xmlns:mc="http://schemas.openxmlformats.org/markup-compatibility/2006" xmlns:mv="urn:schemas-microsoft-com:mac:vml" xmlns:p="http://schemas.openxmlformats.org/presentationml/2006/main" xmlns:c="http://schemas.openxmlformats.org/drawingml/2006/chart" xmlns:dgm="http://schemas.openxmlformats.org/drawingml/2006/diagram" xmlns:o="urn:schemas-microsoft-com:office:office" xmlns:v="urn:schemas-microsoft-com:vml" xmlns:pvml="urn:schemas-microsoft-com:office:powerpoint" xmlns:com="http://schemas.openxmlformats.org/drawingml/2006/compatibility" xmlns:p14="http://schemas.microsoft.com/office/powerpoint/2010/main" xmlns:p15="http://schemas.microsoft.com/office/powerpoint/2012/main" xmlns:ahyp="http://schemas.microsoft.com/office/drawing/2018/hyperlinkcolor">
   <p:cSld>
     <p:spTree>
@@ -16257,994 +17674,6 @@
 </p:sld>
 </file>
 
-<file path=ppt/slides/slide33.xml><?xml version="1.0" encoding="utf-8"?>
-<p:sld xmlns:a="http://schemas.openxmlformats.org/drawingml/2006/main" xmlns:r="http://schemas.openxmlformats.org/officeDocument/2006/relationships" xmlns:mc="http://schemas.openxmlformats.org/markup-compatibility/2006" xmlns:mv="urn:schemas-microsoft-com:mac:vml" xmlns:p="http://schemas.openxmlformats.org/presentationml/2006/main" xmlns:c="http://schemas.openxmlformats.org/drawingml/2006/chart" xmlns:dgm="http://schemas.openxmlformats.org/drawingml/2006/diagram" xmlns:o="urn:schemas-microsoft-com:office:office" xmlns:v="urn:schemas-microsoft-com:vml" xmlns:pvml="urn:schemas-microsoft-com:office:powerpoint" xmlns:com="http://schemas.openxmlformats.org/drawingml/2006/compatibility" xmlns:p14="http://schemas.microsoft.com/office/powerpoint/2010/main" xmlns:p15="http://schemas.microsoft.com/office/powerpoint/2012/main" xmlns:ahyp="http://schemas.microsoft.com/office/drawing/2018/hyperlinkcolor">
-  <p:cSld>
-    <p:spTree>
-      <p:nvGrpSpPr>
-        <p:cNvPr id="292" name="Shape 292"/>
-        <p:cNvGrpSpPr/>
-        <p:nvPr/>
-      </p:nvGrpSpPr>
-      <p:grpSpPr>
-        <a:xfrm>
-          <a:off x="0" y="0"/>
-          <a:ext cx="0" cy="0"/>
-          <a:chOff x="0" y="0"/>
-          <a:chExt cx="0" cy="0"/>
-        </a:xfrm>
-      </p:grpSpPr>
-      <p:sp>
-        <p:nvSpPr>
-          <p:cNvPr id="293" name="Google Shape;293;p45"/>
-          <p:cNvSpPr txBox="1"/>
-          <p:nvPr>
-            <p:ph type="title"/>
-          </p:nvPr>
-        </p:nvSpPr>
-        <p:spPr>
-          <a:xfrm>
-            <a:off x="311700" y="195615"/>
-            <a:ext cx="8520600" cy="572700"/>
-          </a:xfrm>
-          <a:prstGeom prst="rect">
-            <a:avLst/>
-          </a:prstGeom>
-        </p:spPr>
-        <p:txBody>
-          <a:bodyPr anchorCtr="0" anchor="t" bIns="91425" lIns="91425" spcFirstLastPara="1" rIns="91425" wrap="square" tIns="91425">
-            <a:normAutofit fontScale="90000"/>
-          </a:bodyPr>
-          <a:lstStyle/>
-          <a:p>
-            <a:pPr indent="0" lvl="0" marL="0" rtl="0" algn="l">
-              <a:spcBef>
-                <a:spcPts val="0"/>
-              </a:spcBef>
-              <a:spcAft>
-                <a:spcPts val="0"/>
-              </a:spcAft>
-              <a:buNone/>
-            </a:pPr>
-            <a:r>
-              <a:rPr lang="en">
-                <a:solidFill>
-                  <a:schemeClr val="accent5"/>
-                </a:solidFill>
-              </a:rPr>
-              <a:t>Exercises (Stretch)</a:t>
-            </a:r>
-            <a:endParaRPr>
-              <a:solidFill>
-                <a:schemeClr val="accent5"/>
-              </a:solidFill>
-            </a:endParaRPr>
-          </a:p>
-        </p:txBody>
-      </p:sp>
-      <p:sp>
-        <p:nvSpPr>
-          <p:cNvPr id="294" name="Google Shape;294;p45"/>
-          <p:cNvSpPr txBox="1"/>
-          <p:nvPr>
-            <p:ph idx="1" type="body"/>
-          </p:nvPr>
-        </p:nvSpPr>
-        <p:spPr>
-          <a:xfrm>
-            <a:off x="311700" y="885950"/>
-            <a:ext cx="8520600" cy="4023300"/>
-          </a:xfrm>
-          <a:prstGeom prst="rect">
-            <a:avLst/>
-          </a:prstGeom>
-        </p:spPr>
-        <p:txBody>
-          <a:bodyPr anchorCtr="0" anchor="t" bIns="91425" lIns="91425" spcFirstLastPara="1" rIns="91425" wrap="square" tIns="91425">
-            <a:normAutofit/>
-          </a:bodyPr>
-          <a:lstStyle/>
-          <a:p>
-            <a:pPr indent="-330200" lvl="0" marL="457200" rtl="0" algn="l">
-              <a:spcBef>
-                <a:spcPts val="0"/>
-              </a:spcBef>
-              <a:spcAft>
-                <a:spcPts val="0"/>
-              </a:spcAft>
-              <a:buSzPts val="1600"/>
-              <a:buChar char="●"/>
-            </a:pPr>
-            <a:r>
-              <a:rPr lang="en"/>
-              <a:t>Unit test Units: to metres and back, and y flips</a:t>
-            </a:r>
-            <a:endParaRPr/>
-          </a:p>
-          <a:p>
-            <a:pPr indent="-330200" lvl="0" marL="457200" rtl="0" algn="l">
-              <a:spcBef>
-                <a:spcPts val="0"/>
-              </a:spcBef>
-              <a:spcAft>
-                <a:spcPts val="0"/>
-              </a:spcAft>
-              <a:buSzPts val="1600"/>
-              <a:buChar char="●"/>
-            </a:pPr>
-            <a:r>
-              <a:rPr lang="en"/>
-              <a:t>Swap the library: which files would change?</a:t>
-            </a:r>
-            <a:endParaRPr/>
-          </a:p>
-          <a:p>
-            <a:pPr indent="-317500" lvl="1" marL="914400" rtl="0" algn="l">
-              <a:spcBef>
-                <a:spcPts val="0"/>
-              </a:spcBef>
-              <a:spcAft>
-                <a:spcPts val="0"/>
-              </a:spcAft>
-              <a:buSzPts val="1400"/>
-              <a:buChar char="○"/>
-            </a:pPr>
-            <a:r>
-              <a:rPr lang="en"/>
-              <a:t>Try it with Aether.Physics2D</a:t>
-            </a:r>
-            <a:endParaRPr/>
-          </a:p>
-        </p:txBody>
-      </p:sp>
-    </p:spTree>
-  </p:cSld>
-  <p:clrMapOvr>
-    <a:masterClrMapping/>
-  </p:clrMapOvr>
-  <p:timing>
-    <p:tnLst>
-      <p:par>
-        <p:cTn dur="indefinite" nodeType="tmRoot" restart="never">
-          <p:childTnLst>
-            <p:seq concurrent="1" nextAc="seek">
-              <p:cTn dur="indefinite" id="2" nodeType="mainSeq">
-                <p:childTnLst>
-                  <p:par>
-                    <p:cTn fill="hold">
-                      <p:stCondLst>
-                        <p:cond delay="indefinite"/>
-                      </p:stCondLst>
-                      <p:childTnLst>
-                        <p:par>
-                          <p:cTn fill="hold">
-                            <p:stCondLst>
-                              <p:cond delay="0"/>
-                            </p:stCondLst>
-                            <p:childTnLst>
-                              <p:par>
-                                <p:cTn fill="hold" nodeType="clickEffect" presetClass="entr" presetID="1" presetSubtype="0">
-                                  <p:stCondLst>
-                                    <p:cond delay="0"/>
-                                  </p:stCondLst>
-                                  <p:childTnLst>
-                                    <p:set>
-                                      <p:cBhvr>
-                                        <p:cTn dur="1" fill="hold">
-                                          <p:stCondLst>
-                                            <p:cond delay="0"/>
-                                          </p:stCondLst>
-                                        </p:cTn>
-                                        <p:tgtEl>
-                                          <p:spTgt spid="294">
-                                            <p:txEl>
-                                              <p:pRg end="0" st="0"/>
-                                            </p:txEl>
-                                          </p:spTgt>
-                                        </p:tgtEl>
-                                        <p:attrNameLst>
-                                          <p:attrName>style.visibility</p:attrName>
-                                        </p:attrNameLst>
-                                      </p:cBhvr>
-                                      <p:to>
-                                        <p:strVal val="visible"/>
-                                      </p:to>
-                                    </p:set>
-                                  </p:childTnLst>
-                                </p:cTn>
-                              </p:par>
-                            </p:childTnLst>
-                          </p:cTn>
-                        </p:par>
-                      </p:childTnLst>
-                    </p:cTn>
-                  </p:par>
-                  <p:par>
-                    <p:cTn fill="hold">
-                      <p:stCondLst>
-                        <p:cond delay="indefinite"/>
-                      </p:stCondLst>
-                      <p:childTnLst>
-                        <p:par>
-                          <p:cTn fill="hold">
-                            <p:stCondLst>
-                              <p:cond delay="0"/>
-                            </p:stCondLst>
-                            <p:childTnLst>
-                              <p:par>
-                                <p:cTn fill="hold" nodeType="clickEffect" presetClass="entr" presetID="1" presetSubtype="0">
-                                  <p:stCondLst>
-                                    <p:cond delay="0"/>
-                                  </p:stCondLst>
-                                  <p:childTnLst>
-                                    <p:set>
-                                      <p:cBhvr>
-                                        <p:cTn dur="1" fill="hold">
-                                          <p:stCondLst>
-                                            <p:cond delay="0"/>
-                                          </p:stCondLst>
-                                        </p:cTn>
-                                        <p:tgtEl>
-                                          <p:spTgt spid="294">
-                                            <p:txEl>
-                                              <p:pRg end="1" st="1"/>
-                                            </p:txEl>
-                                          </p:spTgt>
-                                        </p:tgtEl>
-                                        <p:attrNameLst>
-                                          <p:attrName>style.visibility</p:attrName>
-                                        </p:attrNameLst>
-                                      </p:cBhvr>
-                                      <p:to>
-                                        <p:strVal val="visible"/>
-                                      </p:to>
-                                    </p:set>
-                                  </p:childTnLst>
-                                </p:cTn>
-                              </p:par>
-                            </p:childTnLst>
-                          </p:cTn>
-                        </p:par>
-                      </p:childTnLst>
-                    </p:cTn>
-                  </p:par>
-                  <p:par>
-                    <p:cTn fill="hold">
-                      <p:stCondLst>
-                        <p:cond delay="indefinite"/>
-                      </p:stCondLst>
-                      <p:childTnLst>
-                        <p:par>
-                          <p:cTn fill="hold">
-                            <p:stCondLst>
-                              <p:cond delay="0"/>
-                            </p:stCondLst>
-                            <p:childTnLst>
-                              <p:par>
-                                <p:cTn fill="hold" nodeType="clickEffect" presetClass="entr" presetID="1" presetSubtype="0">
-                                  <p:stCondLst>
-                                    <p:cond delay="0"/>
-                                  </p:stCondLst>
-                                  <p:childTnLst>
-                                    <p:set>
-                                      <p:cBhvr>
-                                        <p:cTn dur="1" fill="hold">
-                                          <p:stCondLst>
-                                            <p:cond delay="0"/>
-                                          </p:stCondLst>
-                                        </p:cTn>
-                                        <p:tgtEl>
-                                          <p:spTgt spid="294">
-                                            <p:txEl>
-                                              <p:pRg end="2" st="2"/>
-                                            </p:txEl>
-                                          </p:spTgt>
-                                        </p:tgtEl>
-                                        <p:attrNameLst>
-                                          <p:attrName>style.visibility</p:attrName>
-                                        </p:attrNameLst>
-                                      </p:cBhvr>
-                                      <p:to>
-                                        <p:strVal val="visible"/>
-                                      </p:to>
-                                    </p:set>
-                                  </p:childTnLst>
-                                </p:cTn>
-                              </p:par>
-                            </p:childTnLst>
-                          </p:cTn>
-                        </p:par>
-                      </p:childTnLst>
-                    </p:cTn>
-                  </p:par>
-                  <p:par>
-                    <p:cTn fill="hold">
-                      <p:stCondLst>
-                        <p:cond delay="indefinite"/>
-                      </p:stCondLst>
-                      <p:childTnLst>
-                        <p:par>
-                          <p:cTn fill="hold">
-                            <p:stCondLst>
-                              <p:cond delay="0"/>
-                            </p:stCondLst>
-                            <p:childTnLst>
-                              <p:par>
-                                <p:cTn fill="hold" nodeType="clickEffect" presetClass="entr" presetID="1" presetSubtype="0">
-                                  <p:stCondLst>
-                                    <p:cond delay="0"/>
-                                  </p:stCondLst>
-                                  <p:childTnLst>
-                                    <p:set>
-                                      <p:cBhvr>
-                                        <p:cTn dur="1" fill="hold">
-                                          <p:stCondLst>
-                                            <p:cond delay="0"/>
-                                          </p:stCondLst>
-                                        </p:cTn>
-                                        <p:tgtEl>
-                                          <p:spTgt spid="294">
-                                            <p:txEl>
-                                              <p:pRg end="3" st="3"/>
-                                            </p:txEl>
-                                          </p:spTgt>
-                                        </p:tgtEl>
-                                        <p:attrNameLst>
-                                          <p:attrName>style.visibility</p:attrName>
-                                        </p:attrNameLst>
-                                      </p:cBhvr>
-                                      <p:to>
-                                        <p:strVal val="visible"/>
-                                      </p:to>
-                                    </p:set>
-                                  </p:childTnLst>
-                                </p:cTn>
-                              </p:par>
-                            </p:childTnLst>
-                          </p:cTn>
-                        </p:par>
-                      </p:childTnLst>
-                    </p:cTn>
-                  </p:par>
-                  <p:par>
-                    <p:cTn fill="hold">
-                      <p:stCondLst>
-                        <p:cond delay="indefinite"/>
-                      </p:stCondLst>
-                      <p:childTnLst>
-                        <p:par>
-                          <p:cTn fill="hold">
-                            <p:stCondLst>
-                              <p:cond delay="0"/>
-                            </p:stCondLst>
-                            <p:childTnLst>
-                              <p:par>
-                                <p:cTn fill="hold" nodeType="clickEffect" presetClass="entr" presetID="1" presetSubtype="0">
-                                  <p:stCondLst>
-                                    <p:cond delay="0"/>
-                                  </p:stCondLst>
-                                  <p:childTnLst>
-                                    <p:set>
-                                      <p:cBhvr>
-                                        <p:cTn dur="1" fill="hold">
-                                          <p:stCondLst>
-                                            <p:cond delay="0"/>
-                                          </p:stCondLst>
-                                        </p:cTn>
-                                        <p:tgtEl>
-                                          <p:spTgt spid="294">
-                                            <p:txEl>
-                                              <p:pRg end="4" st="4"/>
-                                            </p:txEl>
-                                          </p:spTgt>
-                                        </p:tgtEl>
-                                        <p:attrNameLst>
-                                          <p:attrName>style.visibility</p:attrName>
-                                        </p:attrNameLst>
-                                      </p:cBhvr>
-                                      <p:to>
-                                        <p:strVal val="visible"/>
-                                      </p:to>
-                                    </p:set>
-                                  </p:childTnLst>
-                                </p:cTn>
-                              </p:par>
-                            </p:childTnLst>
-                          </p:cTn>
-                        </p:par>
-                      </p:childTnLst>
-                    </p:cTn>
-                  </p:par>
-                  <p:par>
-                    <p:cTn fill="hold">
-                      <p:stCondLst>
-                        <p:cond delay="indefinite"/>
-                      </p:stCondLst>
-                      <p:childTnLst>
-                        <p:par>
-                          <p:cTn fill="hold">
-                            <p:stCondLst>
-                              <p:cond delay="0"/>
-                            </p:stCondLst>
-                            <p:childTnLst>
-                              <p:par>
-                                <p:cTn fill="hold" nodeType="clickEffect" presetClass="entr" presetID="1" presetSubtype="0">
-                                  <p:stCondLst>
-                                    <p:cond delay="0"/>
-                                  </p:stCondLst>
-                                  <p:childTnLst>
-                                    <p:set>
-                                      <p:cBhvr>
-                                        <p:cTn dur="1" fill="hold">
-                                          <p:stCondLst>
-                                            <p:cond delay="0"/>
-                                          </p:stCondLst>
-                                        </p:cTn>
-                                        <p:tgtEl>
-                                          <p:spTgt spid="294">
-                                            <p:txEl>
-                                              <p:pRg end="5" st="5"/>
-                                            </p:txEl>
-                                          </p:spTgt>
-                                        </p:tgtEl>
-                                        <p:attrNameLst>
-                                          <p:attrName>style.visibility</p:attrName>
-                                        </p:attrNameLst>
-                                      </p:cBhvr>
-                                      <p:to>
-                                        <p:strVal val="visible"/>
-                                      </p:to>
-                                    </p:set>
-                                  </p:childTnLst>
-                                </p:cTn>
-                              </p:par>
-                            </p:childTnLst>
-                          </p:cTn>
-                        </p:par>
-                      </p:childTnLst>
-                    </p:cTn>
-                  </p:par>
-                  <p:par>
-                    <p:cTn fill="hold">
-                      <p:stCondLst>
-                        <p:cond delay="indefinite"/>
-                      </p:stCondLst>
-                      <p:childTnLst>
-                        <p:par>
-                          <p:cTn fill="hold">
-                            <p:stCondLst>
-                              <p:cond delay="0"/>
-                            </p:stCondLst>
-                            <p:childTnLst>
-                              <p:par>
-                                <p:cTn fill="hold" nodeType="clickEffect" presetClass="entr" presetID="1" presetSubtype="0">
-                                  <p:stCondLst>
-                                    <p:cond delay="0"/>
-                                  </p:stCondLst>
-                                  <p:childTnLst>
-                                    <p:set>
-                                      <p:cBhvr>
-                                        <p:cTn dur="1" fill="hold">
-                                          <p:stCondLst>
-                                            <p:cond delay="0"/>
-                                          </p:stCondLst>
-                                        </p:cTn>
-                                        <p:tgtEl>
-                                          <p:spTgt spid="294">
-                                            <p:txEl>
-                                              <p:pRg end="6" st="6"/>
-                                            </p:txEl>
-                                          </p:spTgt>
-                                        </p:tgtEl>
-                                        <p:attrNameLst>
-                                          <p:attrName>style.visibility</p:attrName>
-                                        </p:attrNameLst>
-                                      </p:cBhvr>
-                                      <p:to>
-                                        <p:strVal val="visible"/>
-                                      </p:to>
-                                    </p:set>
-                                  </p:childTnLst>
-                                </p:cTn>
-                              </p:par>
-                            </p:childTnLst>
-                          </p:cTn>
-                        </p:par>
-                      </p:childTnLst>
-                    </p:cTn>
-                  </p:par>
-                  <p:par>
-                    <p:cTn fill="hold">
-                      <p:stCondLst>
-                        <p:cond delay="indefinite"/>
-                      </p:stCondLst>
-                      <p:childTnLst>
-                        <p:par>
-                          <p:cTn fill="hold">
-                            <p:stCondLst>
-                              <p:cond delay="0"/>
-                            </p:stCondLst>
-                            <p:childTnLst>
-                              <p:par>
-                                <p:cTn fill="hold" nodeType="clickEffect" presetClass="entr" presetID="1" presetSubtype="0">
-                                  <p:stCondLst>
-                                    <p:cond delay="0"/>
-                                  </p:stCondLst>
-                                  <p:childTnLst>
-                                    <p:set>
-                                      <p:cBhvr>
-                                        <p:cTn dur="1" fill="hold">
-                                          <p:stCondLst>
-                                            <p:cond delay="0"/>
-                                          </p:stCondLst>
-                                        </p:cTn>
-                                        <p:tgtEl>
-                                          <p:spTgt spid="294">
-                                            <p:txEl>
-                                              <p:pRg end="7" st="7"/>
-                                            </p:txEl>
-                                          </p:spTgt>
-                                        </p:tgtEl>
-                                        <p:attrNameLst>
-                                          <p:attrName>style.visibility</p:attrName>
-                                        </p:attrNameLst>
-                                      </p:cBhvr>
-                                      <p:to>
-                                        <p:strVal val="visible"/>
-                                      </p:to>
-                                    </p:set>
-                                  </p:childTnLst>
-                                </p:cTn>
-                              </p:par>
-                            </p:childTnLst>
-                          </p:cTn>
-                        </p:par>
-                      </p:childTnLst>
-                    </p:cTn>
-                  </p:par>
-                  <p:par>
-                    <p:cTn fill="hold">
-                      <p:stCondLst>
-                        <p:cond delay="indefinite"/>
-                      </p:stCondLst>
-                      <p:childTnLst>
-                        <p:par>
-                          <p:cTn fill="hold">
-                            <p:stCondLst>
-                              <p:cond delay="0"/>
-                            </p:stCondLst>
-                            <p:childTnLst>
-                              <p:par>
-                                <p:cTn fill="hold" nodeType="clickEffect" presetClass="entr" presetID="1" presetSubtype="0">
-                                  <p:stCondLst>
-                                    <p:cond delay="0"/>
-                                  </p:stCondLst>
-                                  <p:childTnLst>
-                                    <p:set>
-                                      <p:cBhvr>
-                                        <p:cTn dur="1" fill="hold">
-                                          <p:stCondLst>
-                                            <p:cond delay="0"/>
-                                          </p:stCondLst>
-                                        </p:cTn>
-                                        <p:tgtEl>
-                                          <p:spTgt spid="294">
-                                            <p:txEl>
-                                              <p:pRg end="8" st="8"/>
-                                            </p:txEl>
-                                          </p:spTgt>
-                                        </p:tgtEl>
-                                        <p:attrNameLst>
-                                          <p:attrName>style.visibility</p:attrName>
-                                        </p:attrNameLst>
-                                      </p:cBhvr>
-                                      <p:to>
-                                        <p:strVal val="visible"/>
-                                      </p:to>
-                                    </p:set>
-                                  </p:childTnLst>
-                                </p:cTn>
-                              </p:par>
-                            </p:childTnLst>
-                          </p:cTn>
-                        </p:par>
-                      </p:childTnLst>
-                    </p:cTn>
-                  </p:par>
-                  <p:par>
-                    <p:cTn fill="hold">
-                      <p:stCondLst>
-                        <p:cond delay="indefinite"/>
-                      </p:stCondLst>
-                      <p:childTnLst>
-                        <p:par>
-                          <p:cTn fill="hold">
-                            <p:stCondLst>
-                              <p:cond delay="0"/>
-                            </p:stCondLst>
-                            <p:childTnLst>
-                              <p:par>
-                                <p:cTn fill="hold" nodeType="clickEffect" presetClass="entr" presetID="1" presetSubtype="0">
-                                  <p:stCondLst>
-                                    <p:cond delay="0"/>
-                                  </p:stCondLst>
-                                  <p:childTnLst>
-                                    <p:set>
-                                      <p:cBhvr>
-                                        <p:cTn dur="1" fill="hold">
-                                          <p:stCondLst>
-                                            <p:cond delay="0"/>
-                                          </p:stCondLst>
-                                        </p:cTn>
-                                        <p:tgtEl>
-                                          <p:spTgt spid="294">
-                                            <p:txEl>
-                                              <p:pRg end="9" st="9"/>
-                                            </p:txEl>
-                                          </p:spTgt>
-                                        </p:tgtEl>
-                                        <p:attrNameLst>
-                                          <p:attrName>style.visibility</p:attrName>
-                                        </p:attrNameLst>
-                                      </p:cBhvr>
-                                      <p:to>
-                                        <p:strVal val="visible"/>
-                                      </p:to>
-                                    </p:set>
-                                  </p:childTnLst>
-                                </p:cTn>
-                              </p:par>
-                            </p:childTnLst>
-                          </p:cTn>
-                        </p:par>
-                      </p:childTnLst>
-                    </p:cTn>
-                  </p:par>
-                  <p:par>
-                    <p:cTn fill="hold">
-                      <p:stCondLst>
-                        <p:cond delay="indefinite"/>
-                      </p:stCondLst>
-                      <p:childTnLst>
-                        <p:par>
-                          <p:cTn fill="hold">
-                            <p:stCondLst>
-                              <p:cond delay="0"/>
-                            </p:stCondLst>
-                            <p:childTnLst>
-                              <p:par>
-                                <p:cTn fill="hold" nodeType="clickEffect" presetClass="entr" presetID="1" presetSubtype="0">
-                                  <p:stCondLst>
-                                    <p:cond delay="0"/>
-                                  </p:stCondLst>
-                                  <p:childTnLst>
-                                    <p:set>
-                                      <p:cBhvr>
-                                        <p:cTn dur="1" fill="hold">
-                                          <p:stCondLst>
-                                            <p:cond delay="0"/>
-                                          </p:stCondLst>
-                                        </p:cTn>
-                                        <p:tgtEl>
-                                          <p:spTgt spid="294">
-                                            <p:txEl>
-                                              <p:pRg end="10" st="10"/>
-                                            </p:txEl>
-                                          </p:spTgt>
-                                        </p:tgtEl>
-                                        <p:attrNameLst>
-                                          <p:attrName>style.visibility</p:attrName>
-                                        </p:attrNameLst>
-                                      </p:cBhvr>
-                                      <p:to>
-                                        <p:strVal val="visible"/>
-                                      </p:to>
-                                    </p:set>
-                                  </p:childTnLst>
-                                </p:cTn>
-                              </p:par>
-                            </p:childTnLst>
-                          </p:cTn>
-                        </p:par>
-                      </p:childTnLst>
-                    </p:cTn>
-                  </p:par>
-                  <p:par>
-                    <p:cTn fill="hold">
-                      <p:stCondLst>
-                        <p:cond delay="indefinite"/>
-                      </p:stCondLst>
-                      <p:childTnLst>
-                        <p:par>
-                          <p:cTn fill="hold">
-                            <p:stCondLst>
-                              <p:cond delay="0"/>
-                            </p:stCondLst>
-                            <p:childTnLst>
-                              <p:par>
-                                <p:cTn fill="hold" nodeType="clickEffect" presetClass="entr" presetID="1" presetSubtype="0">
-                                  <p:stCondLst>
-                                    <p:cond delay="0"/>
-                                  </p:stCondLst>
-                                  <p:childTnLst>
-                                    <p:set>
-                                      <p:cBhvr>
-                                        <p:cTn dur="1" fill="hold">
-                                          <p:stCondLst>
-                                            <p:cond delay="0"/>
-                                          </p:stCondLst>
-                                        </p:cTn>
-                                        <p:tgtEl>
-                                          <p:spTgt spid="294">
-                                            <p:txEl>
-                                              <p:pRg end="11" st="11"/>
-                                            </p:txEl>
-                                          </p:spTgt>
-                                        </p:tgtEl>
-                                        <p:attrNameLst>
-                                          <p:attrName>style.visibility</p:attrName>
-                                        </p:attrNameLst>
-                                      </p:cBhvr>
-                                      <p:to>
-                                        <p:strVal val="visible"/>
-                                      </p:to>
-                                    </p:set>
-                                  </p:childTnLst>
-                                </p:cTn>
-                              </p:par>
-                            </p:childTnLst>
-                          </p:cTn>
-                        </p:par>
-                      </p:childTnLst>
-                    </p:cTn>
-                  </p:par>
-                  <p:par>
-                    <p:cTn fill="hold">
-                      <p:stCondLst>
-                        <p:cond delay="indefinite"/>
-                      </p:stCondLst>
-                      <p:childTnLst>
-                        <p:par>
-                          <p:cTn fill="hold">
-                            <p:stCondLst>
-                              <p:cond delay="0"/>
-                            </p:stCondLst>
-                            <p:childTnLst>
-                              <p:par>
-                                <p:cTn fill="hold" nodeType="clickEffect" presetClass="entr" presetID="1" presetSubtype="0">
-                                  <p:stCondLst>
-                                    <p:cond delay="0"/>
-                                  </p:stCondLst>
-                                  <p:childTnLst>
-                                    <p:set>
-                                      <p:cBhvr>
-                                        <p:cTn dur="1" fill="hold">
-                                          <p:stCondLst>
-                                            <p:cond delay="0"/>
-                                          </p:stCondLst>
-                                        </p:cTn>
-                                        <p:tgtEl>
-                                          <p:spTgt spid="294">
-                                            <p:txEl>
-                                              <p:pRg end="12" st="12"/>
-                                            </p:txEl>
-                                          </p:spTgt>
-                                        </p:tgtEl>
-                                        <p:attrNameLst>
-                                          <p:attrName>style.visibility</p:attrName>
-                                        </p:attrNameLst>
-                                      </p:cBhvr>
-                                      <p:to>
-                                        <p:strVal val="visible"/>
-                                      </p:to>
-                                    </p:set>
-                                  </p:childTnLst>
-                                </p:cTn>
-                              </p:par>
-                            </p:childTnLst>
-                          </p:cTn>
-                        </p:par>
-                      </p:childTnLst>
-                    </p:cTn>
-                  </p:par>
-                </p:childTnLst>
-              </p:cTn>
-              <p:prevCondLst>
-                <p:cond evt="onPrev">
-                  <p:tgtEl>
-                    <p:sldTgt/>
-                  </p:tgtEl>
-                </p:cond>
-              </p:prevCondLst>
-              <p:nextCondLst>
-                <p:cond evt="onNext">
-                  <p:tgtEl>
-                    <p:sldTgt/>
-                  </p:tgtEl>
-                </p:cond>
-              </p:nextCondLst>
-            </p:seq>
-          </p:childTnLst>
-        </p:cTn>
-      </p:par>
-    </p:tnLst>
-  </p:timing>
-</p:sld>
-</file>
-
-<file path=ppt/slides/slide34.xml><?xml version="1.0" encoding="utf-8"?>
-<p:sld xmlns:a="http://schemas.openxmlformats.org/drawingml/2006/main" xmlns:p="http://schemas.openxmlformats.org/presentationml/2006/main" xmlns:r="http://schemas.openxmlformats.org/officeDocument/2006/relationships">
-  <p:cSld>
-    <p:spTree>
-      <p:nvGrpSpPr>
-        <p:cNvPr id="1" name=""/>
-        <p:cNvGrpSpPr/>
-        <p:nvPr/>
-      </p:nvGrpSpPr>
-      <p:grpSpPr/>
-      <p:sp>
-        <p:nvSpPr>
-          <p:cNvPr id="2" name="Title 1"/>
-          <p:cNvSpPr>
-            <a:spLocks noGrp="1"/>
-          </p:cNvSpPr>
-          <p:nvPr>
-            <p:ph type="title"/>
-          </p:nvPr>
-        </p:nvSpPr>
-        <p:spPr/>
-        <p:txBody>
-          <a:bodyPr/>
-          <a:lstStyle/>
-          <a:p>
-            <a:pPr indent="0" lvl="0" marL="0" rtl="0" algn="l">
-              <a:spcBef>
-                <a:spcPts val="0"/>
-              </a:spcBef>
-              <a:spcAft>
-                <a:spcPts val="0"/>
-              </a:spcAft>
-              <a:buNone/>
-            </a:pPr>
-            <a:r>
-              <a:rPr lang="en"/>
-              <a:t>Check Yourself</a:t>
-            </a:r>
-            <a:endParaRPr/>
-          </a:p>
-        </p:txBody>
-      </p:sp>
-      <p:sp>
-        <p:nvSpPr>
-          <p:cNvPr id="3" name="Text Placeholder 2"/>
-          <p:cNvSpPr>
-            <a:spLocks noGrp="1"/>
-          </p:cNvSpPr>
-          <p:nvPr>
-            <p:ph type="body" idx="1"/>
-          </p:nvPr>
-        </p:nvSpPr>
-        <p:spPr>
-          <a:xfrm>
-            <a:off x="311700" y="885950"/>
-            <a:ext cx="8520600" cy="1719072"/>
-          </a:xfrm>
-        </p:spPr>
-        <p:txBody>
-          <a:bodyPr/>
-          <a:lstStyle/>
-          <a:p>
-            <a:pPr indent="-330200" lvl="0" marL="457200" rtl="0" algn="l">
-              <a:spcBef>
-                <a:spcPts val="0"/>
-              </a:spcBef>
-              <a:spcAft>
-                <a:spcPts val="0"/>
-              </a:spcAft>
-              <a:buSzPts val="1600"/>
-              <a:buChar char="●"/>
-            </a:pPr>
-            <a:r>
-              <a:rPr lang="en"/>
-              <a:t>What is the difference between an Adapter and a Facade?</a:t>
-            </a:r>
-            <a:endParaRPr/>
-          </a:p>
-          <a:p>
-            <a:pPr indent="-330200" lvl="0" marL="457200" rtl="0" algn="l">
-              <a:spcBef>
-                <a:spcPts val="0"/>
-              </a:spcBef>
-              <a:spcAft>
-                <a:spcPts val="0"/>
-              </a:spcAft>
-              <a:buSzPts val="1600"/>
-              <a:buChar char="●"/>
-            </a:pPr>
-            <a:r>
-              <a:rPr lang="en"/>
-              <a:t>Why convert between metres and pixels at all?</a:t>
-            </a:r>
-            <a:endParaRPr/>
-          </a:p>
-          <a:p>
-            <a:pPr indent="-330200" lvl="0" marL="457200" rtl="0" algn="l">
-              <a:spcBef>
-                <a:spcPts val="0"/>
-              </a:spcBef>
-              <a:spcAft>
-                <a:spcPts val="0"/>
-              </a:spcAft>
-              <a:buSzPts val="1600"/>
-              <a:buChar char="●"/>
-            </a:pPr>
-            <a:r>
-              <a:rPr lang="en"/>
-              <a:t>Why not destroy a body inside the hit handler?</a:t>
-            </a:r>
-            <a:endParaRPr/>
-          </a:p>
-          <a:p>
-            <a:pPr indent="-330200" lvl="0" marL="457200" rtl="0" algn="l">
-              <a:spcBef>
-                <a:spcPts val="0"/>
-              </a:spcBef>
-              <a:spcAft>
-                <a:spcPts val="0"/>
-              </a:spcAft>
-              <a:buSzPts val="1600"/>
-              <a:buChar char="●"/>
-            </a:pPr>
-            <a:r>
-              <a:rPr lang="en"/>
-              <a:t>What does a shallow copy share with the original, and why does it matter?</a:t>
-            </a:r>
-            <a:endParaRPr/>
-          </a:p>
-        </p:txBody>
-      </p:sp>
-      <p:sp>
-        <p:nvSpPr>
-          <p:cNvPr id="4" name="TextBox 3"/>
-          <p:cNvSpPr txBox="1"/>
-          <p:nvPr/>
-        </p:nvSpPr>
-        <p:spPr>
-          <a:xfrm>
-            <a:off x="457200" y="3182112"/>
-            <a:ext cx="8229600" cy="457200"/>
-          </a:xfrm>
-          <a:prstGeom prst="rect">
-            <a:avLst/>
-          </a:prstGeom>
-          <a:noFill/>
-        </p:spPr>
-        <p:txBody>
-          <a:bodyPr wrap="square">
-            <a:spAutoFit/>
-          </a:bodyPr>
-          <a:lstStyle/>
-          <a:p>
-            <a:pPr algn="ctr"/>
-            <a:r>
-              <a:rPr sz="1400" b="0" i="0">
-                <a:solidFill>
-                  <a:srgbClr val="9AA3AB"/>
-                </a:solidFill>
-              </a:rPr>
-              <a:t>The answers, and more questions, are on the course site.</a:t>
-            </a:r>
-          </a:p>
-        </p:txBody>
-      </p:sp>
-    </p:spTree>
-  </p:cSld>
-  <p:clrMapOvr>
-    <a:masterClrMapping/>
-  </p:clrMapOvr>
-</p:sld>
-</file>
-
 <file path=ppt/slides/slide35.xml><?xml version="1.0" encoding="utf-8"?>
 <p:sld xmlns:a="http://schemas.openxmlformats.org/drawingml/2006/main" xmlns:r="http://schemas.openxmlformats.org/officeDocument/2006/relationships" xmlns:mc="http://schemas.openxmlformats.org/markup-compatibility/2006" xmlns:mv="urn:schemas-microsoft-com:mac:vml" xmlns:p="http://schemas.openxmlformats.org/presentationml/2006/main" xmlns:c="http://schemas.openxmlformats.org/drawingml/2006/chart" xmlns:dgm="http://schemas.openxmlformats.org/drawingml/2006/diagram" xmlns:o="urn:schemas-microsoft-com:office:office" xmlns:v="urn:schemas-microsoft-com:vml" xmlns:pvml="urn:schemas-microsoft-com:office:powerpoint" xmlns:com="http://schemas.openxmlformats.org/drawingml/2006/compatibility" xmlns:p14="http://schemas.microsoft.com/office/powerpoint/2010/main" xmlns:p15="http://schemas.microsoft.com/office/powerpoint/2012/main" xmlns:ahyp="http://schemas.microsoft.com/office/drawing/2018/hyperlinkcolor">
   <p:cSld>
@@ -17300,7 +17729,7 @@
                   <a:schemeClr val="accent5"/>
                 </a:solidFill>
               </a:rPr>
-              <a:t>Apply It to Your Project</a:t>
+              <a:t>Exercises (Stretch)</a:t>
             </a:r>
             <a:endParaRPr>
               <a:solidFill>
@@ -17345,7 +17774,7 @@
             </a:pPr>
             <a:r>
               <a:rPr lang="en"/>
-              <a:t>Which libraries does your game use? Would your code notice a swap?</a:t>
+              <a:t>Unit test Units: to metres and back, and y flips</a:t>
             </a:r>
             <a:endParaRPr/>
           </a:p>
@@ -17362,41 +17791,24 @@
             </a:pPr>
             <a:r>
               <a:rPr lang="en"/>
-              <a:t>Does anything exist twice? Which copy owns it?</a:t>
+              <a:t>Swap the library: which files would change?</a:t>
             </a:r>
             <a:endParaRPr/>
           </a:p>
           <a:p>
-            <a:pPr indent="-330200" lvl="0" marL="457200" rtl="0" algn="l">
-              <a:spcBef>
-                <a:spcPts val="0"/>
-              </a:spcBef>
-              <a:spcAft>
-                <a:spcPts val="0"/>
-              </a:spcAft>
-              <a:buSzPts val="1600"/>
-              <a:buChar char="●"/>
+            <a:pPr indent="-317500" lvl="1" marL="914400" rtl="0" algn="l">
+              <a:spcBef>
+                <a:spcPts val="0"/>
+              </a:spcBef>
+              <a:spcAft>
+                <a:spcPts val="0"/>
+              </a:spcAft>
+              <a:buSzPts val="1400"/>
+              <a:buChar char="○"/>
             </a:pPr>
             <a:r>
               <a:rPr lang="en"/>
-              <a:t>Do you remove objects while looping over them?</a:t>
-            </a:r>
-            <a:endParaRPr/>
-          </a:p>
-          <a:p>
-            <a:pPr indent="-330200" lvl="0" marL="457200" rtl="0" algn="l">
-              <a:spcBef>
-                <a:spcPts val="0"/>
-              </a:spcBef>
-              <a:spcAft>
-                <a:spcPts val="0"/>
-              </a:spcAft>
-              <a:buSzPts val="1600"/>
-              <a:buChar char="●"/>
-            </a:pPr>
-            <a:r>
-              <a:rPr lang="en"/>
-              <a:t>Which kinds of things could be prototypes, or data?</a:t>
+              <a:t>Try it with Aether.Physics2D</a:t>
             </a:r>
             <a:endParaRPr/>
           </a:p>
@@ -18113,7 +18525,7 @@
             </a:pPr>
             <a:r>
               <a:rPr lang="en"/>
-              <a:t>The Whole Game: Who Holds What</a:t>
+              <a:t>Check Yourself</a:t>
             </a:r>
             <a:endParaRPr/>
           </a:p>
@@ -18132,7 +18544,7 @@
         <p:spPr>
           <a:xfrm>
             <a:off x="311700" y="885950"/>
-            <a:ext cx="8520600" cy="521208"/>
+            <a:ext cx="8520600" cy="1719072"/>
           </a:xfrm>
         </p:spPr>
         <p:txBody>
@@ -18150,8 +18562,59 @@
               <a:buChar char="●"/>
             </a:pPr>
             <a:r>
-              <a:rPr lang="en" b="1"/>
-              <a:t>Box2D is reached from the Physics folder only.</a:t>
+              <a:rPr lang="en"/>
+              <a:t>What is the difference between an Adapter and a Facade?</a:t>
+            </a:r>
+            <a:endParaRPr/>
+          </a:p>
+          <a:p>
+            <a:pPr indent="-330200" lvl="0" marL="457200" rtl="0" algn="l">
+              <a:spcBef>
+                <a:spcPts val="0"/>
+              </a:spcBef>
+              <a:spcAft>
+                <a:spcPts val="0"/>
+              </a:spcAft>
+              <a:buSzPts val="1600"/>
+              <a:buChar char="●"/>
+            </a:pPr>
+            <a:r>
+              <a:rPr lang="en"/>
+              <a:t>Why convert between metres and pixels at all?</a:t>
+            </a:r>
+            <a:endParaRPr/>
+          </a:p>
+          <a:p>
+            <a:pPr indent="-330200" lvl="0" marL="457200" rtl="0" algn="l">
+              <a:spcBef>
+                <a:spcPts val="0"/>
+              </a:spcBef>
+              <a:spcAft>
+                <a:spcPts val="0"/>
+              </a:spcAft>
+              <a:buSzPts val="1600"/>
+              <a:buChar char="●"/>
+            </a:pPr>
+            <a:r>
+              <a:rPr lang="en"/>
+              <a:t>Why not destroy a body inside the hit handler?</a:t>
+            </a:r>
+            <a:endParaRPr/>
+          </a:p>
+          <a:p>
+            <a:pPr indent="-330200" lvl="0" marL="457200" rtl="0" algn="l">
+              <a:spcBef>
+                <a:spcPts val="0"/>
+              </a:spcBef>
+              <a:spcAft>
+                <a:spcPts val="0"/>
+              </a:spcAft>
+              <a:buSzPts val="1600"/>
+              <a:buChar char="●"/>
+            </a:pPr>
+            <a:r>
+              <a:rPr lang="en"/>
+              <a:t>What does a shallow copy share with the original, and why does it matter?</a:t>
             </a:r>
             <a:endParaRPr/>
           </a:p>
@@ -18159,766 +18622,14 @@
       </p:sp>
       <p:sp>
         <p:nvSpPr>
-          <p:cNvPr id="4" name="Rounded Rectangle 3"/>
-          <p:cNvSpPr/>
-          <p:nvPr/>
-        </p:nvSpPr>
-        <p:spPr>
-          <a:xfrm>
-            <a:off x="3429000" y="1481328"/>
-            <a:ext cx="2286000" cy="566928"/>
-          </a:xfrm>
-          <a:prstGeom prst="roundRect">
-            <a:avLst>
-              <a:gd name="adj" fmla="val 12000"/>
-            </a:avLst>
-          </a:prstGeom>
-          <a:solidFill>
-            <a:srgbClr val="2E3338"/>
-          </a:solidFill>
-          <a:ln w="25400">
-            <a:solidFill>
-              <a:srgbClr val="D45D35"/>
-            </a:solidFill>
-          </a:ln>
-          <a:effectLst/>
-        </p:spPr>
-        <p:style>
-          <a:lnRef idx="1">
-            <a:schemeClr val="accent1"/>
-          </a:lnRef>
-          <a:fillRef idx="3">
-            <a:schemeClr val="accent1"/>
-          </a:fillRef>
-          <a:effectRef idx="2">
-            <a:schemeClr val="accent1"/>
-          </a:effectRef>
-          <a:fontRef idx="minor">
-            <a:schemeClr val="lt1"/>
-          </a:fontRef>
-        </p:style>
-        <p:txBody>
-          <a:bodyPr rtlCol="0" anchor="ctr" wrap="square" lIns="73152" rIns="73152"/>
-          <a:lstStyle/>
-          <a:p>
-            <a:pPr algn="ctr"/>
-            <a:r>
-              <a:rPr sz="1300" b="1">
-                <a:solidFill>
-                  <a:srgbClr val="DEE2E6"/>
-                </a:solidFill>
-              </a:rPr>
-              <a:t>Game1 : Core</a:t>
-            </a:r>
-          </a:p>
-        </p:txBody>
-      </p:sp>
-      <p:sp>
-        <p:nvSpPr>
-          <p:cNvPr id="5" name="Rounded Rectangle 4"/>
-          <p:cNvSpPr/>
-          <p:nvPr/>
-        </p:nvSpPr>
-        <p:spPr>
-          <a:xfrm>
-            <a:off x="374903" y="2596896"/>
-            <a:ext cx="1591056" cy="566928"/>
-          </a:xfrm>
-          <a:prstGeom prst="roundRect">
-            <a:avLst>
-              <a:gd name="adj" fmla="val 12000"/>
-            </a:avLst>
-          </a:prstGeom>
-          <a:solidFill>
-            <a:srgbClr val="2E3338"/>
-          </a:solidFill>
-          <a:ln>
-            <a:noFill/>
-          </a:ln>
-          <a:effectLst/>
-        </p:spPr>
-        <p:style>
-          <a:lnRef idx="1">
-            <a:schemeClr val="accent1"/>
-          </a:lnRef>
-          <a:fillRef idx="3">
-            <a:schemeClr val="accent1"/>
-          </a:fillRef>
-          <a:effectRef idx="2">
-            <a:schemeClr val="accent1"/>
-          </a:effectRef>
-          <a:fontRef idx="minor">
-            <a:schemeClr val="lt1"/>
-          </a:fontRef>
-        </p:style>
-        <p:txBody>
-          <a:bodyPr rtlCol="0" anchor="ctr" wrap="square" lIns="73152" rIns="73152"/>
-          <a:lstStyle/>
-          <a:p>
-            <a:pPr algn="ctr"/>
-            <a:r>
-              <a:rPr sz="1300" b="1">
-                <a:solidFill>
-                  <a:srgbClr val="DEE2E6"/>
-                </a:solidFill>
-              </a:rPr>
-              <a:t>Game states</a:t>
-            </a:r>
-          </a:p>
-          <a:p>
-            <a:pPr algn="ctr"/>
-            <a:r>
-              <a:rPr sz="1100" b="0">
-                <a:solidFill>
-                  <a:srgbClr val="9AA3AB"/>
-                </a:solidFill>
-              </a:rPr>
-              <a:t>aim, fly, level end</a:t>
-            </a:r>
-          </a:p>
-        </p:txBody>
-      </p:sp>
-      <p:cxnSp>
-        <p:nvCxnSpPr>
-          <p:cNvPr id="6" name="Connector 5"/>
-          <p:cNvCxnSpPr/>
-          <p:nvPr/>
-        </p:nvCxnSpPr>
-        <p:spPr>
-          <a:xfrm flipH="1">
-            <a:off x="1170432" y="2066544"/>
-            <a:ext cx="3401568" cy="512064"/>
-          </a:xfrm>
-          <a:prstGeom prst="line">
-            <a:avLst/>
-          </a:prstGeom>
-          <a:ln w="25400">
-            <a:solidFill>
-              <a:srgbClr val="9AA3AB"/>
-            </a:solidFill>
-            <a:tailEnd type="triangle"/>
-          </a:ln>
-        </p:spPr>
-        <p:style>
-          <a:lnRef idx="2">
-            <a:schemeClr val="accent1"/>
-          </a:lnRef>
-          <a:fillRef idx="0">
-            <a:schemeClr val="accent1"/>
-          </a:fillRef>
-          <a:effectRef idx="1">
-            <a:schemeClr val="accent1"/>
-          </a:effectRef>
-          <a:fontRef idx="minor">
-            <a:schemeClr val="tx1"/>
-          </a:fontRef>
-        </p:style>
-      </p:cxnSp>
-      <p:sp>
-        <p:nvSpPr>
-          <p:cNvPr id="7" name="Rounded Rectangle 6"/>
-          <p:cNvSpPr/>
-          <p:nvPr/>
-        </p:nvSpPr>
-        <p:spPr>
-          <a:xfrm>
-            <a:off x="2075688" y="2596896"/>
-            <a:ext cx="1591056" cy="566928"/>
-          </a:xfrm>
-          <a:prstGeom prst="roundRect">
-            <a:avLst>
-              <a:gd name="adj" fmla="val 12000"/>
-            </a:avLst>
-          </a:prstGeom>
-          <a:solidFill>
-            <a:srgbClr val="2E3338"/>
-          </a:solidFill>
-          <a:ln>
-            <a:noFill/>
-          </a:ln>
-          <a:effectLst/>
-        </p:spPr>
-        <p:style>
-          <a:lnRef idx="1">
-            <a:schemeClr val="accent1"/>
-          </a:lnRef>
-          <a:fillRef idx="3">
-            <a:schemeClr val="accent1"/>
-          </a:fillRef>
-          <a:effectRef idx="2">
-            <a:schemeClr val="accent1"/>
-          </a:effectRef>
-          <a:fontRef idx="minor">
-            <a:schemeClr val="lt1"/>
-          </a:fontRef>
-        </p:style>
-        <p:txBody>
-          <a:bodyPr rtlCol="0" anchor="ctr" wrap="square" lIns="73152" rIns="73152"/>
-          <a:lstStyle/>
-          <a:p>
-            <a:pPr algn="ctr"/>
-            <a:r>
-              <a:rPr sz="1300" b="1">
-                <a:solidFill>
-                  <a:srgbClr val="DEE2E6"/>
-                </a:solidFill>
-              </a:rPr>
-              <a:t>PhysicsWorld</a:t>
-            </a:r>
-          </a:p>
-          <a:p>
-            <a:pPr algn="ctr"/>
-            <a:r>
-              <a:rPr sz="1100" b="0">
-                <a:solidFill>
-                  <a:srgbClr val="9AA3AB"/>
-                </a:solidFill>
-              </a:rPr>
-              <a:t>the facade</a:t>
-            </a:r>
-          </a:p>
-        </p:txBody>
-      </p:sp>
-      <p:sp>
-        <p:nvSpPr>
-          <p:cNvPr id="8" name="Rounded Rectangle 7"/>
-          <p:cNvSpPr/>
-          <p:nvPr/>
-        </p:nvSpPr>
-        <p:spPr>
-          <a:xfrm>
-            <a:off x="2075688" y="3712464"/>
-            <a:ext cx="1591056" cy="566928"/>
-          </a:xfrm>
-          <a:prstGeom prst="roundRect">
-            <a:avLst>
-              <a:gd name="adj" fmla="val 12000"/>
-            </a:avLst>
-          </a:prstGeom>
-          <a:solidFill>
-            <a:srgbClr val="2E3338"/>
-          </a:solidFill>
-          <a:ln>
-            <a:noFill/>
-          </a:ln>
-          <a:effectLst/>
-        </p:spPr>
-        <p:style>
-          <a:lnRef idx="1">
-            <a:schemeClr val="accent1"/>
-          </a:lnRef>
-          <a:fillRef idx="3">
-            <a:schemeClr val="accent1"/>
-          </a:fillRef>
-          <a:effectRef idx="2">
-            <a:schemeClr val="accent1"/>
-          </a:effectRef>
-          <a:fontRef idx="minor">
-            <a:schemeClr val="lt1"/>
-          </a:fontRef>
-        </p:style>
-        <p:txBody>
-          <a:bodyPr rtlCol="0" anchor="ctr" wrap="square" lIns="73152" rIns="73152"/>
-          <a:lstStyle/>
-          <a:p>
-            <a:pPr algn="ctr"/>
-            <a:r>
-              <a:rPr sz="1300" b="1">
-                <a:solidFill>
-                  <a:srgbClr val="DEE2E6"/>
-                </a:solidFill>
-              </a:rPr>
-              <a:t>Box2D</a:t>
-            </a:r>
-          </a:p>
-          <a:p>
-            <a:pPr algn="ctr"/>
-            <a:r>
-              <a:rPr sz="1100" b="0">
-                <a:solidFill>
-                  <a:srgbClr val="9AA3AB"/>
-                </a:solidFill>
-              </a:rPr>
-              <a:t>the library</a:t>
-            </a:r>
-          </a:p>
-        </p:txBody>
-      </p:sp>
-      <p:cxnSp>
-        <p:nvCxnSpPr>
-          <p:cNvPr id="9" name="Connector 8"/>
-          <p:cNvCxnSpPr/>
-          <p:nvPr/>
-        </p:nvCxnSpPr>
-        <p:spPr>
-          <a:xfrm>
-            <a:off x="2871216" y="3182112"/>
-            <a:ext cx="0" cy="512064"/>
-          </a:xfrm>
-          <a:prstGeom prst="line">
-            <a:avLst/>
-          </a:prstGeom>
-          <a:ln w="25400">
-            <a:solidFill>
-              <a:srgbClr val="9AA3AB"/>
-            </a:solidFill>
-            <a:tailEnd type="triangle"/>
-          </a:ln>
-        </p:spPr>
-        <p:style>
-          <a:lnRef idx="2">
-            <a:schemeClr val="accent1"/>
-          </a:lnRef>
-          <a:fillRef idx="0">
-            <a:schemeClr val="accent1"/>
-          </a:fillRef>
-          <a:effectRef idx="1">
-            <a:schemeClr val="accent1"/>
-          </a:effectRef>
-          <a:fontRef idx="minor">
-            <a:schemeClr val="tx1"/>
-          </a:fontRef>
-        </p:style>
-      </p:cxnSp>
-      <p:cxnSp>
-        <p:nvCxnSpPr>
-          <p:cNvPr id="10" name="Connector 9"/>
-          <p:cNvCxnSpPr/>
-          <p:nvPr/>
-        </p:nvCxnSpPr>
-        <p:spPr>
-          <a:xfrm flipH="1">
-            <a:off x="2871216" y="2066544"/>
-            <a:ext cx="1700784" cy="512064"/>
-          </a:xfrm>
-          <a:prstGeom prst="line">
-            <a:avLst/>
-          </a:prstGeom>
-          <a:ln w="25400">
-            <a:solidFill>
-              <a:srgbClr val="9AA3AB"/>
-            </a:solidFill>
-            <a:tailEnd type="triangle"/>
-          </a:ln>
-        </p:spPr>
-        <p:style>
-          <a:lnRef idx="2">
-            <a:schemeClr val="accent1"/>
-          </a:lnRef>
-          <a:fillRef idx="0">
-            <a:schemeClr val="accent1"/>
-          </a:fillRef>
-          <a:effectRef idx="1">
-            <a:schemeClr val="accent1"/>
-          </a:effectRef>
-          <a:fontRef idx="minor">
-            <a:schemeClr val="tx1"/>
-          </a:fontRef>
-        </p:style>
-      </p:cxnSp>
-      <p:sp>
-        <p:nvSpPr>
-          <p:cNvPr id="11" name="Rounded Rectangle 10"/>
-          <p:cNvSpPr/>
-          <p:nvPr/>
-        </p:nvSpPr>
-        <p:spPr>
-          <a:xfrm>
-            <a:off x="3776472" y="2596896"/>
-            <a:ext cx="1591056" cy="566928"/>
-          </a:xfrm>
-          <a:prstGeom prst="roundRect">
-            <a:avLst>
-              <a:gd name="adj" fmla="val 12000"/>
-            </a:avLst>
-          </a:prstGeom>
-          <a:solidFill>
-            <a:srgbClr val="2E3338"/>
-          </a:solidFill>
-          <a:ln>
-            <a:noFill/>
-          </a:ln>
-          <a:effectLst/>
-        </p:spPr>
-        <p:style>
-          <a:lnRef idx="1">
-            <a:schemeClr val="accent1"/>
-          </a:lnRef>
-          <a:fillRef idx="3">
-            <a:schemeClr val="accent1"/>
-          </a:fillRef>
-          <a:effectRef idx="2">
-            <a:schemeClr val="accent1"/>
-          </a:effectRef>
-          <a:fontRef idx="minor">
-            <a:schemeClr val="lt1"/>
-          </a:fontRef>
-        </p:style>
-        <p:txBody>
-          <a:bodyPr rtlCol="0" anchor="ctr" wrap="square" lIns="73152" rIns="73152"/>
-          <a:lstStyle/>
-          <a:p>
-            <a:pPr algn="ctr"/>
-            <a:r>
-              <a:rPr sz="1300" b="1">
-                <a:solidFill>
-                  <a:srgbClr val="DEE2E6"/>
-                </a:solidFill>
-              </a:rPr>
-              <a:t>Prefabs</a:t>
-            </a:r>
-          </a:p>
-          <a:p>
-            <a:pPr algn="ctr"/>
-            <a:r>
-              <a:rPr sz="1100" b="0">
-                <a:solidFill>
-                  <a:srgbClr val="9AA3AB"/>
-                </a:solidFill>
-              </a:rPr>
-              <a:t>clones entities</a:t>
-            </a:r>
-          </a:p>
-        </p:txBody>
-      </p:sp>
-      <p:cxnSp>
-        <p:nvCxnSpPr>
-          <p:cNvPr id="12" name="Connector 11"/>
-          <p:cNvCxnSpPr/>
-          <p:nvPr/>
-        </p:nvCxnSpPr>
-        <p:spPr>
-          <a:xfrm>
-            <a:off x="4572000" y="2066544"/>
-            <a:ext cx="0" cy="512064"/>
-          </a:xfrm>
-          <a:prstGeom prst="line">
-            <a:avLst/>
-          </a:prstGeom>
-          <a:ln w="25400">
-            <a:solidFill>
-              <a:srgbClr val="9AA3AB"/>
-            </a:solidFill>
-            <a:tailEnd type="triangle"/>
-          </a:ln>
-        </p:spPr>
-        <p:style>
-          <a:lnRef idx="2">
-            <a:schemeClr val="accent1"/>
-          </a:lnRef>
-          <a:fillRef idx="0">
-            <a:schemeClr val="accent1"/>
-          </a:fillRef>
-          <a:effectRef idx="1">
-            <a:schemeClr val="accent1"/>
-          </a:effectRef>
-          <a:fontRef idx="minor">
-            <a:schemeClr val="tx1"/>
-          </a:fontRef>
-        </p:style>
-      </p:cxnSp>
-      <p:sp>
-        <p:nvSpPr>
-          <p:cNvPr id="13" name="Rounded Rectangle 12"/>
-          <p:cNvSpPr/>
-          <p:nvPr/>
-        </p:nvSpPr>
-        <p:spPr>
-          <a:xfrm>
-            <a:off x="5477256" y="2596896"/>
-            <a:ext cx="1591056" cy="566928"/>
-          </a:xfrm>
-          <a:prstGeom prst="roundRect">
-            <a:avLst>
-              <a:gd name="adj" fmla="val 12000"/>
-            </a:avLst>
-          </a:prstGeom>
-          <a:solidFill>
-            <a:srgbClr val="2E3338"/>
-          </a:solidFill>
-          <a:ln>
-            <a:noFill/>
-          </a:ln>
-          <a:effectLst/>
-        </p:spPr>
-        <p:style>
-          <a:lnRef idx="1">
-            <a:schemeClr val="accent1"/>
-          </a:lnRef>
-          <a:fillRef idx="3">
-            <a:schemeClr val="accent1"/>
-          </a:fillRef>
-          <a:effectRef idx="2">
-            <a:schemeClr val="accent1"/>
-          </a:effectRef>
-          <a:fontRef idx="minor">
-            <a:schemeClr val="lt1"/>
-          </a:fontRef>
-        </p:style>
-        <p:txBody>
-          <a:bodyPr rtlCol="0" anchor="ctr" wrap="square" lIns="73152" rIns="73152"/>
-          <a:lstStyle/>
-          <a:p>
-            <a:pPr algn="ctr"/>
-            <a:r>
-              <a:rPr sz="1300" b="1">
-                <a:solidFill>
-                  <a:srgbClr val="DEE2E6"/>
-                </a:solidFill>
-              </a:rPr>
-              <a:t>Entities</a:t>
-            </a:r>
-          </a:p>
-          <a:p>
-            <a:pPr algn="ctr"/>
-            <a:r>
-              <a:rPr sz="1100" b="0">
-                <a:solidFill>
-                  <a:srgbClr val="9AA3AB"/>
-                </a:solidFill>
-              </a:rPr>
-              <a:t>blocks, pigs, the bird</a:t>
-            </a:r>
-          </a:p>
-        </p:txBody>
-      </p:sp>
-      <p:sp>
-        <p:nvSpPr>
-          <p:cNvPr id="14" name="Rounded Rectangle 13"/>
-          <p:cNvSpPr/>
-          <p:nvPr/>
-        </p:nvSpPr>
-        <p:spPr>
-          <a:xfrm>
-            <a:off x="5477256" y="3712464"/>
-            <a:ext cx="1591056" cy="566928"/>
-          </a:xfrm>
-          <a:prstGeom prst="roundRect">
-            <a:avLst>
-              <a:gd name="adj" fmla="val 12000"/>
-            </a:avLst>
-          </a:prstGeom>
-          <a:solidFill>
-            <a:srgbClr val="2E3338"/>
-          </a:solidFill>
-          <a:ln>
-            <a:noFill/>
-          </a:ln>
-          <a:effectLst/>
-        </p:spPr>
-        <p:style>
-          <a:lnRef idx="1">
-            <a:schemeClr val="accent1"/>
-          </a:lnRef>
-          <a:fillRef idx="3">
-            <a:schemeClr val="accent1"/>
-          </a:fillRef>
-          <a:effectRef idx="2">
-            <a:schemeClr val="accent1"/>
-          </a:effectRef>
-          <a:fontRef idx="minor">
-            <a:schemeClr val="lt1"/>
-          </a:fontRef>
-        </p:style>
-        <p:txBody>
-          <a:bodyPr rtlCol="0" anchor="ctr" wrap="square" lIns="73152" rIns="73152"/>
-          <a:lstStyle/>
-          <a:p>
-            <a:pPr algn="ctr"/>
-            <a:r>
-              <a:rPr sz="1300" b="1">
-                <a:solidFill>
-                  <a:srgbClr val="DEE2E6"/>
-                </a:solidFill>
-              </a:rPr>
-              <a:t>PhysicsBody</a:t>
-            </a:r>
-          </a:p>
-          <a:p>
-            <a:pPr algn="ctr"/>
-            <a:r>
-              <a:rPr sz="1100" b="0">
-                <a:solidFill>
-                  <a:srgbClr val="9AA3AB"/>
-                </a:solidFill>
-              </a:rPr>
-              <a:t>the adapter</a:t>
-            </a:r>
-          </a:p>
-        </p:txBody>
-      </p:sp>
-      <p:cxnSp>
-        <p:nvCxnSpPr>
-          <p:cNvPr id="15" name="Connector 14"/>
-          <p:cNvCxnSpPr/>
-          <p:nvPr/>
-        </p:nvCxnSpPr>
-        <p:spPr>
-          <a:xfrm>
-            <a:off x="6272784" y="3182112"/>
-            <a:ext cx="0" cy="512064"/>
-          </a:xfrm>
-          <a:prstGeom prst="line">
-            <a:avLst/>
-          </a:prstGeom>
-          <a:ln w="25400">
-            <a:solidFill>
-              <a:srgbClr val="9AA3AB"/>
-            </a:solidFill>
-            <a:tailEnd type="triangle"/>
-          </a:ln>
-        </p:spPr>
-        <p:style>
-          <a:lnRef idx="2">
-            <a:schemeClr val="accent1"/>
-          </a:lnRef>
-          <a:fillRef idx="0">
-            <a:schemeClr val="accent1"/>
-          </a:fillRef>
-          <a:effectRef idx="1">
-            <a:schemeClr val="accent1"/>
-          </a:effectRef>
-          <a:fontRef idx="minor">
-            <a:schemeClr val="tx1"/>
-          </a:fontRef>
-        </p:style>
-      </p:cxnSp>
-      <p:cxnSp>
-        <p:nvCxnSpPr>
-          <p:cNvPr id="16" name="Connector 15"/>
-          <p:cNvCxnSpPr/>
-          <p:nvPr/>
-        </p:nvCxnSpPr>
-        <p:spPr>
-          <a:xfrm>
-            <a:off x="4572000" y="2066544"/>
-            <a:ext cx="1700784" cy="512064"/>
-          </a:xfrm>
-          <a:prstGeom prst="line">
-            <a:avLst/>
-          </a:prstGeom>
-          <a:ln w="25400">
-            <a:solidFill>
-              <a:srgbClr val="9AA3AB"/>
-            </a:solidFill>
-            <a:tailEnd type="triangle"/>
-          </a:ln>
-        </p:spPr>
-        <p:style>
-          <a:lnRef idx="2">
-            <a:schemeClr val="accent1"/>
-          </a:lnRef>
-          <a:fillRef idx="0">
-            <a:schemeClr val="accent1"/>
-          </a:fillRef>
-          <a:effectRef idx="1">
-            <a:schemeClr val="accent1"/>
-          </a:effectRef>
-          <a:fontRef idx="minor">
-            <a:schemeClr val="tx1"/>
-          </a:fontRef>
-        </p:style>
-      </p:cxnSp>
-      <p:sp>
-        <p:nvSpPr>
-          <p:cNvPr id="17" name="Rounded Rectangle 16"/>
-          <p:cNvSpPr/>
-          <p:nvPr/>
-        </p:nvSpPr>
-        <p:spPr>
-          <a:xfrm>
-            <a:off x="7178040" y="2596896"/>
-            <a:ext cx="1591056" cy="566928"/>
-          </a:xfrm>
-          <a:prstGeom prst="roundRect">
-            <a:avLst>
-              <a:gd name="adj" fmla="val 12000"/>
-            </a:avLst>
-          </a:prstGeom>
-          <a:solidFill>
-            <a:srgbClr val="2E3338"/>
-          </a:solidFill>
-          <a:ln>
-            <a:noFill/>
-          </a:ln>
-          <a:effectLst/>
-        </p:spPr>
-        <p:style>
-          <a:lnRef idx="1">
-            <a:schemeClr val="accent1"/>
-          </a:lnRef>
-          <a:fillRef idx="3">
-            <a:schemeClr val="accent1"/>
-          </a:fillRef>
-          <a:effectRef idx="2">
-            <a:schemeClr val="accent1"/>
-          </a:effectRef>
-          <a:fontRef idx="minor">
-            <a:schemeClr val="lt1"/>
-          </a:fontRef>
-        </p:style>
-        <p:txBody>
-          <a:bodyPr rtlCol="0" anchor="ctr" wrap="square" lIns="73152" rIns="73152"/>
-          <a:lstStyle/>
-          <a:p>
-            <a:pPr algn="ctr"/>
-            <a:r>
-              <a:rPr sz="1300" b="1">
-                <a:solidFill>
-                  <a:srgbClr val="DEE2E6"/>
-                </a:solidFill>
-              </a:rPr>
-              <a:t>Slingshot</a:t>
-            </a:r>
-          </a:p>
-        </p:txBody>
-      </p:sp>
-      <p:cxnSp>
-        <p:nvCxnSpPr>
-          <p:cNvPr id="18" name="Connector 17"/>
-          <p:cNvCxnSpPr/>
-          <p:nvPr/>
-        </p:nvCxnSpPr>
-        <p:spPr>
-          <a:xfrm>
-            <a:off x="4572000" y="2066544"/>
-            <a:ext cx="3401568" cy="512064"/>
-          </a:xfrm>
-          <a:prstGeom prst="line">
-            <a:avLst/>
-          </a:prstGeom>
-          <a:ln w="25400">
-            <a:solidFill>
-              <a:srgbClr val="9AA3AB"/>
-            </a:solidFill>
-            <a:tailEnd type="triangle"/>
-          </a:ln>
-        </p:spPr>
-        <p:style>
-          <a:lnRef idx="2">
-            <a:schemeClr val="accent1"/>
-          </a:lnRef>
-          <a:fillRef idx="0">
-            <a:schemeClr val="accent1"/>
-          </a:fillRef>
-          <a:effectRef idx="1">
-            <a:schemeClr val="accent1"/>
-          </a:effectRef>
-          <a:fontRef idx="minor">
-            <a:schemeClr val="tx1"/>
-          </a:fontRef>
-        </p:style>
-      </p:cxnSp>
-      <p:sp>
-        <p:nvSpPr>
-          <p:cNvPr id="19" name="TextBox 18"/>
+          <p:cNvPr id="4" name="TextBox 3"/>
           <p:cNvSpPr txBox="1"/>
           <p:nvPr/>
         </p:nvSpPr>
         <p:spPr>
           <a:xfrm>
-            <a:off x="457200" y="4462272"/>
-            <a:ext cx="8229600" cy="365760"/>
+            <a:off x="457200" y="3182112"/>
+            <a:ext cx="8229600" cy="457200"/>
           </a:xfrm>
           <a:prstGeom prst="rect">
             <a:avLst/>
@@ -18933,12 +18644,12 @@
           <a:p>
             <a:pPr algn="ctr"/>
             <a:r>
-              <a:rPr sz="1300" b="0" i="0">
+              <a:rPr sz="1400" b="0" i="0">
                 <a:solidFill>
                   <a:srgbClr val="9AA3AB"/>
                 </a:solidFill>
               </a:rPr>
-              <a:t>A level file names prefabs, and Prefabs clones them into the world.</a:t>
+              <a:t>The answers, and more questions, are on the course site.</a:t>
             </a:r>
           </a:p>
         </p:txBody>
@@ -18952,28 +18663,43 @@
 </file>
 
 <file path=ppt/slides/slide37.xml><?xml version="1.0" encoding="utf-8"?>
-<p:sld xmlns:a="http://schemas.openxmlformats.org/drawingml/2006/main" xmlns:p="http://schemas.openxmlformats.org/presentationml/2006/main" xmlns:r="http://schemas.openxmlformats.org/officeDocument/2006/relationships">
+<p:sld xmlns:a="http://schemas.openxmlformats.org/drawingml/2006/main" xmlns:r="http://schemas.openxmlformats.org/officeDocument/2006/relationships" xmlns:mc="http://schemas.openxmlformats.org/markup-compatibility/2006" xmlns:mv="urn:schemas-microsoft-com:mac:vml" xmlns:p="http://schemas.openxmlformats.org/presentationml/2006/main" xmlns:c="http://schemas.openxmlformats.org/drawingml/2006/chart" xmlns:dgm="http://schemas.openxmlformats.org/drawingml/2006/diagram" xmlns:o="urn:schemas-microsoft-com:office:office" xmlns:v="urn:schemas-microsoft-com:vml" xmlns:pvml="urn:schemas-microsoft-com:office:powerpoint" xmlns:com="http://schemas.openxmlformats.org/drawingml/2006/compatibility" xmlns:p14="http://schemas.microsoft.com/office/powerpoint/2010/main" xmlns:p15="http://schemas.microsoft.com/office/powerpoint/2012/main" xmlns:ahyp="http://schemas.microsoft.com/office/drawing/2018/hyperlinkcolor">
   <p:cSld>
     <p:spTree>
       <p:nvGrpSpPr>
-        <p:cNvPr id="1" name=""/>
+        <p:cNvPr id="292" name="Shape 292"/>
         <p:cNvGrpSpPr/>
         <p:nvPr/>
       </p:nvGrpSpPr>
-      <p:grpSpPr/>
+      <p:grpSpPr>
+        <a:xfrm>
+          <a:off x="0" y="0"/>
+          <a:ext cx="0" cy="0"/>
+          <a:chOff x="0" y="0"/>
+          <a:chExt cx="0" cy="0"/>
+        </a:xfrm>
+      </p:grpSpPr>
       <p:sp>
         <p:nvSpPr>
-          <p:cNvPr id="2" name="Title 1"/>
-          <p:cNvSpPr>
-            <a:spLocks noGrp="1"/>
-          </p:cNvSpPr>
+          <p:cNvPr id="293" name="Google Shape;293;p45"/>
+          <p:cNvSpPr txBox="1"/>
           <p:nvPr>
             <p:ph type="title"/>
           </p:nvPr>
         </p:nvSpPr>
-        <p:spPr/>
+        <p:spPr>
+          <a:xfrm>
+            <a:off x="311700" y="195615"/>
+            <a:ext cx="8520600" cy="572700"/>
+          </a:xfrm>
+          <a:prstGeom prst="rect">
+            <a:avLst/>
+          </a:prstGeom>
+        </p:spPr>
         <p:txBody>
-          <a:bodyPr/>
+          <a:bodyPr anchorCtr="0" anchor="t" bIns="91425" lIns="91425" spcFirstLastPara="1" rIns="91425" wrap="square" tIns="91425">
+            <a:normAutofit fontScale="90000"/>
+          </a:bodyPr>
           <a:lstStyle/>
           <a:p>
             <a:pPr indent="0" lvl="0" marL="0" rtl="0" algn="l">
@@ -18986,31 +18712,42 @@
               <a:buNone/>
             </a:pPr>
             <a:r>
-              <a:rPr lang="en"/>
-              <a:t>Summary</a:t>
-            </a:r>
-            <a:endParaRPr/>
+              <a:rPr lang="en">
+                <a:solidFill>
+                  <a:schemeClr val="accent5"/>
+                </a:solidFill>
+              </a:rPr>
+              <a:t>Apply It to Your Project</a:t>
+            </a:r>
+            <a:endParaRPr>
+              <a:solidFill>
+                <a:schemeClr val="accent5"/>
+              </a:solidFill>
+            </a:endParaRPr>
           </a:p>
         </p:txBody>
       </p:sp>
       <p:sp>
         <p:nvSpPr>
-          <p:cNvPr id="3" name="Text Placeholder 2"/>
-          <p:cNvSpPr>
-            <a:spLocks noGrp="1"/>
-          </p:cNvSpPr>
+          <p:cNvPr id="294" name="Google Shape;294;p45"/>
+          <p:cNvSpPr txBox="1"/>
           <p:nvPr>
-            <p:ph type="body" idx="1"/>
+            <p:ph idx="1" type="body"/>
           </p:nvPr>
         </p:nvSpPr>
         <p:spPr>
           <a:xfrm>
             <a:off x="311700" y="885950"/>
-            <a:ext cx="8520600" cy="521208"/>
+            <a:ext cx="8520600" cy="4023300"/>
           </a:xfrm>
+          <a:prstGeom prst="rect">
+            <a:avLst/>
+          </a:prstGeom>
         </p:spPr>
         <p:txBody>
-          <a:bodyPr/>
+          <a:bodyPr anchorCtr="0" anchor="t" bIns="91425" lIns="91425" spcFirstLastPara="1" rIns="91425" wrap="square" tIns="91425">
+            <a:normAutofit/>
+          </a:bodyPr>
           <a:lstStyle/>
           <a:p>
             <a:pPr indent="-330200" lvl="0" marL="457200" rtl="0" algn="l">
@@ -19024,465 +18761,61 @@
               <a:buChar char="●"/>
             </a:pPr>
             <a:r>
-              <a:rPr lang="en" b="1"/>
-              <a:t>Seven concerns, and this session’s answer to each.</a:t>
+              <a:rPr lang="en"/>
+              <a:t>Which libraries does your game use? Would your code notice a swap?</a:t>
             </a:r>
             <a:endParaRPr/>
           </a:p>
-        </p:txBody>
-      </p:sp>
-      <p:sp>
-        <p:nvSpPr>
-          <p:cNvPr id="4" name="Rounded Rectangle 3"/>
-          <p:cNvSpPr/>
-          <p:nvPr/>
-        </p:nvSpPr>
-        <p:spPr>
-          <a:xfrm>
-            <a:off x="548640" y="1417320"/>
-            <a:ext cx="2560320" cy="841248"/>
-          </a:xfrm>
-          <a:prstGeom prst="roundRect">
-            <a:avLst>
-              <a:gd name="adj" fmla="val 12000"/>
-            </a:avLst>
-          </a:prstGeom>
-          <a:solidFill>
-            <a:srgbClr val="2E3338"/>
-          </a:solidFill>
-          <a:ln>
-            <a:noFill/>
-          </a:ln>
-          <a:effectLst/>
-        </p:spPr>
-        <p:style>
-          <a:lnRef idx="1">
-            <a:schemeClr val="accent1"/>
-          </a:lnRef>
-          <a:fillRef idx="3">
-            <a:schemeClr val="accent1"/>
-          </a:fillRef>
-          <a:effectRef idx="2">
-            <a:schemeClr val="accent1"/>
-          </a:effectRef>
-          <a:fontRef idx="minor">
-            <a:schemeClr val="lt1"/>
-          </a:fontRef>
-        </p:style>
-        <p:txBody>
-          <a:bodyPr rtlCol="0" anchor="ctr" wrap="square" lIns="73152" rIns="73152"/>
-          <a:lstStyle/>
-          <a:p>
-            <a:pPr algn="ctr"/>
-            <a:r>
-              <a:rPr sz="1500" b="1">
-                <a:solidFill>
-                  <a:srgbClr val="DEE2E6"/>
-                </a:solidFill>
-              </a:rPr>
-              <a:t>A library that doesn’t fit our code</a:t>
-            </a:r>
-          </a:p>
-          <a:p>
-            <a:pPr algn="ctr"/>
-            <a:r>
-              <a:rPr sz="1300" b="0">
-                <a:solidFill>
-                  <a:srgbClr val="9AA3AB"/>
-                </a:solidFill>
-              </a:rPr>
-              <a:t>Adapter: PhysicsBody</a:t>
-            </a:r>
-          </a:p>
-        </p:txBody>
-      </p:sp>
-      <p:sp>
-        <p:nvSpPr>
-          <p:cNvPr id="5" name="Rounded Rectangle 4"/>
-          <p:cNvSpPr/>
-          <p:nvPr/>
-        </p:nvSpPr>
-        <p:spPr>
-          <a:xfrm>
-            <a:off x="3291840" y="1417320"/>
-            <a:ext cx="2560320" cy="841248"/>
-          </a:xfrm>
-          <a:prstGeom prst="roundRect">
-            <a:avLst>
-              <a:gd name="adj" fmla="val 12000"/>
-            </a:avLst>
-          </a:prstGeom>
-          <a:solidFill>
-            <a:srgbClr val="2E3338"/>
-          </a:solidFill>
-          <a:ln>
-            <a:noFill/>
-          </a:ln>
-          <a:effectLst/>
-        </p:spPr>
-        <p:style>
-          <a:lnRef idx="1">
-            <a:schemeClr val="accent1"/>
-          </a:lnRef>
-          <a:fillRef idx="3">
-            <a:schemeClr val="accent1"/>
-          </a:fillRef>
-          <a:effectRef idx="2">
-            <a:schemeClr val="accent1"/>
-          </a:effectRef>
-          <a:fontRef idx="minor">
-            <a:schemeClr val="lt1"/>
-          </a:fontRef>
-        </p:style>
-        <p:txBody>
-          <a:bodyPr rtlCol="0" anchor="ctr" wrap="square" lIns="73152" rIns="73152"/>
-          <a:lstStyle/>
-          <a:p>
-            <a:pPr algn="ctr"/>
-            <a:r>
-              <a:rPr sz="1500" b="1">
-                <a:solidFill>
-                  <a:srgbClr val="DEE2E6"/>
-                </a:solidFill>
-              </a:rPr>
-              <a:t>A big library, little needed</a:t>
-            </a:r>
-          </a:p>
-          <a:p>
-            <a:pPr algn="ctr"/>
-            <a:r>
-              <a:rPr sz="1300" b="0">
-                <a:solidFill>
-                  <a:srgbClr val="9AA3AB"/>
-                </a:solidFill>
-              </a:rPr>
-              <a:t>Facade: PhysicsWorld</a:t>
-            </a:r>
-          </a:p>
-        </p:txBody>
-      </p:sp>
-      <p:sp>
-        <p:nvSpPr>
-          <p:cNvPr id="6" name="Rounded Rectangle 5"/>
-          <p:cNvSpPr/>
-          <p:nvPr/>
-        </p:nvSpPr>
-        <p:spPr>
-          <a:xfrm>
-            <a:off x="6035040" y="1417320"/>
-            <a:ext cx="2560320" cy="841248"/>
-          </a:xfrm>
-          <a:prstGeom prst="roundRect">
-            <a:avLst>
-              <a:gd name="adj" fmla="val 12000"/>
-            </a:avLst>
-          </a:prstGeom>
-          <a:solidFill>
-            <a:srgbClr val="2E3338"/>
-          </a:solidFill>
-          <a:ln>
-            <a:noFill/>
-          </a:ln>
-          <a:effectLst/>
-        </p:spPr>
-        <p:style>
-          <a:lnRef idx="1">
-            <a:schemeClr val="accent1"/>
-          </a:lnRef>
-          <a:fillRef idx="3">
-            <a:schemeClr val="accent1"/>
-          </a:fillRef>
-          <a:effectRef idx="2">
-            <a:schemeClr val="accent1"/>
-          </a:effectRef>
-          <a:fontRef idx="minor">
-            <a:schemeClr val="lt1"/>
-          </a:fontRef>
-        </p:style>
-        <p:txBody>
-          <a:bodyPr rtlCol="0" anchor="ctr" wrap="square" lIns="73152" rIns="73152"/>
-          <a:lstStyle/>
-          <a:p>
-            <a:pPr algn="ctr"/>
-            <a:r>
-              <a:rPr sz="1500" b="1">
-                <a:solidFill>
-                  <a:srgbClr val="DEE2E6"/>
-                </a:solidFill>
-              </a:rPr>
-              <a:t>Metres and pixels</a:t>
-            </a:r>
-          </a:p>
-          <a:p>
-            <a:pPr algn="ctr"/>
-            <a:r>
-              <a:rPr sz="1300" b="0">
-                <a:solidFill>
-                  <a:srgbClr val="9AA3AB"/>
-                </a:solidFill>
-              </a:rPr>
-              <a:t>One class converts: Units</a:t>
-            </a:r>
-          </a:p>
-        </p:txBody>
-      </p:sp>
-      <p:sp>
-        <p:nvSpPr>
-          <p:cNvPr id="7" name="Rounded Rectangle 6"/>
-          <p:cNvSpPr/>
-          <p:nvPr/>
-        </p:nvSpPr>
-        <p:spPr>
-          <a:xfrm>
-            <a:off x="548640" y="2395728"/>
-            <a:ext cx="2560320" cy="841248"/>
-          </a:xfrm>
-          <a:prstGeom prst="roundRect">
-            <a:avLst>
-              <a:gd name="adj" fmla="val 12000"/>
-            </a:avLst>
-          </a:prstGeom>
-          <a:solidFill>
-            <a:srgbClr val="2E3338"/>
-          </a:solidFill>
-          <a:ln>
-            <a:noFill/>
-          </a:ln>
-          <a:effectLst/>
-        </p:spPr>
-        <p:style>
-          <a:lnRef idx="1">
-            <a:schemeClr val="accent1"/>
-          </a:lnRef>
-          <a:fillRef idx="3">
-            <a:schemeClr val="accent1"/>
-          </a:fillRef>
-          <a:effectRef idx="2">
-            <a:schemeClr val="accent1"/>
-          </a:effectRef>
-          <a:fontRef idx="minor">
-            <a:schemeClr val="lt1"/>
-          </a:fontRef>
-        </p:style>
-        <p:txBody>
-          <a:bodyPr rtlCol="0" anchor="ctr" wrap="square" lIns="73152" rIns="73152"/>
-          <a:lstStyle/>
-          <a:p>
-            <a:pPr algn="ctr"/>
-            <a:r>
-              <a:rPr sz="1500" b="1">
-                <a:solidFill>
-                  <a:srgbClr val="DEE2E6"/>
-                </a:solidFill>
-              </a:rPr>
-              <a:t>Who owns a position</a:t>
-            </a:r>
-          </a:p>
-          <a:p>
-            <a:pPr algn="ctr"/>
-            <a:r>
-              <a:rPr sz="1300" b="0">
-                <a:solidFill>
-                  <a:srgbClr val="9AA3AB"/>
-                </a:solidFill>
-              </a:rPr>
-              <a:t>The physics world</a:t>
-            </a:r>
-          </a:p>
-        </p:txBody>
-      </p:sp>
-      <p:sp>
-        <p:nvSpPr>
-          <p:cNvPr id="8" name="Rounded Rectangle 7"/>
-          <p:cNvSpPr/>
-          <p:nvPr/>
-        </p:nvSpPr>
-        <p:spPr>
-          <a:xfrm>
-            <a:off x="3291840" y="2395728"/>
-            <a:ext cx="2560320" cy="841248"/>
-          </a:xfrm>
-          <a:prstGeom prst="roundRect">
-            <a:avLst>
-              <a:gd name="adj" fmla="val 12000"/>
-            </a:avLst>
-          </a:prstGeom>
-          <a:solidFill>
-            <a:srgbClr val="2E3338"/>
-          </a:solidFill>
-          <a:ln>
-            <a:noFill/>
-          </a:ln>
-          <a:effectLst/>
-        </p:spPr>
-        <p:style>
-          <a:lnRef idx="1">
-            <a:schemeClr val="accent1"/>
-          </a:lnRef>
-          <a:fillRef idx="3">
-            <a:schemeClr val="accent1"/>
-          </a:fillRef>
-          <a:effectRef idx="2">
-            <a:schemeClr val="accent1"/>
-          </a:effectRef>
-          <a:fontRef idx="minor">
-            <a:schemeClr val="lt1"/>
-          </a:fontRef>
-        </p:style>
-        <p:txBody>
-          <a:bodyPr rtlCol="0" anchor="ctr" wrap="square" lIns="73152" rIns="73152"/>
-          <a:lstStyle/>
-          <a:p>
-            <a:pPr algn="ctr"/>
-            <a:r>
-              <a:rPr sz="1500" b="1">
-                <a:solidFill>
-                  <a:srgbClr val="DEE2E6"/>
-                </a:solidFill>
-              </a:rPr>
-              <a:t>What hit what</a:t>
-            </a:r>
-          </a:p>
-          <a:p>
-            <a:pPr algn="ctr"/>
-            <a:r>
-              <a:rPr sz="1300" b="0">
-                <a:solidFill>
-                  <a:srgbClr val="9AA3AB"/>
-                </a:solidFill>
-              </a:rPr>
-              <a:t>Hit events, as a C# event</a:t>
-            </a:r>
-          </a:p>
-        </p:txBody>
-      </p:sp>
-      <p:sp>
-        <p:nvSpPr>
-          <p:cNvPr id="9" name="Rounded Rectangle 8"/>
-          <p:cNvSpPr/>
-          <p:nvPr/>
-        </p:nvSpPr>
-        <p:spPr>
-          <a:xfrm>
-            <a:off x="6035040" y="2395728"/>
-            <a:ext cx="2560320" cy="841248"/>
-          </a:xfrm>
-          <a:prstGeom prst="roundRect">
-            <a:avLst>
-              <a:gd name="adj" fmla="val 12000"/>
-            </a:avLst>
-          </a:prstGeom>
-          <a:solidFill>
-            <a:srgbClr val="2E3338"/>
-          </a:solidFill>
-          <a:ln>
-            <a:noFill/>
-          </a:ln>
-          <a:effectLst/>
-        </p:spPr>
-        <p:style>
-          <a:lnRef idx="1">
-            <a:schemeClr val="accent1"/>
-          </a:lnRef>
-          <a:fillRef idx="3">
-            <a:schemeClr val="accent1"/>
-          </a:fillRef>
-          <a:effectRef idx="2">
-            <a:schemeClr val="accent1"/>
-          </a:effectRef>
-          <a:fontRef idx="minor">
-            <a:schemeClr val="lt1"/>
-          </a:fontRef>
-        </p:style>
-        <p:txBody>
-          <a:bodyPr rtlCol="0" anchor="ctr" wrap="square" lIns="73152" rIns="73152"/>
-          <a:lstStyle/>
-          <a:p>
-            <a:pPr algn="ctr"/>
-            <a:r>
-              <a:rPr sz="1500" b="1">
-                <a:solidFill>
-                  <a:srgbClr val="DEE2E6"/>
-                </a:solidFill>
-              </a:rPr>
-              <a:t>Removing things safely</a:t>
-            </a:r>
-          </a:p>
-          <a:p>
-            <a:pPr algn="ctr"/>
-            <a:r>
-              <a:rPr sz="1300" b="0">
-                <a:solidFill>
-                  <a:srgbClr val="9AA3AB"/>
-                </a:solidFill>
-              </a:rPr>
-              <a:t>Mark now, remove after the step</a:t>
-            </a:r>
-          </a:p>
-        </p:txBody>
-      </p:sp>
-      <p:sp>
-        <p:nvSpPr>
-          <p:cNvPr id="10" name="Rounded Rectangle 9"/>
-          <p:cNvSpPr/>
-          <p:nvPr/>
-        </p:nvSpPr>
-        <p:spPr>
-          <a:xfrm>
-            <a:off x="3291840" y="3374136"/>
-            <a:ext cx="2560320" cy="841248"/>
-          </a:xfrm>
-          <a:prstGeom prst="roundRect">
-            <a:avLst>
-              <a:gd name="adj" fmla="val 12000"/>
-            </a:avLst>
-          </a:prstGeom>
-          <a:solidFill>
-            <a:srgbClr val="2E3338"/>
-          </a:solidFill>
-          <a:ln>
-            <a:noFill/>
-          </a:ln>
-          <a:effectLst/>
-        </p:spPr>
-        <p:style>
-          <a:lnRef idx="1">
-            <a:schemeClr val="accent1"/>
-          </a:lnRef>
-          <a:fillRef idx="3">
-            <a:schemeClr val="accent1"/>
-          </a:fillRef>
-          <a:effectRef idx="2">
-            <a:schemeClr val="accent1"/>
-          </a:effectRef>
-          <a:fontRef idx="minor">
-            <a:schemeClr val="lt1"/>
-          </a:fontRef>
-        </p:style>
-        <p:txBody>
-          <a:bodyPr rtlCol="0" anchor="ctr" wrap="square" lIns="73152" rIns="73152"/>
-          <a:lstStyle/>
-          <a:p>
-            <a:pPr algn="ctr"/>
-            <a:r>
-              <a:rPr sz="1500" b="1">
-                <a:solidFill>
-                  <a:srgbClr val="DEE2E6"/>
-                </a:solidFill>
-              </a:rPr>
-              <a:t>Many kinds of blocks and pigs</a:t>
-            </a:r>
-          </a:p>
-          <a:p>
-            <a:pPr algn="ctr"/>
-            <a:r>
-              <a:rPr sz="1300" b="0">
-                <a:solidFill>
-                  <a:srgbClr val="9AA3AB"/>
-                </a:solidFill>
-              </a:rPr>
-              <a:t>Prototype</a:t>
-            </a:r>
+          <a:p>
+            <a:pPr indent="-330200" lvl="0" marL="457200" rtl="0" algn="l">
+              <a:spcBef>
+                <a:spcPts val="0"/>
+              </a:spcBef>
+              <a:spcAft>
+                <a:spcPts val="0"/>
+              </a:spcAft>
+              <a:buSzPts val="1600"/>
+              <a:buChar char="●"/>
+            </a:pPr>
+            <a:r>
+              <a:rPr lang="en"/>
+              <a:t>Does anything exist twice? Which copy owns it?</a:t>
+            </a:r>
+            <a:endParaRPr/>
+          </a:p>
+          <a:p>
+            <a:pPr indent="-330200" lvl="0" marL="457200" rtl="0" algn="l">
+              <a:spcBef>
+                <a:spcPts val="0"/>
+              </a:spcBef>
+              <a:spcAft>
+                <a:spcPts val="0"/>
+              </a:spcAft>
+              <a:buSzPts val="1600"/>
+              <a:buChar char="●"/>
+            </a:pPr>
+            <a:r>
+              <a:rPr lang="en"/>
+              <a:t>Do you remove objects while looping over them?</a:t>
+            </a:r>
+            <a:endParaRPr/>
+          </a:p>
+          <a:p>
+            <a:pPr indent="-330200" lvl="0" marL="457200" rtl="0" algn="l">
+              <a:spcBef>
+                <a:spcPts val="0"/>
+              </a:spcBef>
+              <a:spcAft>
+                <a:spcPts val="0"/>
+              </a:spcAft>
+              <a:buSzPts val="1600"/>
+              <a:buChar char="●"/>
+            </a:pPr>
+            <a:r>
+              <a:rPr lang="en"/>
+              <a:t>Which kinds of things could be prototypes, or data?</a:t>
+            </a:r>
+            <a:endParaRPr/>
           </a:p>
         </p:txBody>
       </p:sp>
@@ -19491,6 +18824,673 @@
   <p:clrMapOvr>
     <a:masterClrMapping/>
   </p:clrMapOvr>
+  <p:timing>
+    <p:tnLst>
+      <p:par>
+        <p:cTn dur="indefinite" nodeType="tmRoot" restart="never">
+          <p:childTnLst>
+            <p:seq concurrent="1" nextAc="seek">
+              <p:cTn dur="indefinite" id="2" nodeType="mainSeq">
+                <p:childTnLst>
+                  <p:par>
+                    <p:cTn fill="hold">
+                      <p:stCondLst>
+                        <p:cond delay="indefinite"/>
+                      </p:stCondLst>
+                      <p:childTnLst>
+                        <p:par>
+                          <p:cTn fill="hold">
+                            <p:stCondLst>
+                              <p:cond delay="0"/>
+                            </p:stCondLst>
+                            <p:childTnLst>
+                              <p:par>
+                                <p:cTn fill="hold" nodeType="clickEffect" presetClass="entr" presetID="1" presetSubtype="0">
+                                  <p:stCondLst>
+                                    <p:cond delay="0"/>
+                                  </p:stCondLst>
+                                  <p:childTnLst>
+                                    <p:set>
+                                      <p:cBhvr>
+                                        <p:cTn dur="1" fill="hold">
+                                          <p:stCondLst>
+                                            <p:cond delay="0"/>
+                                          </p:stCondLst>
+                                        </p:cTn>
+                                        <p:tgtEl>
+                                          <p:spTgt spid="294">
+                                            <p:txEl>
+                                              <p:pRg end="0" st="0"/>
+                                            </p:txEl>
+                                          </p:spTgt>
+                                        </p:tgtEl>
+                                        <p:attrNameLst>
+                                          <p:attrName>style.visibility</p:attrName>
+                                        </p:attrNameLst>
+                                      </p:cBhvr>
+                                      <p:to>
+                                        <p:strVal val="visible"/>
+                                      </p:to>
+                                    </p:set>
+                                  </p:childTnLst>
+                                </p:cTn>
+                              </p:par>
+                            </p:childTnLst>
+                          </p:cTn>
+                        </p:par>
+                      </p:childTnLst>
+                    </p:cTn>
+                  </p:par>
+                  <p:par>
+                    <p:cTn fill="hold">
+                      <p:stCondLst>
+                        <p:cond delay="indefinite"/>
+                      </p:stCondLst>
+                      <p:childTnLst>
+                        <p:par>
+                          <p:cTn fill="hold">
+                            <p:stCondLst>
+                              <p:cond delay="0"/>
+                            </p:stCondLst>
+                            <p:childTnLst>
+                              <p:par>
+                                <p:cTn fill="hold" nodeType="clickEffect" presetClass="entr" presetID="1" presetSubtype="0">
+                                  <p:stCondLst>
+                                    <p:cond delay="0"/>
+                                  </p:stCondLst>
+                                  <p:childTnLst>
+                                    <p:set>
+                                      <p:cBhvr>
+                                        <p:cTn dur="1" fill="hold">
+                                          <p:stCondLst>
+                                            <p:cond delay="0"/>
+                                          </p:stCondLst>
+                                        </p:cTn>
+                                        <p:tgtEl>
+                                          <p:spTgt spid="294">
+                                            <p:txEl>
+                                              <p:pRg end="1" st="1"/>
+                                            </p:txEl>
+                                          </p:spTgt>
+                                        </p:tgtEl>
+                                        <p:attrNameLst>
+                                          <p:attrName>style.visibility</p:attrName>
+                                        </p:attrNameLst>
+                                      </p:cBhvr>
+                                      <p:to>
+                                        <p:strVal val="visible"/>
+                                      </p:to>
+                                    </p:set>
+                                  </p:childTnLst>
+                                </p:cTn>
+                              </p:par>
+                            </p:childTnLst>
+                          </p:cTn>
+                        </p:par>
+                      </p:childTnLst>
+                    </p:cTn>
+                  </p:par>
+                  <p:par>
+                    <p:cTn fill="hold">
+                      <p:stCondLst>
+                        <p:cond delay="indefinite"/>
+                      </p:stCondLst>
+                      <p:childTnLst>
+                        <p:par>
+                          <p:cTn fill="hold">
+                            <p:stCondLst>
+                              <p:cond delay="0"/>
+                            </p:stCondLst>
+                            <p:childTnLst>
+                              <p:par>
+                                <p:cTn fill="hold" nodeType="clickEffect" presetClass="entr" presetID="1" presetSubtype="0">
+                                  <p:stCondLst>
+                                    <p:cond delay="0"/>
+                                  </p:stCondLst>
+                                  <p:childTnLst>
+                                    <p:set>
+                                      <p:cBhvr>
+                                        <p:cTn dur="1" fill="hold">
+                                          <p:stCondLst>
+                                            <p:cond delay="0"/>
+                                          </p:stCondLst>
+                                        </p:cTn>
+                                        <p:tgtEl>
+                                          <p:spTgt spid="294">
+                                            <p:txEl>
+                                              <p:pRg end="2" st="2"/>
+                                            </p:txEl>
+                                          </p:spTgt>
+                                        </p:tgtEl>
+                                        <p:attrNameLst>
+                                          <p:attrName>style.visibility</p:attrName>
+                                        </p:attrNameLst>
+                                      </p:cBhvr>
+                                      <p:to>
+                                        <p:strVal val="visible"/>
+                                      </p:to>
+                                    </p:set>
+                                  </p:childTnLst>
+                                </p:cTn>
+                              </p:par>
+                            </p:childTnLst>
+                          </p:cTn>
+                        </p:par>
+                      </p:childTnLst>
+                    </p:cTn>
+                  </p:par>
+                  <p:par>
+                    <p:cTn fill="hold">
+                      <p:stCondLst>
+                        <p:cond delay="indefinite"/>
+                      </p:stCondLst>
+                      <p:childTnLst>
+                        <p:par>
+                          <p:cTn fill="hold">
+                            <p:stCondLst>
+                              <p:cond delay="0"/>
+                            </p:stCondLst>
+                            <p:childTnLst>
+                              <p:par>
+                                <p:cTn fill="hold" nodeType="clickEffect" presetClass="entr" presetID="1" presetSubtype="0">
+                                  <p:stCondLst>
+                                    <p:cond delay="0"/>
+                                  </p:stCondLst>
+                                  <p:childTnLst>
+                                    <p:set>
+                                      <p:cBhvr>
+                                        <p:cTn dur="1" fill="hold">
+                                          <p:stCondLst>
+                                            <p:cond delay="0"/>
+                                          </p:stCondLst>
+                                        </p:cTn>
+                                        <p:tgtEl>
+                                          <p:spTgt spid="294">
+                                            <p:txEl>
+                                              <p:pRg end="3" st="3"/>
+                                            </p:txEl>
+                                          </p:spTgt>
+                                        </p:tgtEl>
+                                        <p:attrNameLst>
+                                          <p:attrName>style.visibility</p:attrName>
+                                        </p:attrNameLst>
+                                      </p:cBhvr>
+                                      <p:to>
+                                        <p:strVal val="visible"/>
+                                      </p:to>
+                                    </p:set>
+                                  </p:childTnLst>
+                                </p:cTn>
+                              </p:par>
+                            </p:childTnLst>
+                          </p:cTn>
+                        </p:par>
+                      </p:childTnLst>
+                    </p:cTn>
+                  </p:par>
+                  <p:par>
+                    <p:cTn fill="hold">
+                      <p:stCondLst>
+                        <p:cond delay="indefinite"/>
+                      </p:stCondLst>
+                      <p:childTnLst>
+                        <p:par>
+                          <p:cTn fill="hold">
+                            <p:stCondLst>
+                              <p:cond delay="0"/>
+                            </p:stCondLst>
+                            <p:childTnLst>
+                              <p:par>
+                                <p:cTn fill="hold" nodeType="clickEffect" presetClass="entr" presetID="1" presetSubtype="0">
+                                  <p:stCondLst>
+                                    <p:cond delay="0"/>
+                                  </p:stCondLst>
+                                  <p:childTnLst>
+                                    <p:set>
+                                      <p:cBhvr>
+                                        <p:cTn dur="1" fill="hold">
+                                          <p:stCondLst>
+                                            <p:cond delay="0"/>
+                                          </p:stCondLst>
+                                        </p:cTn>
+                                        <p:tgtEl>
+                                          <p:spTgt spid="294">
+                                            <p:txEl>
+                                              <p:pRg end="4" st="4"/>
+                                            </p:txEl>
+                                          </p:spTgt>
+                                        </p:tgtEl>
+                                        <p:attrNameLst>
+                                          <p:attrName>style.visibility</p:attrName>
+                                        </p:attrNameLst>
+                                      </p:cBhvr>
+                                      <p:to>
+                                        <p:strVal val="visible"/>
+                                      </p:to>
+                                    </p:set>
+                                  </p:childTnLst>
+                                </p:cTn>
+                              </p:par>
+                            </p:childTnLst>
+                          </p:cTn>
+                        </p:par>
+                      </p:childTnLst>
+                    </p:cTn>
+                  </p:par>
+                  <p:par>
+                    <p:cTn fill="hold">
+                      <p:stCondLst>
+                        <p:cond delay="indefinite"/>
+                      </p:stCondLst>
+                      <p:childTnLst>
+                        <p:par>
+                          <p:cTn fill="hold">
+                            <p:stCondLst>
+                              <p:cond delay="0"/>
+                            </p:stCondLst>
+                            <p:childTnLst>
+                              <p:par>
+                                <p:cTn fill="hold" nodeType="clickEffect" presetClass="entr" presetID="1" presetSubtype="0">
+                                  <p:stCondLst>
+                                    <p:cond delay="0"/>
+                                  </p:stCondLst>
+                                  <p:childTnLst>
+                                    <p:set>
+                                      <p:cBhvr>
+                                        <p:cTn dur="1" fill="hold">
+                                          <p:stCondLst>
+                                            <p:cond delay="0"/>
+                                          </p:stCondLst>
+                                        </p:cTn>
+                                        <p:tgtEl>
+                                          <p:spTgt spid="294">
+                                            <p:txEl>
+                                              <p:pRg end="5" st="5"/>
+                                            </p:txEl>
+                                          </p:spTgt>
+                                        </p:tgtEl>
+                                        <p:attrNameLst>
+                                          <p:attrName>style.visibility</p:attrName>
+                                        </p:attrNameLst>
+                                      </p:cBhvr>
+                                      <p:to>
+                                        <p:strVal val="visible"/>
+                                      </p:to>
+                                    </p:set>
+                                  </p:childTnLst>
+                                </p:cTn>
+                              </p:par>
+                            </p:childTnLst>
+                          </p:cTn>
+                        </p:par>
+                      </p:childTnLst>
+                    </p:cTn>
+                  </p:par>
+                  <p:par>
+                    <p:cTn fill="hold">
+                      <p:stCondLst>
+                        <p:cond delay="indefinite"/>
+                      </p:stCondLst>
+                      <p:childTnLst>
+                        <p:par>
+                          <p:cTn fill="hold">
+                            <p:stCondLst>
+                              <p:cond delay="0"/>
+                            </p:stCondLst>
+                            <p:childTnLst>
+                              <p:par>
+                                <p:cTn fill="hold" nodeType="clickEffect" presetClass="entr" presetID="1" presetSubtype="0">
+                                  <p:stCondLst>
+                                    <p:cond delay="0"/>
+                                  </p:stCondLst>
+                                  <p:childTnLst>
+                                    <p:set>
+                                      <p:cBhvr>
+                                        <p:cTn dur="1" fill="hold">
+                                          <p:stCondLst>
+                                            <p:cond delay="0"/>
+                                          </p:stCondLst>
+                                        </p:cTn>
+                                        <p:tgtEl>
+                                          <p:spTgt spid="294">
+                                            <p:txEl>
+                                              <p:pRg end="6" st="6"/>
+                                            </p:txEl>
+                                          </p:spTgt>
+                                        </p:tgtEl>
+                                        <p:attrNameLst>
+                                          <p:attrName>style.visibility</p:attrName>
+                                        </p:attrNameLst>
+                                      </p:cBhvr>
+                                      <p:to>
+                                        <p:strVal val="visible"/>
+                                      </p:to>
+                                    </p:set>
+                                  </p:childTnLst>
+                                </p:cTn>
+                              </p:par>
+                            </p:childTnLst>
+                          </p:cTn>
+                        </p:par>
+                      </p:childTnLst>
+                    </p:cTn>
+                  </p:par>
+                  <p:par>
+                    <p:cTn fill="hold">
+                      <p:stCondLst>
+                        <p:cond delay="indefinite"/>
+                      </p:stCondLst>
+                      <p:childTnLst>
+                        <p:par>
+                          <p:cTn fill="hold">
+                            <p:stCondLst>
+                              <p:cond delay="0"/>
+                            </p:stCondLst>
+                            <p:childTnLst>
+                              <p:par>
+                                <p:cTn fill="hold" nodeType="clickEffect" presetClass="entr" presetID="1" presetSubtype="0">
+                                  <p:stCondLst>
+                                    <p:cond delay="0"/>
+                                  </p:stCondLst>
+                                  <p:childTnLst>
+                                    <p:set>
+                                      <p:cBhvr>
+                                        <p:cTn dur="1" fill="hold">
+                                          <p:stCondLst>
+                                            <p:cond delay="0"/>
+                                          </p:stCondLst>
+                                        </p:cTn>
+                                        <p:tgtEl>
+                                          <p:spTgt spid="294">
+                                            <p:txEl>
+                                              <p:pRg end="7" st="7"/>
+                                            </p:txEl>
+                                          </p:spTgt>
+                                        </p:tgtEl>
+                                        <p:attrNameLst>
+                                          <p:attrName>style.visibility</p:attrName>
+                                        </p:attrNameLst>
+                                      </p:cBhvr>
+                                      <p:to>
+                                        <p:strVal val="visible"/>
+                                      </p:to>
+                                    </p:set>
+                                  </p:childTnLst>
+                                </p:cTn>
+                              </p:par>
+                            </p:childTnLst>
+                          </p:cTn>
+                        </p:par>
+                      </p:childTnLst>
+                    </p:cTn>
+                  </p:par>
+                  <p:par>
+                    <p:cTn fill="hold">
+                      <p:stCondLst>
+                        <p:cond delay="indefinite"/>
+                      </p:stCondLst>
+                      <p:childTnLst>
+                        <p:par>
+                          <p:cTn fill="hold">
+                            <p:stCondLst>
+                              <p:cond delay="0"/>
+                            </p:stCondLst>
+                            <p:childTnLst>
+                              <p:par>
+                                <p:cTn fill="hold" nodeType="clickEffect" presetClass="entr" presetID="1" presetSubtype="0">
+                                  <p:stCondLst>
+                                    <p:cond delay="0"/>
+                                  </p:stCondLst>
+                                  <p:childTnLst>
+                                    <p:set>
+                                      <p:cBhvr>
+                                        <p:cTn dur="1" fill="hold">
+                                          <p:stCondLst>
+                                            <p:cond delay="0"/>
+                                          </p:stCondLst>
+                                        </p:cTn>
+                                        <p:tgtEl>
+                                          <p:spTgt spid="294">
+                                            <p:txEl>
+                                              <p:pRg end="8" st="8"/>
+                                            </p:txEl>
+                                          </p:spTgt>
+                                        </p:tgtEl>
+                                        <p:attrNameLst>
+                                          <p:attrName>style.visibility</p:attrName>
+                                        </p:attrNameLst>
+                                      </p:cBhvr>
+                                      <p:to>
+                                        <p:strVal val="visible"/>
+                                      </p:to>
+                                    </p:set>
+                                  </p:childTnLst>
+                                </p:cTn>
+                              </p:par>
+                            </p:childTnLst>
+                          </p:cTn>
+                        </p:par>
+                      </p:childTnLst>
+                    </p:cTn>
+                  </p:par>
+                  <p:par>
+                    <p:cTn fill="hold">
+                      <p:stCondLst>
+                        <p:cond delay="indefinite"/>
+                      </p:stCondLst>
+                      <p:childTnLst>
+                        <p:par>
+                          <p:cTn fill="hold">
+                            <p:stCondLst>
+                              <p:cond delay="0"/>
+                            </p:stCondLst>
+                            <p:childTnLst>
+                              <p:par>
+                                <p:cTn fill="hold" nodeType="clickEffect" presetClass="entr" presetID="1" presetSubtype="0">
+                                  <p:stCondLst>
+                                    <p:cond delay="0"/>
+                                  </p:stCondLst>
+                                  <p:childTnLst>
+                                    <p:set>
+                                      <p:cBhvr>
+                                        <p:cTn dur="1" fill="hold">
+                                          <p:stCondLst>
+                                            <p:cond delay="0"/>
+                                          </p:stCondLst>
+                                        </p:cTn>
+                                        <p:tgtEl>
+                                          <p:spTgt spid="294">
+                                            <p:txEl>
+                                              <p:pRg end="9" st="9"/>
+                                            </p:txEl>
+                                          </p:spTgt>
+                                        </p:tgtEl>
+                                        <p:attrNameLst>
+                                          <p:attrName>style.visibility</p:attrName>
+                                        </p:attrNameLst>
+                                      </p:cBhvr>
+                                      <p:to>
+                                        <p:strVal val="visible"/>
+                                      </p:to>
+                                    </p:set>
+                                  </p:childTnLst>
+                                </p:cTn>
+                              </p:par>
+                            </p:childTnLst>
+                          </p:cTn>
+                        </p:par>
+                      </p:childTnLst>
+                    </p:cTn>
+                  </p:par>
+                  <p:par>
+                    <p:cTn fill="hold">
+                      <p:stCondLst>
+                        <p:cond delay="indefinite"/>
+                      </p:stCondLst>
+                      <p:childTnLst>
+                        <p:par>
+                          <p:cTn fill="hold">
+                            <p:stCondLst>
+                              <p:cond delay="0"/>
+                            </p:stCondLst>
+                            <p:childTnLst>
+                              <p:par>
+                                <p:cTn fill="hold" nodeType="clickEffect" presetClass="entr" presetID="1" presetSubtype="0">
+                                  <p:stCondLst>
+                                    <p:cond delay="0"/>
+                                  </p:stCondLst>
+                                  <p:childTnLst>
+                                    <p:set>
+                                      <p:cBhvr>
+                                        <p:cTn dur="1" fill="hold">
+                                          <p:stCondLst>
+                                            <p:cond delay="0"/>
+                                          </p:stCondLst>
+                                        </p:cTn>
+                                        <p:tgtEl>
+                                          <p:spTgt spid="294">
+                                            <p:txEl>
+                                              <p:pRg end="10" st="10"/>
+                                            </p:txEl>
+                                          </p:spTgt>
+                                        </p:tgtEl>
+                                        <p:attrNameLst>
+                                          <p:attrName>style.visibility</p:attrName>
+                                        </p:attrNameLst>
+                                      </p:cBhvr>
+                                      <p:to>
+                                        <p:strVal val="visible"/>
+                                      </p:to>
+                                    </p:set>
+                                  </p:childTnLst>
+                                </p:cTn>
+                              </p:par>
+                            </p:childTnLst>
+                          </p:cTn>
+                        </p:par>
+                      </p:childTnLst>
+                    </p:cTn>
+                  </p:par>
+                  <p:par>
+                    <p:cTn fill="hold">
+                      <p:stCondLst>
+                        <p:cond delay="indefinite"/>
+                      </p:stCondLst>
+                      <p:childTnLst>
+                        <p:par>
+                          <p:cTn fill="hold">
+                            <p:stCondLst>
+                              <p:cond delay="0"/>
+                            </p:stCondLst>
+                            <p:childTnLst>
+                              <p:par>
+                                <p:cTn fill="hold" nodeType="clickEffect" presetClass="entr" presetID="1" presetSubtype="0">
+                                  <p:stCondLst>
+                                    <p:cond delay="0"/>
+                                  </p:stCondLst>
+                                  <p:childTnLst>
+                                    <p:set>
+                                      <p:cBhvr>
+                                        <p:cTn dur="1" fill="hold">
+                                          <p:stCondLst>
+                                            <p:cond delay="0"/>
+                                          </p:stCondLst>
+                                        </p:cTn>
+                                        <p:tgtEl>
+                                          <p:spTgt spid="294">
+                                            <p:txEl>
+                                              <p:pRg end="11" st="11"/>
+                                            </p:txEl>
+                                          </p:spTgt>
+                                        </p:tgtEl>
+                                        <p:attrNameLst>
+                                          <p:attrName>style.visibility</p:attrName>
+                                        </p:attrNameLst>
+                                      </p:cBhvr>
+                                      <p:to>
+                                        <p:strVal val="visible"/>
+                                      </p:to>
+                                    </p:set>
+                                  </p:childTnLst>
+                                </p:cTn>
+                              </p:par>
+                            </p:childTnLst>
+                          </p:cTn>
+                        </p:par>
+                      </p:childTnLst>
+                    </p:cTn>
+                  </p:par>
+                  <p:par>
+                    <p:cTn fill="hold">
+                      <p:stCondLst>
+                        <p:cond delay="indefinite"/>
+                      </p:stCondLst>
+                      <p:childTnLst>
+                        <p:par>
+                          <p:cTn fill="hold">
+                            <p:stCondLst>
+                              <p:cond delay="0"/>
+                            </p:stCondLst>
+                            <p:childTnLst>
+                              <p:par>
+                                <p:cTn fill="hold" nodeType="clickEffect" presetClass="entr" presetID="1" presetSubtype="0">
+                                  <p:stCondLst>
+                                    <p:cond delay="0"/>
+                                  </p:stCondLst>
+                                  <p:childTnLst>
+                                    <p:set>
+                                      <p:cBhvr>
+                                        <p:cTn dur="1" fill="hold">
+                                          <p:stCondLst>
+                                            <p:cond delay="0"/>
+                                          </p:stCondLst>
+                                        </p:cTn>
+                                        <p:tgtEl>
+                                          <p:spTgt spid="294">
+                                            <p:txEl>
+                                              <p:pRg end="12" st="12"/>
+                                            </p:txEl>
+                                          </p:spTgt>
+                                        </p:tgtEl>
+                                        <p:attrNameLst>
+                                          <p:attrName>style.visibility</p:attrName>
+                                        </p:attrNameLst>
+                                      </p:cBhvr>
+                                      <p:to>
+                                        <p:strVal val="visible"/>
+                                      </p:to>
+                                    </p:set>
+                                  </p:childTnLst>
+                                </p:cTn>
+                              </p:par>
+                            </p:childTnLst>
+                          </p:cTn>
+                        </p:par>
+                      </p:childTnLst>
+                    </p:cTn>
+                  </p:par>
+                </p:childTnLst>
+              </p:cTn>
+              <p:prevCondLst>
+                <p:cond evt="onPrev">
+                  <p:tgtEl>
+                    <p:sldTgt/>
+                  </p:tgtEl>
+                </p:cond>
+              </p:prevCondLst>
+              <p:nextCondLst>
+                <p:cond evt="onNext">
+                  <p:tgtEl>
+                    <p:sldTgt/>
+                  </p:tgtEl>
+                </p:cond>
+              </p:nextCondLst>
+            </p:seq>
+          </p:childTnLst>
+        </p:cTn>
+      </p:par>
+    </p:tnLst>
+  </p:timing>
 </p:sld>
 </file>
 
